--- a/content/W04/D5/slides/C2_W04_D05_half1_STUDENT.pptx
+++ b/content/W04/D5/slides/C2_W04_D05_half1_STUDENT.pptx
@@ -856,7 +856,7 @@
           <a:lstStyle/>
           <a:p>
             <a:r>
-              <a:t>LIVE, 5 minutes. Diwali came eight days earlier in 2025, so every calendar copy is a week out.</a:t>
+              <a:t>LIVE, 5 minutes. Diwali's week came one week earlier in 2025, so every calendar copy is a week out.</a:t>
             </a:r>
           </a:p>
           <a:p>

--- a/content/W04/D5/slides/C2_W04_D05_half1_STUDENT.pptx
+++ b/content/W04/D5/slides/C2_W04_D05_half1_STUDENT.pptx
@@ -44,6 +44,7 @@
     <p:sldId id="292" r:id="rId44"/>
     <p:sldId id="293" r:id="rId45"/>
     <p:sldId id="294" r:id="rId46"/>
+    <p:sldId id="295" r:id="rId47"/>
   </p:sldIdLst>
   <p:sldSz cx="12191695" cy="6858000" type="screen4x3"/>
   <p:notesSz cx="6858000" cy="9144000"/>
@@ -550,12 +551,12 @@
           </a:p>
           <a:p>
             <a:r>
-              <a:t>place the festival and price the plan. Define two words as they appear: a packer-shift is</a:t>
-            </a:r>
-          </a:p>
-          <a:p>
-            <a:r>
-              <a:t>one packer working one shift, and a forecast is a number for a week nobody has seen yet. Point at</a:t>
+              <a:t>place the festival and price the plan. Define one word as it appears: a forecast is a number for</a:t>
+            </a:r>
+          </a:p>
+          <a:p>
+            <a:r>
+              <a:t>a week nobody has seen yet. Point at</a:t>
             </a:r>
           </a:p>
           <a:p>
@@ -1240,12 +1241,12 @@
           <a:lstStyle/>
           <a:p>
             <a:r>
-              <a:t>LIVE, 4 minutes. The 91 weeks before are the training weeks. Point at the August sale inside the</a:t>
-            </a:r>
-          </a:p>
-          <a:p>
-            <a:r>
-              <a:t>hidden weeks: a copy of last year knows about it, naive does not. Explorer: scene F2, the split</a:t>
+              <a:t>LIVE, 4 minutes. Thirteen hidden weeks cover the eight-week horizon with room. Point at the</a:t>
+            </a:r>
+          </a:p>
+          <a:p>
+            <a:r>
+              <a:t>August sale inside the hidden weeks: a copy of last year knows about it, naive does not. Explorer: scene F2, the split</a:t>
             </a:r>
           </a:p>
           <a:p>
@@ -1320,12 +1321,12 @@
           <a:lstStyle/>
           <a:p>
             <a:r>
-              <a:t>LIVE, 3 minutes. Work the toy aloud. Mention MAPE as the percent version and why the plan does not</a:t>
-            </a:r>
-          </a:p>
-          <a:p>
-            <a:r>
-              <a:t>use it: the costs are per shipment. Transition: the vote.</a:t>
+              <a:t>LIVE, 3 minutes. Work the toy aloud. MAPE divides by the actual, so a week that ships almost</a:t>
+            </a:r>
+          </a:p>
+          <a:p>
+            <a:r>
+              <a:t>nothing makes it explode. Transition: the vote.</a:t>
             </a:r>
           </a:p>
         </p:txBody>
@@ -1635,12 +1636,12 @@
           <a:lstStyle/>
           <a:p>
             <a:r>
-              <a:t>LIVE, 3 minutes. In notebook 02 every learner scores the vendor in an empty cell first; vote after</a:t>
-            </a:r>
-          </a:p>
-          <a:p>
-            <a:r>
-              <a:t>the cell runs, before this slide's answer. Transition: the answer.</a:t>
+              <a:t>LIVE, 3 minutes. Vote first. Then every learner types the vendor's score into notebook 02's empty</a:t>
+            </a:r>
+          </a:p>
+          <a:p>
+            <a:r>
+              <a:t>cell and reads the number aloud. Transition: the answer.</a:t>
             </a:r>
           </a:p>
         </p:txBody>
@@ -2545,12 +2546,17 @@
           <a:lstStyle/>
           <a:p>
             <a:r>
-              <a:t>LIVE, 5 minutes. This back-test is the only festival the data can test the rules on. The vendor</a:t>
-            </a:r>
-          </a:p>
-          <a:p>
-            <a:r>
-              <a:t>has no festive forecast to score, only its fit. Transition: what plus 22 and plus 4 measure.</a:t>
+              <a:t>LIVE, 5 minutes. This back-test is the only festival the data can test the rules on, so it</a:t>
+            </a:r>
+          </a:p>
+          <a:p>
+            <a:r>
+              <a:t>settles placement and leaves the size of the error open. The vendor has no festive forecast to</a:t>
+            </a:r>
+          </a:p>
+          <a:p>
+            <a:r>
+              <a:t>score, only its fit. Transition: what plus 22 and plus 4 measure.</a:t>
             </a:r>
           </a:p>
         </p:txBody>
@@ -2700,17 +2706,27 @@
           <a:lstStyle/>
           <a:p>
             <a:r>
-              <a:t>LIVE, 6 minutes. Read the two cost curves, then the total; its lowest point sits right of zero.</a:t>
-            </a:r>
-          </a:p>
-          <a:p>
-            <a:r>
-              <a:t>If the late cost rises toward Rs 40, the line moves further right. Explorer: scene F4.</a:t>
-            </a:r>
-          </a:p>
-          <a:p>
-            <a:r>
-              <a:t>Transition: the plan in shifts.</a:t>
+              <a:t>LIVE, 6 minutes. Work the 100 weeks on the board first, then read the curve: the average cost of</a:t>
+            </a:r>
+          </a:p>
+          <a:p>
+            <a:r>
+              <a:t>the week of 19 October with each of the thirteen hidden-week misses tried as its demand. The total</a:t>
+            </a:r>
+          </a:p>
+          <a:p>
+            <a:r>
+              <a:t>is lowest between 2 and 3 percent above the forecast. The rule is named after a seller deciding</a:t>
+            </a:r>
+          </a:p>
+          <a:p>
+            <a:r>
+              <a:t>how many newspapers to stock. If the late cost rises toward Rs 40, the low point moves right.</a:t>
+            </a:r>
+          </a:p>
+          <a:p>
+            <a:r>
+              <a:t>Explorer: scene F4. Transition: reading the 0.82 off thirteen weeks.</a:t>
             </a:r>
           </a:p>
         </p:txBody>
@@ -2780,17 +2796,17 @@
           <a:lstStyle/>
           <a:p>
             <a:r>
-              <a:t>LIVE, 6 minutes. Walk the first two rows aloud: 344,448 times 1.026 is 353,404, over 120 and rounded</a:t>
-            </a:r>
-          </a:p>
-          <a:p>
-            <a:r>
-              <a:t>up is 2,946 shifts. A packer-shift is one packer for one shift; how shifts become people depends on the roster,</a:t>
-            </a:r>
-          </a:p>
-          <a:p>
-            <a:r>
-              <a:t>which the ticket does not give. Transition: what the other plans would cost.</a:t>
+              <a:t>LIVE, 4 minutes. Point at the 10th and 11th dots. With thirteen weeks the true point could sit</a:t>
+            </a:r>
+          </a:p>
+          <a:p>
+            <a:r>
+              <a:t>anywhere from about 2 to 3 percent, and the curve on S32 is nearly flat there. Notebook 03 prints</a:t>
+            </a:r>
+          </a:p>
+          <a:p>
+            <a:r>
+              <a:t>the sorted list. Transition: the plan in shifts.</a:t>
             </a:r>
           </a:p>
         </p:txBody>
@@ -2860,12 +2876,17 @@
           <a:lstStyle/>
           <a:p>
             <a:r>
-              <a:t>LIVE, 4 minutes. The bot's and finance's costs are mostly late shipments in the weeks of 19</a:t>
-            </a:r>
-          </a:p>
-          <a:p>
-            <a:r>
-              <a:t>October to 2 November. Transition: what the data cannot tell us.</a:t>
+              <a:t>LIVE, 6 minutes. Walk the first two rows aloud: 344,448 times 1.026 is 353,404, over 120 and rounded</a:t>
+            </a:r>
+          </a:p>
+          <a:p>
+            <a:r>
+              <a:t>up is 2,946 shifts. A packer-shift is one packer for one shift; how shifts become people depends on the roster,</a:t>
+            </a:r>
+          </a:p>
+          <a:p>
+            <a:r>
+              <a:t>which the ticket does not give. Transition: what the other plans would cost.</a:t>
             </a:r>
           </a:p>
         </p:txBody>
@@ -2935,17 +2956,12 @@
           <a:lstStyle/>
           <a:p>
             <a:r>
-              <a:t>LIVE, 5 minutes. One doubt at a time, each with the fact that would settle it. The FADA figure is</a:t>
-            </a:r>
-          </a:p>
-          <a:p>
-            <a:r>
-              <a:t>a national series; it shows a festive month confounded by a tax change, a warning for any model</a:t>
-            </a:r>
-          </a:p>
-          <a:p>
-            <a:r>
-              <a:t>trained on national data. Transition: the two role cards.</a:t>
+              <a:t>LIVE, 4 minutes. The bot's and finance's costs are mostly late shipments in the weeks of 19</a:t>
+            </a:r>
+          </a:p>
+          <a:p>
+            <a:r>
+              <a:t>October to 2 November. Transition: what the data cannot tell us.</a:t>
             </a:r>
           </a:p>
         </p:txBody>
@@ -3015,12 +3031,17 @@
           <a:lstStyle/>
           <a:p>
             <a:r>
-              <a:t>LIVE, 3 minutes. Each stakeholder is partly right: concede the true part first. The afternoon</a:t>
-            </a:r>
-          </a:p>
-          <a:p>
-            <a:r>
-              <a:t>writes the staffing note from these three cards. Transition: lunch, then half two.</a:t>
+              <a:t>LIVE, 5 minutes. One doubt at a time, each with the fact that would settle it. The FADA figure is</a:t>
+            </a:r>
+          </a:p>
+          <a:p>
+            <a:r>
+              <a:t>a national series; it shows a festive month confounded by a tax change, a warning for any model</a:t>
+            </a:r>
+          </a:p>
+          <a:p>
+            <a:r>
+              <a:t>trained on national data. Transition: the two role cards.</a:t>
             </a:r>
           </a:p>
         </p:txBody>
@@ -3120,6 +3141,81 @@
 </p:notes>
 </file>
 
+<file path=ppt/notesSlides/notesSlide40.xml><?xml version="1.0" encoding="utf-8"?>
+<p:notes xmlns:a="http://schemas.openxmlformats.org/drawingml/2006/main" xmlns:p="http://schemas.openxmlformats.org/presentationml/2006/main" xmlns:r="http://schemas.openxmlformats.org/officeDocument/2006/relationships">
+  <p:cSld>
+    <p:spTree>
+      <p:nvGrpSpPr>
+        <p:cNvPr id="1" name=""/>
+        <p:cNvGrpSpPr/>
+        <p:nvPr/>
+      </p:nvGrpSpPr>
+      <p:grpSpPr>
+        <a:xfrm>
+          <a:off x="0" y="0"/>
+          <a:ext cx="0" cy="0"/>
+          <a:chOff x="0" y="0"/>
+          <a:chExt cx="0" cy="0"/>
+        </a:xfrm>
+      </p:grpSpPr>
+      <p:sp>
+        <p:nvSpPr>
+          <p:cNvPr id="2" name="Slide Image Placeholder 1"/>
+          <p:cNvSpPr>
+            <a:spLocks noGrp="1"/>
+          </p:cNvSpPr>
+          <p:nvPr>
+            <p:ph type="sldImg" idx="2"/>
+          </p:nvPr>
+        </p:nvSpPr>
+        <p:spPr/>
+      </p:sp>
+      <p:sp>
+        <p:nvSpPr>
+          <p:cNvPr id="3" name="Notes Placeholder 2"/>
+          <p:cNvSpPr>
+            <a:spLocks noGrp="1"/>
+          </p:cNvSpPr>
+          <p:nvPr>
+            <p:ph type="body" idx="3" sz="quarter"/>
+          </p:nvPr>
+        </p:nvSpPr>
+        <p:spPr/>
+        <p:txBody>
+          <a:bodyPr/>
+          <a:lstStyle/>
+          <a:p>
+            <a:r>
+              <a:t>LIVE, 3 minutes. Each stakeholder is partly right: concede the true part first. The afternoon</a:t>
+            </a:r>
+          </a:p>
+          <a:p>
+            <a:r>
+              <a:t>writes the staffing note from these three cards. Transition: lunch, then half two.</a:t>
+            </a:r>
+          </a:p>
+        </p:txBody>
+      </p:sp>
+      <p:sp>
+        <p:nvSpPr>
+          <p:cNvPr id="4" name="Slide Number Placeholder 3"/>
+          <p:cNvSpPr>
+            <a:spLocks noGrp="1"/>
+          </p:cNvSpPr>
+          <p:nvPr>
+            <p:ph type="sldNum" idx="5" sz="quarter"/>
+          </p:nvPr>
+        </p:nvSpPr>
+        <p:spPr/>
+      </p:sp>
+    </p:spTree>
+  </p:cSld>
+  <p:clrMapOvr>
+    <a:masterClrMapping/>
+  </p:clrMapOvr>
+</p:notes>
+</file>
+
 <file path=ppt/notesSlides/notesSlide5.xml><?xml version="1.0" encoding="utf-8"?>
 <p:notes xmlns:a="http://schemas.openxmlformats.org/drawingml/2006/main" xmlns:p="http://schemas.openxmlformats.org/presentationml/2006/main" xmlns:r="http://schemas.openxmlformats.org/officeDocument/2006/relationships">
   <p:cSld>
@@ -3315,12 +3411,12 @@
           <a:lstStyle/>
           <a:p>
             <a:r>
-              <a:t>LIVE, 5 minutes. Count aloud left to right, StatQuest style. Parcels leave the centre before the</a:t>
-            </a:r>
-          </a:p>
-          <a:p>
-            <a:r>
-              <a:t>festival so they arrive in time, which is why the peak comes early. If most of the room voted a,</a:t>
+              <a:t>LIVE, 5 minutes. Count aloud left to right, StatQuest style. Parcels leave the centre with the</a:t>
+            </a:r>
+          </a:p>
+          <a:p>
+            <a:r>
+              <a:t>sale, before the festival, so they arrive in time, which is why the peak comes early. If most of the room voted a,</a:t>
             </a:r>
           </a:p>
           <a:p>
@@ -3395,17 +3491,27 @@
           <a:lstStyle/>
           <a:p>
             <a:r>
-              <a:t>LIVE, 3 minutes. 3Blue1Brown's move: the picture first, the names after. The real series has all</a:t>
-            </a:r>
-          </a:p>
-          <a:p>
-            <a:r>
-              <a:t>four: a growth of about 4 percent a year, the festival, the week holding the 1st of a month and a</a:t>
-            </a:r>
-          </a:p>
-          <a:p>
-            <a:r>
-              <a:t>wobble of a few percent. Explorer: scene F1, the season slider. Transition: four rules.</a:t>
+              <a:t>LIVE, 3 minutes. 3Blue1Brown's move: the picture first, the names after. The real series has a</a:t>
+            </a:r>
+          </a:p>
+          <a:p>
+            <a:r>
+              <a:t>growth of about 4 percent a year (trend), two seasons, the festival each year and the week holding</a:t>
+            </a:r>
+          </a:p>
+          <a:p>
+            <a:r>
+              <a:t>the 1st of each month, no cycle two years can show, and a wobble of a few percent (noise). The</a:t>
+            </a:r>
+          </a:p>
+          <a:p>
+            <a:r>
+              <a:t>definitions follow Forecasting: Principles and Practice, section 2.3. Explorer: scene F1, the</a:t>
+            </a:r>
+          </a:p>
+          <a:p>
+            <a:r>
+              <a:t>season slider. Transition: four rules.</a:t>
             </a:r>
           </a:p>
         </p:txBody>
@@ -3475,17 +3581,22 @@
           <a:lstStyle/>
           <a:p>
             <a:r>
-              <a:t>LIVE, 4 minutes. Read each rule as one sentence a shift supervisor could repeat. Same week last</a:t>
-            </a:r>
-          </a:p>
-          <a:p>
-            <a:r>
-              <a:t>year is the house bot of the tournament. Festival-aligned adds the 4 percent a year the centre</a:t>
-            </a:r>
-          </a:p>
-          <a:p>
-            <a:r>
-              <a:t>grew. Transition: the three rules on one real week.</a:t>
+              <a:t>LIVE, 4 minutes. Read each rule as one sentence a shift supervisor could repeat. A baseline is a</a:t>
+            </a:r>
+          </a:p>
+          <a:p>
+            <a:r>
+              <a:t>simple rule any model must beat, and the house bot is the tournament's. The 4 percent is measured,</a:t>
+            </a:r>
+          </a:p>
+          <a:p>
+            <a:r>
+              <a:t>not borrowed from finance: notebook 02 sets the latest 39 training weeks against the same weeks a</a:t>
+            </a:r>
+          </a:p>
+          <a:p>
+            <a:r>
+              <a:t>year earlier and gets 4.0 percent. Transition: the three rules on one real week.</a:t>
             </a:r>
           </a:p>
         </p:txBody>
@@ -6724,7 +6835,7 @@
         </p:nvGraphicFramePr>
         <p:xfrm>
           <a:off x="530352" y="1682496"/>
-          <a:ext cx="11130990" cy="3566160"/>
+          <a:ext cx="11130990" cy="3721608"/>
         </p:xfrm>
         <a:graphic>
           <a:graphicData uri="http://schemas.openxmlformats.org/drawingml/2006/table">
@@ -6733,8 +6844,8 @@
                 <a:tableStyleId>{2D5ABB26-0587-4C30-8999-92F81FD0307C}</a:tableStyleId>
               </a:tblPr>
               <a:tblGrid>
-                <a:gridCol w="3198111"/>
-                <a:gridCol w="7932879"/>
+                <a:gridCol w="2388790"/>
+                <a:gridCol w="8742200"/>
               </a:tblGrid>
               <a:tr h="310896">
                 <a:tc>
@@ -6817,7 +6928,7 @@
                           </a:solidFill>
                           <a:latin typeface="Calibri"/>
                         </a:rPr>
-                        <a:t>Flipkart, the Lucknow fulfilment centre: outbound shipments and packer shifts</a:t>
+                        <a:t>Flipkart, the Lucknow fulfilment centre (FC), the warehouse where orders are packed and shipped: outbound shipments and packer shifts</a:t>
                       </a:r>
                     </a:p>
                   </a:txBody>
@@ -6828,7 +6939,7 @@
                   </a:tcPr>
                 </a:tc>
               </a:tr>
-              <a:tr h="438912">
+              <a:tr h="310896">
                 <a:tc>
                   <a:txBody>
                     <a:bodyPr/>
@@ -6909,7 +7020,7 @@
                           </a:solidFill>
                           <a:latin typeface="Calibri"/>
                         </a:rPr>
-                        <a:t>Diwali fell on Thursday 31 October 2024 and Monday 20 October 2025, and falls on Sunday 8 November 2026; the three weeks before it run at 1.5, 1.9 and 1.7 times an ordinary week, its own week at 1.4, the week after below ordinary</a:t>
+                        <a:t>Diwali fell on Thursday 31 October 2024 and Monday 20 October 2025, and falls on Sunday 8 November 2026; the calendar table flags each year's festive sale weeks</a:t>
                       </a:r>
                     </a:p>
                   </a:txBody>
@@ -6920,7 +7031,7 @@
                   </a:tcPr>
                 </a:tc>
               </a:tr>
-              <a:tr h="310896">
+              <a:tr h="438912">
                 <a:tc>
                   <a:txBody>
                     <a:bodyPr/>
@@ -6955,7 +7066,7 @@
                           </a:solidFill>
                           <a:latin typeface="Calibri"/>
                         </a:rPr>
-                        <a:t>A vendor's model promises the window 22 percent above last year's; finance's rule is last year's window plus 4 percent</a:t>
+                        <a:t>A vendor's model promises the window, the eight weeks to staff, 22 percent above the same weeks last year; finance's rule is those weeks plus 4 percent: eighteen percentage points apart. The vendor's sponsor, the manager who brought the model in, backs the 22</a:t>
                       </a:r>
                     </a:p>
                   </a:txBody>
@@ -6966,7 +7077,7 @@
                   </a:tcPr>
                 </a:tc>
               </a:tr>
-              <a:tr h="438912">
+              <a:tr h="594360">
                 <a:tc>
                   <a:txBody>
                     <a:bodyPr/>
@@ -7001,7 +7112,7 @@
                           </a:solidFill>
                           <a:latin typeface="Calibri"/>
                         </a:rPr>
-                        <a:t>weekly_shipments (week_start, shipments, packer_shifts_worked, overtime_shifts); vendor_forecast (week_start, vendor_shipments, kind: fitted, holdout or forecast); calendar (week_start, diwali_week, sale_week); costs (item, rs, low, high)</a:t>
+                        <a:t>weekly_shipments (week_start, shipments, packer_shifts_worked, overtime_shifts); vendor_forecast (week_start, vendor_shipments, kind: fitted for weeks the model was built on, holdout for its forecasts of the hidden weeks, forecast for the weeks ahead); calendar (week_start, diwali_week, sale_week); costs (item, rs, low, high)</a:t>
                       </a:r>
                     </a:p>
                   </a:txBody>
@@ -7047,7 +7158,7 @@
                           </a:solidFill>
                           <a:latin typeface="Calibri"/>
                         </a:rPr>
-                        <a:t>An idle packer-shift Rs 650 (range Rs 500 to 800); a late shipment Rs 25 (range Rs 15 to 40); a packer packs about 120 shipments a shift</a:t>
+                        <a:t>A packer packs about 120 shipments a shift; a packer-shift is one packer working one shift. A late shipment costs Rs 25 (range Rs 15 to 40). An idle packer-shift costs Rs 650 (range Rs 500 to 800), so a spare shipment, planned for and never shipped, costs Rs 650 / 120 = Rs 5.42</a:t>
                       </a:r>
                     </a:p>
                   </a:txBody>
@@ -7162,8 +7273,8 @@
         </p:nvSpPr>
         <p:spPr>
           <a:xfrm>
-            <a:off x="530352" y="5504688"/>
-            <a:ext cx="11130991" cy="495807"/>
+            <a:off x="530352" y="5660136"/>
+            <a:ext cx="11130991" cy="409448"/>
           </a:xfrm>
           <a:prstGeom prst="rect">
             <a:avLst/>
@@ -7178,11 +7289,11 @@
           <a:p>
             <a:pPr>
               <a:spcAft>
-                <a:spcPts val="800"/>
+                <a:spcPts val="500"/>
               </a:spcAft>
             </a:pPr>
             <a:r>
-              <a:rPr sz="1600" b="0" i="0">
+              <a:rPr sz="1100" b="0" i="0">
                 <a:solidFill>
                   <a:srgbClr val="1A1440"/>
                 </a:solidFill>
@@ -7460,7 +7571,7 @@
                 </a:solidFill>
                 <a:latin typeface="Calibri"/>
               </a:rPr>
-              <a:t>S1  ·  1 / 39</a:t>
+              <a:t>S1  ·  1 / 40</a:t>
             </a:r>
           </a:p>
         </p:txBody>
@@ -8881,7 +8992,7 @@
                 </a:solidFill>
                 <a:latin typeface="Calibri"/>
               </a:rPr>
-              <a:t>S9  ·  10 / 39</a:t>
+              <a:t>S9  ·  10 / 40</a:t>
             </a:r>
           </a:p>
         </p:txBody>
@@ -9821,7 +9932,7 @@
                 </a:solidFill>
                 <a:latin typeface="Calibri"/>
               </a:rPr>
-              <a:t>S10  ·  11 / 39</a:t>
+              <a:t>S10  ·  11 / 40</a:t>
             </a:r>
           </a:p>
         </p:txBody>
@@ -10584,7 +10695,7 @@
                 </a:solidFill>
                 <a:latin typeface="Calibri"/>
               </a:rPr>
-              <a:t>S11  ·  12 / 39</a:t>
+              <a:t>S11  ·  12 / 40</a:t>
             </a:r>
           </a:p>
         </p:txBody>
@@ -11190,7 +11301,7 @@
                 </a:solidFill>
                 <a:latin typeface="Calibri"/>
               </a:rPr>
-              <a:t>S12  ·  13 / 39</a:t>
+              <a:t>S12  ·  13 / 40</a:t>
             </a:r>
           </a:p>
         </p:txBody>
@@ -11446,7 +11557,7 @@
         </p:nvGraphicFramePr>
         <p:xfrm>
           <a:off x="530352" y="1956816"/>
-          <a:ext cx="11130990" cy="2076704"/>
+          <a:ext cx="11130990" cy="2560320"/>
         </p:xfrm>
         <a:graphic>
           <a:graphicData uri="http://schemas.openxmlformats.org/drawingml/2006/table">
@@ -11458,7 +11569,7 @@
                 <a:gridCol w="4534868"/>
                 <a:gridCol w="6596122"/>
               </a:tblGrid>
-              <a:tr h="853440">
+              <a:tr h="1337056">
                 <a:tc>
                   <a:txBody>
                     <a:bodyPr/>
@@ -11493,7 +11604,7 @@
                           </a:solidFill>
                           <a:latin typeface="Calibri"/>
                         </a:rPr>
-                        <a:t>Ekart added 14 million cubic feet of warehousing space ahead of The Big Billion Days, and more than 2.5 lakh direct and indirect jobs were created for the festive season (F6, checked 12 October 2026)</a:t>
+                        <a:t>Ekart, the supply chain behind Flipkart's deliveries, added 14 million cubic feet of warehousing space ahead of The Big Billion Days, Flipkart's yearly festive sale, and more than 2.5 lakh direct and indirect festive jobs were created (Flipkart's announcement, checked 12 October 2026)</a:t>
                       </a:r>
                     </a:p>
                   </a:txBody>
@@ -11539,7 +11650,7 @@
                           </a:solidFill>
                           <a:latin typeface="Calibri"/>
                         </a:rPr>
-                        <a:t>Before the sale opened on 9 October 2026, so the space and the people rested on a forecast made weeks earlier</a:t>
+                        <a:t>Before the sale opened, so the space and the people rested on a forecast made weeks earlier</a:t>
                       </a:r>
                     </a:p>
                   </a:txBody>
@@ -11867,7 +11978,7 @@
                 </a:solidFill>
                 <a:latin typeface="Calibri"/>
               </a:rPr>
-              <a:t>S13  ·  14 / 39</a:t>
+              <a:t>S13  ·  14 / 40</a:t>
             </a:r>
           </a:p>
         </p:txBody>
@@ -12146,7 +12257,7 @@
         <p:spPr>
           <a:xfrm>
             <a:off x="530352" y="3703320"/>
-            <a:ext cx="11130991" cy="1048512"/>
+            <a:ext cx="11130991" cy="1324864"/>
           </a:xfrm>
           <a:prstGeom prst="rect">
             <a:avLst/>
@@ -12189,7 +12300,7 @@
                 </a:solidFill>
                 <a:latin typeface="Calibri"/>
               </a:rPr>
-              <a:t> the computer copied last year's dates, and the festival moved, so its busiest week came at the wrong time. On Walmart's M5 data the same-period copy scored 0.847 against 1.752 for the naive, lower being better (F2, checked 12 October 2026).</a:t>
+              <a:t> the computer copied last year's dates, and the festival moved, so its busiest week came at the wrong time. In the M5 forecasting competition, on Walmart's daily sales of 3,049 products, the house bot's rule (there, the same weekday last week) scored 0.847 against 1.752 for naive, lower being better (M5 results workbook, checked 12 October 2026).</a:t>
             </a:r>
           </a:p>
         </p:txBody>
@@ -12461,7 +12572,7 @@
                 </a:solidFill>
                 <a:latin typeface="Calibri"/>
               </a:rPr>
-              <a:t>S14  ·  15 / 39</a:t>
+              <a:t>S14  ·  15 / 40</a:t>
             </a:r>
           </a:p>
         </p:txBody>
@@ -12972,7 +13083,7 @@
                 </a:solidFill>
                 <a:latin typeface="Calibri"/>
               </a:rPr>
-              <a:t>16 / 39</a:t>
+              <a:t>16 / 40</a:t>
             </a:r>
           </a:p>
         </p:txBody>
@@ -14415,7 +14526,7 @@
                 </a:solidFill>
                 <a:latin typeface="Calibri"/>
               </a:rPr>
-              <a:t>Rs 25 short, Rs 5.42 spare.</a:t>
+              <a:t>Rs 25 late, Rs 5.42 spare (Rs 650 / 120).</a:t>
             </a:r>
           </a:p>
         </p:txBody>
@@ -14687,7 +14798,7 @@
                 </a:solidFill>
                 <a:latin typeface="Calibri"/>
               </a:rPr>
-              <a:t>S15  ·  17 / 39</a:t>
+              <a:t>S15  ·  17 / 40</a:t>
             </a:r>
           </a:p>
         </p:txBody>
@@ -15021,7 +15132,79 @@
                 </a:solidFill>
                 <a:latin typeface="Calibri"/>
               </a:rPr>
-              <a:t>The plan covers eight weeks, so the test hides more: the thirteen weeks from 29 June to 21 September 2026. Every rule forecasts all thirteen from the week of 22 June, as a planner standing there would have. Forecasting: Principles and Practice puts it this way: the test set should be at least as large as the forecast horizon (FPP3, section 5.8, checked 12 October 2026).</a:t>
+              <a:t>The </a:t>
+            </a:r>
+            <a:r>
+              <a:rPr sz="1600" b="1" i="0">
+                <a:solidFill>
+                  <a:srgbClr val="1A1440"/>
+                </a:solidFill>
+                <a:latin typeface="Calibri"/>
+              </a:rPr>
+              <a:t>hidden weeks</a:t>
+            </a:r>
+            <a:r>
+              <a:rPr sz="1600" b="0" i="0">
+                <a:solidFill>
+                  <a:srgbClr val="1A1440"/>
+                </a:solidFill>
+                <a:latin typeface="Calibri"/>
+              </a:rPr>
+              <a:t> (the hold-out, or test set) are kept from every rule: 29 June to 21 September 2026. The 91 </a:t>
+            </a:r>
+            <a:r>
+              <a:rPr sz="1600" b="1" i="0">
+                <a:solidFill>
+                  <a:srgbClr val="1A1440"/>
+                </a:solidFill>
+                <a:latin typeface="Calibri"/>
+              </a:rPr>
+              <a:t>training weeks</a:t>
+            </a:r>
+            <a:r>
+              <a:rPr sz="1600" b="0" i="0">
+                <a:solidFill>
+                  <a:srgbClr val="1A1440"/>
+                </a:solidFill>
+                <a:latin typeface="Calibri"/>
+              </a:rPr>
+              <a:t> before them are all a rule may see; the last, 22 June, is the </a:t>
+            </a:r>
+            <a:r>
+              <a:rPr sz="1600" b="1" i="0">
+                <a:solidFill>
+                  <a:srgbClr val="1A1440"/>
+                </a:solidFill>
+                <a:latin typeface="Calibri"/>
+              </a:rPr>
+              <a:t>origin</a:t>
+            </a:r>
+            <a:r>
+              <a:rPr sz="1600" b="0" i="0">
+                <a:solidFill>
+                  <a:srgbClr val="1A1440"/>
+                </a:solidFill>
+                <a:latin typeface="Calibri"/>
+              </a:rPr>
+              <a:t> every forecast is made from. The plan's reach, eight weeks, is the </a:t>
+            </a:r>
+            <a:r>
+              <a:rPr sz="1600" b="1" i="0">
+                <a:solidFill>
+                  <a:srgbClr val="1A1440"/>
+                </a:solidFill>
+                <a:latin typeface="Calibri"/>
+              </a:rPr>
+              <a:t>horizon</a:t>
+            </a:r>
+            <a:r>
+              <a:rPr sz="1600" b="0" i="0">
+                <a:solidFill>
+                  <a:srgbClr val="1A1440"/>
+                </a:solidFill>
+                <a:latin typeface="Calibri"/>
+              </a:rPr>
+              <a:t>, and the test should be at least as long (Forecasting: Principles and Practice, section 5.8, checked 12 October 2026).</a:t>
             </a:r>
           </a:p>
         </p:txBody>
@@ -15293,7 +15476,7 @@
                 </a:solidFill>
                 <a:latin typeface="Calibri"/>
               </a:rPr>
-              <a:t>S16  ·  18 / 39</a:t>
+              <a:t>S16  ·  18 / 40</a:t>
             </a:r>
           </a:p>
         </p:txBody>
@@ -15995,7 +16178,7 @@
         <p:spPr>
           <a:xfrm>
             <a:off x="530352" y="3419856"/>
-            <a:ext cx="11130991" cy="772160"/>
+            <a:ext cx="11130991" cy="1324864"/>
           </a:xfrm>
           <a:prstGeom prst="rect">
             <a:avLst/>
@@ -16020,7 +16203,25 @@
                 </a:solidFill>
                 <a:latin typeface="Calibri"/>
               </a:rPr>
-              <a:t>Mean absolute error drops each miss's sign and averages. A percentage error would hide the size of a miss: the same percent is twice the shipments in a peak week. The sign comes back on S22.</a:t>
+              <a:t>Mean absolute error drops each miss's sign and averages. </a:t>
+            </a:r>
+            <a:r>
+              <a:rPr sz="1600" b="1" i="0">
+                <a:solidFill>
+                  <a:srgbClr val="1A1440"/>
+                </a:solidFill>
+                <a:latin typeface="Calibri"/>
+              </a:rPr>
+              <a:t>MAPE</a:t>
+            </a:r>
+            <a:r>
+              <a:rPr sz="1600" b="0" i="0">
+                <a:solidFill>
+                  <a:srgbClr val="1A1440"/>
+                </a:solidFill>
+                <a:latin typeface="Calibri"/>
+              </a:rPr>
+              <a:t>, the mean absolute percentage error, averages misses as percents of what shipped: useful across centres of different sizes, but the costs here are per shipment, and 2 percent of a peak week is twice the shipments of 2 percent of a quiet one. The sign comes back on S22.</a:t>
             </a:r>
           </a:p>
         </p:txBody>
@@ -16292,7 +16493,7 @@
                 </a:solidFill>
                 <a:latin typeface="Calibri"/>
               </a:rPr>
-              <a:t>S17  ·  19 / 39</a:t>
+              <a:t>S17  ·  19 / 40</a:t>
             </a:r>
           </a:p>
         </p:txBody>
@@ -16540,7 +16741,7 @@
       </p:sp>
       <p:pic>
         <p:nvPicPr>
-          <p:cNvPr id="9" name="mermaid diagram" descr="f667176f9687db23.png"/>
+          <p:cNvPr id="9" name="mermaid diagram" descr="49557f3c05cfb8d6.png"/>
           <p:cNvPicPr>
             <a:picLocks noChangeAspect="1"/>
           </p:cNvPicPr>
@@ -16554,8 +16755,8 @@
         </p:blipFill>
         <p:spPr>
           <a:xfrm>
-            <a:off x="2530670" y="1682496"/>
-            <a:ext cx="7130355" cy="4517136"/>
+            <a:off x="530352" y="1956816"/>
+            <a:ext cx="11130991" cy="1924240"/>
           </a:xfrm>
           <a:prstGeom prst="rect">
             <a:avLst/>
@@ -16564,7 +16765,46 @@
       </p:pic>
       <p:sp>
         <p:nvSpPr>
-          <p:cNvPr id="10" name="Oval 9"/>
+          <p:cNvPr id="10" name="TextBox 9"/>
+          <p:cNvSpPr txBox="1"/>
+          <p:nvPr/>
+        </p:nvSpPr>
+        <p:spPr>
+          <a:xfrm>
+            <a:off x="530352" y="4027360"/>
+            <a:ext cx="11130991" cy="495807"/>
+          </a:xfrm>
+          <a:prstGeom prst="rect">
+            <a:avLst/>
+          </a:prstGeom>
+          <a:noFill/>
+        </p:spPr>
+        <p:txBody>
+          <a:bodyPr wrap="square" anchor="t" lIns="0" rIns="0" tIns="0" bIns="0">
+            <a:spAutoFit/>
+          </a:bodyPr>
+          <a:lstStyle/>
+          <a:p>
+            <a:pPr>
+              <a:spcAft>
+                <a:spcPts val="800"/>
+              </a:spcAft>
+            </a:pPr>
+            <a:r>
+              <a:rPr sz="1600" b="0" i="0">
+                <a:solidFill>
+                  <a:srgbClr val="1A1440"/>
+                </a:solidFill>
+                <a:latin typeface="Calibri"/>
+              </a:rPr>
+              <a:t>Each day asked what a number is compared with, and each node carries the number its day moved.</a:t>
+            </a:r>
+          </a:p>
+        </p:txBody>
+      </p:sp>
+      <p:sp>
+        <p:nvSpPr>
+          <p:cNvPr id="11" name="Oval 10"/>
           <p:cNvSpPr/>
           <p:nvPr/>
         </p:nvSpPr>
@@ -16608,7 +16848,7 @@
       </p:sp>
       <p:sp>
         <p:nvSpPr>
-          <p:cNvPr id="11" name="TextBox 10"/>
+          <p:cNvPr id="12" name="TextBox 11"/>
           <p:cNvSpPr txBox="1"/>
           <p:nvPr/>
         </p:nvSpPr>
@@ -16643,7 +16883,7 @@
       </p:sp>
       <p:sp>
         <p:nvSpPr>
-          <p:cNvPr id="12" name="Oval 11"/>
+          <p:cNvPr id="13" name="Oval 12"/>
           <p:cNvSpPr/>
           <p:nvPr/>
         </p:nvSpPr>
@@ -16687,7 +16927,7 @@
       </p:sp>
       <p:sp>
         <p:nvSpPr>
-          <p:cNvPr id="13" name="TextBox 12"/>
+          <p:cNvPr id="14" name="TextBox 13"/>
           <p:cNvSpPr txBox="1"/>
           <p:nvPr/>
         </p:nvSpPr>
@@ -16722,7 +16962,7 @@
       </p:sp>
       <p:sp>
         <p:nvSpPr>
-          <p:cNvPr id="14" name="Oval 13"/>
+          <p:cNvPr id="15" name="Oval 14"/>
           <p:cNvSpPr/>
           <p:nvPr/>
         </p:nvSpPr>
@@ -16766,7 +17006,7 @@
       </p:sp>
       <p:sp>
         <p:nvSpPr>
-          <p:cNvPr id="15" name="TextBox 14"/>
+          <p:cNvPr id="16" name="TextBox 15"/>
           <p:cNvSpPr txBox="1"/>
           <p:nvPr/>
         </p:nvSpPr>
@@ -16801,7 +17041,7 @@
       </p:sp>
       <p:sp>
         <p:nvSpPr>
-          <p:cNvPr id="16" name="TextBox 15"/>
+          <p:cNvPr id="17" name="TextBox 16"/>
           <p:cNvSpPr txBox="1"/>
           <p:nvPr/>
         </p:nvSpPr>
@@ -16829,7 +17069,7 @@
                 </a:solidFill>
                 <a:latin typeface="Calibri"/>
               </a:rPr>
-              <a:t>S2  ·  2 / 39</a:t>
+              <a:t>S2  ·  2 / 40</a:t>
             </a:r>
           </a:p>
         </p:txBody>
@@ -18250,7 +18490,7 @@
                 </a:solidFill>
                 <a:latin typeface="Calibri"/>
               </a:rPr>
-              <a:t>S18  ·  20 / 39</a:t>
+              <a:t>S18  ·  20 / 40</a:t>
             </a:r>
           </a:p>
         </p:txBody>
@@ -18512,8 +18752,8 @@
         </p:blipFill>
         <p:spPr>
           <a:xfrm>
-            <a:off x="1197957" y="1664208"/>
-            <a:ext cx="9795780" cy="3319272"/>
+            <a:off x="1632401" y="1664208"/>
+            <a:ext cx="8926893" cy="3422904"/>
           </a:xfrm>
           <a:prstGeom prst="rect">
             <a:avLst/>
@@ -18528,7 +18768,7 @@
         </p:nvSpPr>
         <p:spPr>
           <a:xfrm>
-            <a:off x="530352" y="5020056"/>
+            <a:off x="530352" y="5123688"/>
             <a:ext cx="11130991" cy="316992"/>
           </a:xfrm>
           <a:prstGeom prst="rect">
@@ -18563,28 +18803,28 @@
         </p:nvSpPr>
         <p:spPr>
           <a:xfrm>
-            <a:off x="530352" y="5346192"/>
-            <a:ext cx="11130991" cy="853440"/>
-          </a:xfrm>
-          <a:prstGeom prst="rect">
-            <a:avLst/>
-          </a:prstGeom>
-          <a:noFill/>
-        </p:spPr>
-        <p:txBody>
-          <a:bodyPr wrap="square" anchor="t" lIns="0" rIns="0" tIns="0" bIns="0">
-            <a:spAutoFit/>
-          </a:bodyPr>
-          <a:lstStyle/>
-          <a:p>
-            <a:r>
-              <a:rPr sz="1400" b="0" i="0">
+            <a:off x="530352" y="5449824"/>
+            <a:ext cx="11130991" cy="749808"/>
+          </a:xfrm>
+          <a:prstGeom prst="rect">
+            <a:avLst/>
+          </a:prstGeom>
+          <a:noFill/>
+        </p:spPr>
+        <p:txBody>
+          <a:bodyPr wrap="square" anchor="t" lIns="0" rIns="0" tIns="0" bIns="0">
+            <a:spAutoFit/>
+          </a:bodyPr>
+          <a:lstStyle/>
+          <a:p>
+            <a:r>
+              <a:rPr sz="1200" b="0" i="0">
                 <a:solidFill>
                   <a:srgbClr val="1A1440"/>
                 </a:solidFill>
                 <a:latin typeface="Calibri"/>
               </a:rPr>
-              <a:t>Festival-aligned and finance's rule miss by 6,615 shipments a week, the house bot by 9,831, drift by 14,842 and naive by 14,923. The tie is honest: no hidden week lies within five weeks of a Diwali, so both rules copy the same week of 2025 and add the same 4 percent. They part only in the festive weeks, which this test does not hold.</a:t>
+              <a:t>Festival-aligned and finance's rule miss by 6,615 shipments a week, the house bot by 9,831, drift by 14,842 and naive by 14,923. The tie is honest: no hidden week falls between five weeks before a Diwali week and four after, so both rules copy the same week of 2025 and add the same 4 percent. They part only in the festive weeks, which this test does not hold.</a:t>
             </a:r>
           </a:p>
         </p:txBody>
@@ -18856,7 +19096,7 @@
                 </a:solidFill>
                 <a:latin typeface="Calibri"/>
               </a:rPr>
-              <a:t>S19  ·  21 / 39</a:t>
+              <a:t>S19  ·  21 / 40</a:t>
             </a:r>
           </a:p>
         </p:txBody>
@@ -19097,7 +19337,7 @@
                 </a:solidFill>
                 <a:latin typeface="Calibri"/>
               </a:rPr>
-              <a:t>The vendor's curve sits within 2 percent of every week it was fitted to. Will it beat the house bot on the hidden weeks?</a:t>
+              <a:t>The vendor's sponsor says its curve sits within 2 percent of every week it was fitted to. Will it beat the house bot on the hidden weeks?</a:t>
             </a:r>
           </a:p>
         </p:txBody>
@@ -20277,7 +20517,7 @@
                 </a:solidFill>
                 <a:latin typeface="Calibri"/>
               </a:rPr>
-              <a:t>S20  ·  22 / 39</a:t>
+              <a:t>S20  ·  22 / 40</a:t>
             </a:r>
           </a:p>
         </p:txBody>
@@ -20539,8 +20779,8 @@
         </p:blipFill>
         <p:spPr>
           <a:xfrm>
-            <a:off x="2194549" y="1664208"/>
-            <a:ext cx="7802595" cy="2933700"/>
+            <a:off x="2052684" y="1664208"/>
+            <a:ext cx="8086326" cy="3040380"/>
           </a:xfrm>
           <a:prstGeom prst="rect">
             <a:avLst/>
@@ -20555,7 +20795,7 @@
         </p:nvSpPr>
         <p:spPr>
           <a:xfrm>
-            <a:off x="530352" y="4634484"/>
+            <a:off x="530352" y="4741164"/>
             <a:ext cx="11130991" cy="316992"/>
           </a:xfrm>
           <a:prstGeom prst="rect">
@@ -20590,8 +20830,8 @@
         </p:nvSpPr>
         <p:spPr>
           <a:xfrm>
-            <a:off x="530352" y="4960620"/>
-            <a:ext cx="11130991" cy="1074420"/>
+            <a:off x="530352" y="5067300"/>
+            <a:ext cx="11130991" cy="967740"/>
           </a:xfrm>
           <a:prstGeom prst="roundRect">
             <a:avLst>
@@ -20638,8 +20878,8 @@
         </p:nvSpPr>
         <p:spPr>
           <a:xfrm>
-            <a:off x="676656" y="5088636"/>
-            <a:ext cx="45720" cy="818388"/>
+            <a:off x="676656" y="5195316"/>
+            <a:ext cx="45720" cy="711708"/>
           </a:xfrm>
           <a:prstGeom prst="roundRect">
             <a:avLst>
@@ -20684,8 +20924,8 @@
         </p:nvSpPr>
         <p:spPr>
           <a:xfrm>
-            <a:off x="877824" y="5079492"/>
-            <a:ext cx="10564063" cy="891540"/>
+            <a:off x="877824" y="5186172"/>
+            <a:ext cx="10564063" cy="784860"/>
           </a:xfrm>
           <a:prstGeom prst="rect">
             <a:avLst/>
@@ -20699,7 +20939,7 @@
           <a:lstStyle/>
           <a:p>
             <a:r>
-              <a:rPr sz="1500" b="1">
+              <a:rPr sz="1300" b="1">
                 <a:solidFill>
                   <a:srgbClr val="5B3FD6"/>
                 </a:solidFill>
@@ -20708,16 +20948,16 @@
               <a:t>The plausible wrong number: </a:t>
             </a:r>
             <a:r>
-              <a:rPr sz="1500" b="0" i="0">
+              <a:rPr sz="1300" b="0" i="0">
                 <a:solidFill>
                   <a:srgbClr val="1A1440"/>
                 </a:solidFill>
                 <a:latin typeface="Calibri"/>
               </a:rPr>
-              <a:t>"within 1.4 percent of every week, so its plus 22 can be trusted." </a:t>
-            </a:r>
-            <a:r>
-              <a:rPr sz="1500" b="1" i="0">
+              <a:t>"within 2 percent of every week, so its plus 22 can be trusted"; its worst fitted week is 1.4 percent off. </a:t>
+            </a:r>
+            <a:r>
+              <a:rPr sz="1300" b="1" i="0">
                 <a:solidFill>
                   <a:srgbClr val="1A1440"/>
                 </a:solidFill>
@@ -20726,7 +20966,7 @@
               <a:t>The decision it misleads:</a:t>
             </a:r>
             <a:r>
-              <a:rPr sz="1500" b="0" i="0">
+              <a:rPr sz="1300" b="0" i="0">
                 <a:solidFill>
                   <a:srgbClr val="1A1440"/>
                 </a:solidFill>
@@ -20735,7 +20975,7 @@
               <a:t> a plan 22 percent above last year. </a:t>
             </a:r>
             <a:r>
-              <a:rPr sz="1500" b="1" i="0">
+              <a:rPr sz="1300" b="1" i="0">
                 <a:solidFill>
                   <a:srgbClr val="1A1440"/>
                 </a:solidFill>
@@ -20744,7 +20984,7 @@
               <a:t>The check:</a:t>
             </a:r>
             <a:r>
-              <a:rPr sz="1500" b="0" i="0">
+              <a:rPr sz="1300" b="0" i="0">
                 <a:solidFill>
                   <a:srgbClr val="1A1440"/>
                 </a:solidFill>
@@ -20753,7 +20993,7 @@
               <a:t> its error on weeks it never saw, 16,400 a week, 67 percent worse than the house bot. </a:t>
             </a:r>
             <a:r>
-              <a:rPr sz="1500" b="1" i="0">
+              <a:rPr sz="1300" b="1" i="0">
                 <a:solidFill>
                   <a:srgbClr val="1A1440"/>
                 </a:solidFill>
@@ -20762,7 +21002,7 @@
               <a:t>The fix:</a:t>
             </a:r>
             <a:r>
-              <a:rPr sz="1500" b="0" i="0">
+              <a:rPr sz="1300" b="0" i="0">
                 <a:solidFill>
                   <a:srgbClr val="1A1440"/>
                 </a:solidFill>
@@ -21040,7 +21280,7 @@
                 </a:solidFill>
                 <a:latin typeface="Calibri"/>
               </a:rPr>
-              <a:t>S21  ·  23 / 39</a:t>
+              <a:t>S21  ·  23 / 40</a:t>
             </a:r>
           </a:p>
         </p:txBody>
@@ -22461,7 +22701,7 @@
                 </a:solidFill>
                 <a:latin typeface="Calibri"/>
               </a:rPr>
-              <a:t>S22  ·  24 / 39</a:t>
+              <a:t>S22  ·  24 / 40</a:t>
             </a:r>
           </a:p>
         </p:txBody>
@@ -22723,8 +22963,8 @@
         </p:blipFill>
         <p:spPr>
           <a:xfrm>
-            <a:off x="1984655" y="1664208"/>
-            <a:ext cx="8222384" cy="2939288"/>
+            <a:off x="2034912" y="1664208"/>
+            <a:ext cx="8121869" cy="3077464"/>
           </a:xfrm>
           <a:prstGeom prst="rect">
             <a:avLst/>
@@ -22739,7 +22979,7 @@
         </p:nvSpPr>
         <p:spPr>
           <a:xfrm>
-            <a:off x="530352" y="4640072"/>
+            <a:off x="530352" y="4778248"/>
             <a:ext cx="11130991" cy="316992"/>
           </a:xfrm>
           <a:prstGeom prst="rect">
@@ -22774,28 +23014,28 @@
         </p:nvSpPr>
         <p:spPr>
           <a:xfrm>
-            <a:off x="530352" y="4966208"/>
-            <a:ext cx="11130991" cy="1233424"/>
-          </a:xfrm>
-          <a:prstGeom prst="rect">
-            <a:avLst/>
-          </a:prstGeom>
-          <a:noFill/>
-        </p:spPr>
-        <p:txBody>
-          <a:bodyPr wrap="square" anchor="t" lIns="0" rIns="0" tIns="0" bIns="0">
-            <a:spAutoFit/>
-          </a:bodyPr>
-          <a:lstStyle/>
-          <a:p>
-            <a:r>
-              <a:rPr sz="1600" b="0" i="0">
+            <a:off x="530352" y="5104384"/>
+            <a:ext cx="11130991" cy="1095247"/>
+          </a:xfrm>
+          <a:prstGeom prst="rect">
+            <a:avLst/>
+          </a:prstGeom>
+          <a:noFill/>
+        </p:spPr>
+        <p:txBody>
+          <a:bodyPr wrap="square" anchor="t" lIns="0" rIns="0" tIns="0" bIns="0">
+            <a:spAutoFit/>
+          </a:bodyPr>
+          <a:lstStyle/>
+          <a:p>
+            <a:r>
+              <a:rPr sz="1400" b="0" i="0">
                 <a:solidFill>
                   <a:srgbClr val="1A1440"/>
                 </a:solidFill>
                 <a:latin typeface="Calibri"/>
               </a:rPr>
-              <a:t>The vendor errs high on 12 of 13 weeks, and spare capacity is the cheap kind of miss: Rs 11.9 lakh against Rs 13.5 lakh for festival-aligned. The house bot errs low on 11 of 13 weeks and costs Rs 30.5 lakh, more than naive's Rs 28.8 lakh, with a lower MAE. Priced, a forecast that errs high can cost less than one that misses less.</a:t>
+              <a:t>The vendor errs high on 12 of 13 weeks, and a spare shipment is the cheap kind of miss: Rs 11.9 lakh against Rs 13.5 lakh for festival-aligned, each added over the thirteen weeks. The house bot errs low on 11 of 13 weeks and costs Rs 30.5 lakh, more than naive's Rs 28.8 lakh, with a lower MAE. Priced, a forecast that errs high can cost less than one that misses less.</a:t>
             </a:r>
           </a:p>
         </p:txBody>
@@ -23067,7 +23307,7 @@
                 </a:solidFill>
                 <a:latin typeface="Calibri"/>
               </a:rPr>
-              <a:t>S23  ·  25 / 39</a:t>
+              <a:t>S23  ·  25 / 40</a:t>
             </a:r>
           </a:p>
         </p:txBody>
@@ -23500,7 +23740,7 @@
                 </a:solidFill>
                 <a:latin typeface="Calibri"/>
               </a:rPr>
-              <a:t>Its lean was never chosen</a:t>
+              <a:t>Nobody chose how high it runs</a:t>
             </a:r>
           </a:p>
         </p:txBody>
@@ -23514,7 +23754,7 @@
         <p:spPr>
           <a:xfrm>
             <a:off x="731519" y="3534664"/>
-            <a:ext cx="2243251" cy="581406"/>
+            <a:ext cx="2243251" cy="399796"/>
           </a:xfrm>
           <a:prstGeom prst="rect">
             <a:avLst/>
@@ -23535,7 +23775,7 @@
                 </a:solidFill>
                 <a:latin typeface="Calibri"/>
               </a:rPr>
-              <a:t>Nobody set how high it runs, so nobody knows how high it will run in October.</a:t>
+              <a:t>So nobody knows how high it will run in October.</a:t>
             </a:r>
           </a:p>
         </p:txBody>
@@ -23762,7 +24002,7 @@
                 </a:solidFill>
                 <a:latin typeface="Calibri"/>
               </a:rPr>
-              <a:t>3.6 percent too high in the first six hidden weeks, 11.5 percent in the last six.</a:t>
+              <a:t>3.6 percent too high in hidden weeks 1 to 6, 11.5 percent in weeks 8 to 13.</a:t>
             </a:r>
           </a:p>
         </p:txBody>
@@ -24494,7 +24734,7 @@
                 </a:solidFill>
                 <a:latin typeface="Calibri"/>
               </a:rPr>
-              <a:t>S24  ·  26 / 39</a:t>
+              <a:t>S24  ·  26 / 40</a:t>
             </a:r>
           </a:p>
         </p:txBody>
@@ -25221,7 +25461,7 @@
                 </a:solidFill>
                 <a:latin typeface="Calibri"/>
               </a:rPr>
-              <a:t>The same 6,615 from a table anyone can add up. The split also says the forecast leans neither way here: 6 weeks high, 7 low.</a:t>
+              <a:t>Notebook 02's last table prints the thirteen misses; added up, they give the same 6,615. The split also says the forecast errs neither way here: 6 weeks high, 7 low.</a:t>
             </a:r>
           </a:p>
         </p:txBody>
@@ -25493,7 +25733,7 @@
                 </a:solidFill>
                 <a:latin typeface="Calibri"/>
               </a:rPr>
-              <a:t>S25  ·  27 / 39</a:t>
+              <a:t>S25  ·  27 / 40</a:t>
             </a:r>
           </a:p>
         </p:txBody>
@@ -25772,7 +26012,7 @@
         <p:spPr>
           <a:xfrm>
             <a:off x="530352" y="3960495"/>
-            <a:ext cx="11130991" cy="1324864"/>
+            <a:ext cx="11130991" cy="1048512"/>
           </a:xfrm>
           <a:prstGeom prst="rect">
             <a:avLst/>
@@ -25797,7 +26037,7 @@
                 </a:solidFill>
                 <a:latin typeface="Calibri"/>
               </a:rPr>
-              <a:t>On 1,045 monthly series, the methods that best fitted the past did not necessarily forecast better, and a seasonal copy beat half the machine-learning methods (Makridakis and others, PLOS ONE, 2018, F1, checked 12 October 2026). </a:t>
+              <a:t>On 1,045 monthly series, statistical methods beat every machine-learning method, and the best fits to the past did not forecast best (Makridakis and colleagues, PLOS ONE, 2018, checked 12 October 2026). </a:t>
             </a:r>
             <a:r>
               <a:rPr sz="1600" b="1" i="0">
@@ -25806,7 +26046,7 @@
                 </a:solidFill>
                 <a:latin typeface="Calibri"/>
               </a:rPr>
-              <a:t>Say it in one line:</a:t>
+              <a:t>Good enough</a:t>
             </a:r>
             <a:r>
               <a:rPr sz="1600" b="0" i="0">
@@ -25815,7 +26055,7 @@
                 </a:solidFill>
                 <a:latin typeface="Calibri"/>
               </a:rPr>
-              <a:t> score on weeks the model never saw, in the unit you pay in, against a copy of last year.</a:t>
+              <a:t> is a claim about the decision: a better forecast is worth having only if it books different shifts.</a:t>
             </a:r>
           </a:p>
         </p:txBody>
@@ -26087,7 +26327,7 @@
                 </a:solidFill>
                 <a:latin typeface="Calibri"/>
               </a:rPr>
-              <a:t>S26  ·  28 / 39</a:t>
+              <a:t>S26  ·  28 / 40</a:t>
             </a:r>
           </a:p>
         </p:txBody>
@@ -26598,7 +26838,7 @@
                 </a:solidFill>
                 <a:latin typeface="Calibri"/>
               </a:rPr>
-              <a:t>29 / 39</a:t>
+              <a:t>29 / 40</a:t>
             </a:r>
           </a:p>
         </p:txBody>
@@ -26853,7 +27093,7 @@
         <p:spPr>
           <a:xfrm>
             <a:off x="530352" y="1956816"/>
-            <a:ext cx="3588410" cy="2154428"/>
+            <a:ext cx="3588410" cy="2344420"/>
           </a:xfrm>
           <a:prstGeom prst="roundRect">
             <a:avLst>
@@ -27086,7 +27326,7 @@
         <p:spPr>
           <a:xfrm>
             <a:off x="4301642" y="1956816"/>
-            <a:ext cx="3588410" cy="2154428"/>
+            <a:ext cx="3588410" cy="2344420"/>
           </a:xfrm>
           <a:prstGeom prst="roundRect">
             <a:avLst>
@@ -27229,7 +27469,7 @@
                 </a:solidFill>
                 <a:latin typeface="Calibri"/>
               </a:rPr>
-              <a:t>THE ERROR BAR</a:t>
+              <a:t>THE ERROR BAR: HOW WRONG IT COULD BE</a:t>
             </a:r>
           </a:p>
         </p:txBody>
@@ -27278,7 +27518,7 @@
         <p:spPr>
           <a:xfrm>
             <a:off x="4502810" y="3303524"/>
-            <a:ext cx="3186074" cy="581406"/>
+            <a:ext cx="3186074" cy="763016"/>
           </a:xfrm>
           <a:prstGeom prst="rect">
             <a:avLst/>
@@ -27299,7 +27539,7 @@
                 </a:solidFill>
                 <a:latin typeface="Calibri"/>
               </a:rPr>
-              <a:t>Its miss on thirteen weeks it never saw: Rs 35,832 of idle shifts if high, Rs 1.7 lakh of late shipments if low.</a:t>
+              <a:t>Its average miss on thirteen weeks it never saw: about Rs 35,800 of idle shifts if a week lands high, Rs 1.65 lakh of late shipments if low.</a:t>
             </a:r>
           </a:p>
         </p:txBody>
@@ -27313,7 +27553,7 @@
         <p:spPr>
           <a:xfrm>
             <a:off x="8072932" y="1956816"/>
-            <a:ext cx="3588410" cy="2154428"/>
+            <a:ext cx="3588410" cy="2344420"/>
           </a:xfrm>
           <a:prstGeom prst="roundRect">
             <a:avLst>
@@ -27526,7 +27766,7 @@
                 </a:solidFill>
                 <a:latin typeface="Calibri"/>
               </a:rPr>
-              <a:t>The vendor loses to a copy of last year on hidden weeks; finance's rule puts the peak two weeks early.</a:t>
+              <a:t>The vendor loses to a copy of last year on hidden weeks; finance's rule copies the calendar, which round three tests.</a:t>
             </a:r>
           </a:p>
         </p:txBody>
@@ -27539,7 +27779,7 @@
         </p:nvSpPr>
         <p:spPr>
           <a:xfrm>
-            <a:off x="530352" y="4294124"/>
+            <a:off x="530352" y="4484116"/>
             <a:ext cx="11130991" cy="1074420"/>
           </a:xfrm>
           <a:prstGeom prst="roundRect">
@@ -27587,7 +27827,7 @@
         </p:nvSpPr>
         <p:spPr>
           <a:xfrm>
-            <a:off x="676656" y="4422140"/>
+            <a:off x="676656" y="4612132"/>
             <a:ext cx="45720" cy="818388"/>
           </a:xfrm>
           <a:prstGeom prst="roundRect">
@@ -27633,7 +27873,7 @@
         </p:nvSpPr>
         <p:spPr>
           <a:xfrm>
-            <a:off x="877824" y="4412996"/>
+            <a:off x="877824" y="4602988"/>
             <a:ext cx="10564063" cy="891540"/>
           </a:xfrm>
           <a:prstGeom prst="rect">
@@ -27935,7 +28175,7 @@
                 </a:solidFill>
                 <a:latin typeface="Calibri"/>
               </a:rPr>
-              <a:t>S3  ·  3 / 39</a:t>
+              <a:t>S3  ·  3 / 40</a:t>
             </a:r>
           </a:p>
         </p:txBody>
@@ -29650,7 +29890,7 @@
                 </a:solidFill>
                 <a:latin typeface="Calibri"/>
               </a:rPr>
-              <a:t>S27  ·  30 / 39</a:t>
+              <a:t>S27  ·  30 / 40</a:t>
             </a:r>
           </a:p>
         </p:txBody>
@@ -30118,7 +30358,7 @@
                 </a:solidFill>
                 <a:latin typeface="Calibri"/>
               </a:rPr>
-              <a:t>The week 2025's peak lands on, copied 52 weeks on.</a:t>
+              <a:t>A week before the window the planner books.</a:t>
             </a:r>
           </a:p>
         </p:txBody>
@@ -31071,7 +31311,7 @@
                 </a:solidFill>
                 <a:latin typeface="Calibri"/>
               </a:rPr>
-              <a:t>S28  ·  31 / 39</a:t>
+              <a:t>S28  ·  31 / 40</a:t>
             </a:r>
           </a:p>
         </p:txBody>
@@ -31333,8 +31573,8 @@
         </p:blipFill>
         <p:spPr>
           <a:xfrm>
-            <a:off x="1960735" y="1664208"/>
-            <a:ext cx="8270224" cy="3215639"/>
+            <a:off x="2138421" y="1664208"/>
+            <a:ext cx="7914852" cy="3077464"/>
           </a:xfrm>
           <a:prstGeom prst="rect">
             <a:avLst/>
@@ -31349,7 +31589,7 @@
         </p:nvSpPr>
         <p:spPr>
           <a:xfrm>
-            <a:off x="530352" y="4916423"/>
+            <a:off x="530352" y="4778248"/>
             <a:ext cx="11130991" cy="316992"/>
           </a:xfrm>
           <a:prstGeom prst="rect">
@@ -31384,28 +31624,28 @@
         </p:nvSpPr>
         <p:spPr>
           <a:xfrm>
-            <a:off x="530352" y="5242560"/>
-            <a:ext cx="11130991" cy="957072"/>
-          </a:xfrm>
-          <a:prstGeom prst="rect">
-            <a:avLst/>
-          </a:prstGeom>
-          <a:noFill/>
-        </p:spPr>
-        <p:txBody>
-          <a:bodyPr wrap="square" anchor="t" lIns="0" rIns="0" tIns="0" bIns="0">
-            <a:spAutoFit/>
-          </a:bodyPr>
-          <a:lstStyle/>
-          <a:p>
-            <a:r>
-              <a:rPr sz="1600" b="0" i="0">
+            <a:off x="530352" y="5104384"/>
+            <a:ext cx="11130991" cy="1095247"/>
+          </a:xfrm>
+          <a:prstGeom prst="rect">
+            <a:avLst/>
+          </a:prstGeom>
+          <a:noFill/>
+        </p:spPr>
+        <p:txBody>
+          <a:bodyPr wrap="square" anchor="t" lIns="0" rIns="0" tIns="0" bIns="0">
+            <a:spAutoFit/>
+          </a:bodyPr>
+          <a:lstStyle/>
+          <a:p>
+            <a:r>
+              <a:rPr sz="1400" b="0" i="0">
                 <a:solidFill>
                   <a:srgbClr val="1A1440"/>
                 </a:solidFill>
                 <a:latin typeface="Calibri"/>
               </a:rPr>
-              <a:t>The house bot, finance's rule and the vendor all book their biggest week on 5 October (418,200, 434,928 and 497,900), because each copies 2025's calendar weeks. Festival-aligned books it on 19 October at 434,928, two weeks before Diwali's week of 2 November: finance's number, in the right week.</a:t>
+              <a:t>The house bot, finance's rule and the vendor all book their biggest week on 5 October (418,200, 434,928 and 497,900), because each copies 2025's calendar weeks. Festival-aligned books it on 19 October at 434,928, two weeks before Diwali's week of 2 November: finance's number, in the right week. Inside the window, which starts on 12 October, the calendar copies book the most for 12 October and far too little for 19 and 26 October.</a:t>
             </a:r>
           </a:p>
         </p:txBody>
@@ -31677,7 +31917,7 @@
                 </a:solidFill>
                 <a:latin typeface="Calibri"/>
               </a:rPr>
-              <a:t>S29  ·  32 / 39</a:t>
+              <a:t>S29  ·  32 / 40</a:t>
             </a:r>
           </a:p>
         </p:txBody>
@@ -31939,8 +32179,8 @@
         </p:blipFill>
         <p:spPr>
           <a:xfrm>
-            <a:off x="1960735" y="1664208"/>
-            <a:ext cx="8270224" cy="3215639"/>
+            <a:off x="2316106" y="1664208"/>
+            <a:ext cx="7559481" cy="2939288"/>
           </a:xfrm>
           <a:prstGeom prst="rect">
             <a:avLst/>
@@ -31955,7 +32195,7 @@
         </p:nvSpPr>
         <p:spPr>
           <a:xfrm>
-            <a:off x="530352" y="4916423"/>
+            <a:off x="530352" y="4640072"/>
             <a:ext cx="11130991" cy="316992"/>
           </a:xfrm>
           <a:prstGeom prst="rect">
@@ -31990,8 +32230,8 @@
         </p:nvSpPr>
         <p:spPr>
           <a:xfrm>
-            <a:off x="530352" y="5242560"/>
-            <a:ext cx="11130991" cy="957072"/>
+            <a:off x="530352" y="4966208"/>
+            <a:ext cx="11130991" cy="1233424"/>
           </a:xfrm>
           <a:prstGeom prst="rect">
             <a:avLst/>
@@ -32011,7 +32251,25 @@
                 </a:solidFill>
                 <a:latin typeface="Calibri"/>
               </a:rPr>
-              <a:t>The house bot missed 2025's eight festive weeks by 58,250 a week: Rs 79.8 lakh, Rs 69.6 lakh of it late shipments in the weeks the rush came early. Festival-aligned missed by 4,034 a week, Rs 4.6 lakh. One festival is thin evidence, so it settles placement and leaves the size of the error open.</a:t>
+              <a:t>A </a:t>
+            </a:r>
+            <a:r>
+              <a:rPr sz="1600" b="1" i="0">
+                <a:solidFill>
+                  <a:srgbClr val="1A1440"/>
+                </a:solidFill>
+                <a:latin typeface="Calibri"/>
+              </a:rPr>
+              <a:t>back-test</a:t>
+            </a:r>
+            <a:r>
+              <a:rPr sz="1600" b="0" i="0">
+                <a:solidFill>
+                  <a:srgbClr val="1A1440"/>
+                </a:solidFill>
+                <a:latin typeface="Calibri"/>
+              </a:rPr>
+              <a:t> forecasts an earlier stretch as if the later weeks were unknown. Over 29 September to 17 November 2025 the house bot missed by 58,250 a week: Rs 79.8 lakh, Rs 69.6 lakh of it late shipments where the rush came before the copy expected it. Festival-aligned missed by 4,034 a week; without the 4 percent, measured only later, it missed by 10,575.</a:t>
             </a:r>
           </a:p>
         </p:txBody>
@@ -32283,7 +32541,7 @@
                 </a:solidFill>
                 <a:latin typeface="Calibri"/>
               </a:rPr>
-              <a:t>S30  ·  33 / 39</a:t>
+              <a:t>S30  ·  33 / 40</a:t>
             </a:r>
           </a:p>
         </p:txBody>
@@ -32700,7 +32958,7 @@
                           </a:solidFill>
                           <a:latin typeface="Calibri"/>
                         </a:rPr>
-                        <a:t>level</a:t>
+                        <a:t>the same</a:t>
                       </a:r>
                     </a:p>
                   </a:txBody>
@@ -33041,7 +33299,7 @@
                 </a:solidFill>
                 <a:latin typeface="Calibri"/>
               </a:rPr>
-              <a:t>Last year's same calendar weeks shipped 1,983,300; the same weeks counted from Diwali shipped 2,279,500. Finance's plus 4 is plus 4 only on the calendar weeks: it sits 308,048 shipments below festival-aligned, on the costly side. The vendor's plus 22 sits 2.1 percent above festival-aligned, with its peak on the wrong week.</a:t>
+              <a:t>Last year's same calendar weeks shipped 1,983,300; the same weeks counted from Diwali shipped 2,279,500. Finance's plus 4 is plus 4 only on the calendar weeks: against the weeks counted from Diwali it sits 9.5 percent below, and it books 308,048 shipments fewer than festival-aligned, on the costly side. The vendor's plus 22 sits 2.1 percent above festival-aligned, with its peak on the wrong week.</a:t>
             </a:r>
           </a:p>
         </p:txBody>
@@ -33313,7 +33571,7 @@
                 </a:solidFill>
                 <a:latin typeface="Calibri"/>
               </a:rPr>
-              <a:t>S31  ·  34 / 39</a:t>
+              <a:t>S31  ·  34 / 40</a:t>
             </a:r>
           </a:p>
         </p:txBody>
@@ -33519,7 +33777,7 @@
                 </a:solidFill>
                 <a:latin typeface="Georgia"/>
               </a:rPr>
-              <a:t>Being short costs 4.6 times being long</a:t>
+              <a:t>A late shipment costs 4.6 times a spare one</a:t>
             </a:r>
           </a:p>
         </p:txBody>
@@ -33554,7 +33812,7 @@
                 </a:solidFill>
                 <a:latin typeface="Calibri"/>
               </a:rPr>
-              <a:t>How far above the forecast should the plan sit, and why above?</a:t>
+              <a:t>Why should the plan sit above the forecast, and how far?</a:t>
             </a:r>
           </a:p>
         </p:txBody>
@@ -33575,8 +33833,8 @@
         </p:blipFill>
         <p:spPr>
           <a:xfrm>
-            <a:off x="2557218" y="1664208"/>
-            <a:ext cx="7077257" cy="3215640"/>
+            <a:off x="2504970" y="1664208"/>
+            <a:ext cx="7181754" cy="3215640"/>
           </a:xfrm>
           <a:prstGeom prst="rect">
             <a:avLst/>
@@ -33613,7 +33871,7 @@
                 </a:solidFill>
                 <a:latin typeface="Calibri"/>
               </a:rPr>
-              <a:t>Expected cost of a week's plan against its level</a:t>
+              <a:t>The average cost of a week's plan against how far it is raised</a:t>
             </a:r>
           </a:p>
         </p:txBody>
@@ -33647,7 +33905,7 @@
                 </a:solidFill>
                 <a:latin typeface="Calibri"/>
               </a:rPr>
-              <a:t>A shipment of spare capacity costs Rs 650 / 120 = Rs 5.42; a shipment short costs Rs 25. The cheapest plan covers demand in 25 / (25 + 5.42), about 0.82, of weeks. Festival-aligned's hidden-week misses put that at 2.6 percent above the forecast: demand beat the forecast by more in 18 percent of the hidden weeks.</a:t>
+              <a:t>Raise the plan by one shipment. Over 100 weeks, if demand beats the plan in 18, that shipment saves 18 x Rs 25 = Rs 450 and wastes 82 x Rs 5.42 = Rs 444: about even. So the cheapest plan covers demand in 25 / (25 + 5.42), about 0.82, of weeks: the newsvendor rule.</a:t>
             </a:r>
           </a:p>
         </p:txBody>
@@ -33919,7 +34177,7 @@
                 </a:solidFill>
                 <a:latin typeface="Calibri"/>
               </a:rPr>
-              <a:t>S32  ·  35 / 39</a:t>
+              <a:t>S32  ·  35 / 40</a:t>
             </a:r>
           </a:p>
         </p:txBody>
@@ -33933,6 +34191,612 @@
 </file>
 
 <file path=ppt/slides/slide36.xml><?xml version="1.0" encoding="utf-8"?>
+<p:sld xmlns:a="http://schemas.openxmlformats.org/drawingml/2006/main" xmlns:p="http://schemas.openxmlformats.org/presentationml/2006/main" xmlns:r="http://schemas.openxmlformats.org/officeDocument/2006/relationships">
+  <p:cSld>
+    <p:spTree>
+      <p:nvGrpSpPr>
+        <p:cNvPr id="1" name=""/>
+        <p:cNvGrpSpPr/>
+        <p:nvPr/>
+      </p:nvGrpSpPr>
+      <p:grpSpPr/>
+      <p:pic>
+        <p:nvPicPr>
+          <p:cNvPr id="2" name="Picture 1" descr="bg_light.jpg"/>
+          <p:cNvPicPr>
+            <a:picLocks noChangeAspect="1"/>
+          </p:cNvPicPr>
+          <p:nvPr/>
+        </p:nvPicPr>
+        <p:blipFill>
+          <a:blip r:embed="rId2"/>
+          <a:stretch>
+            <a:fillRect/>
+          </a:stretch>
+        </p:blipFill>
+        <p:spPr>
+          <a:xfrm>
+            <a:off x="0" y="0"/>
+            <a:ext cx="12191695" cy="6858000"/>
+          </a:xfrm>
+          <a:prstGeom prst="rect">
+            <a:avLst/>
+          </a:prstGeom>
+        </p:spPr>
+      </p:pic>
+      <p:pic>
+        <p:nvPicPr>
+          <p:cNvPr id="3" name="Picture 2" descr="iitgn_logo.png"/>
+          <p:cNvPicPr>
+            <a:picLocks noChangeAspect="1"/>
+          </p:cNvPicPr>
+          <p:nvPr/>
+        </p:nvPicPr>
+        <p:blipFill>
+          <a:blip r:embed="rId3"/>
+          <a:stretch>
+            <a:fillRect/>
+          </a:stretch>
+        </p:blipFill>
+        <p:spPr>
+          <a:xfrm>
+            <a:off x="530352" y="201168"/>
+            <a:ext cx="420624" cy="420624"/>
+          </a:xfrm>
+          <a:prstGeom prst="rect">
+            <a:avLst/>
+          </a:prstGeom>
+        </p:spPr>
+      </p:pic>
+      <p:sp>
+        <p:nvSpPr>
+          <p:cNvPr id="4" name="TextBox 3"/>
+          <p:cNvSpPr txBox="1"/>
+          <p:nvPr/>
+        </p:nvSpPr>
+        <p:spPr>
+          <a:xfrm>
+            <a:off x="1042416" y="228600"/>
+            <a:ext cx="5120640" cy="185166"/>
+          </a:xfrm>
+          <a:prstGeom prst="rect">
+            <a:avLst/>
+          </a:prstGeom>
+          <a:noFill/>
+        </p:spPr>
+        <p:txBody>
+          <a:bodyPr wrap="square" anchor="t" lIns="0" rIns="0" tIns="0" bIns="0">
+            <a:spAutoFit/>
+          </a:bodyPr>
+          <a:lstStyle/>
+          <a:p>
+            <a:pPr algn="l"/>
+            <a:r>
+              <a:rPr sz="900" b="1" i="0">
+                <a:solidFill>
+                  <a:srgbClr val="1A0F5C"/>
+                </a:solidFill>
+                <a:latin typeface="Calibri"/>
+              </a:rPr>
+              <a:t>Indian Institute of Technology Gandhinagar</a:t>
+            </a:r>
+          </a:p>
+        </p:txBody>
+      </p:sp>
+      <p:sp>
+        <p:nvSpPr>
+          <p:cNvPr id="5" name="TextBox 4"/>
+          <p:cNvSpPr txBox="1"/>
+          <p:nvPr/>
+        </p:nvSpPr>
+        <p:spPr>
+          <a:xfrm>
+            <a:off x="1042416" y="420623"/>
+            <a:ext cx="5852160" cy="127381"/>
+          </a:xfrm>
+          <a:prstGeom prst="rect">
+            <a:avLst/>
+          </a:prstGeom>
+          <a:noFill/>
+        </p:spPr>
+        <p:txBody>
+          <a:bodyPr wrap="square" anchor="t" lIns="0" rIns="0" tIns="0" bIns="0">
+            <a:spAutoFit/>
+          </a:bodyPr>
+          <a:lstStyle/>
+          <a:p>
+            <a:pPr algn="l"/>
+            <a:r>
+              <a:rPr sz="550" b="1" i="0" spc="300">
+                <a:solidFill>
+                  <a:srgbClr val="6B6690"/>
+                </a:solidFill>
+                <a:latin typeface="Calibri"/>
+              </a:rPr>
+              <a:t>ADMINISTERED THROUGH THE COMPETENCY ADVANCEMENT ACADEMY</a:t>
+            </a:r>
+          </a:p>
+        </p:txBody>
+      </p:sp>
+      <p:sp>
+        <p:nvSpPr>
+          <p:cNvPr id="6" name="TextBox 5"/>
+          <p:cNvSpPr txBox="1"/>
+          <p:nvPr/>
+        </p:nvSpPr>
+        <p:spPr>
+          <a:xfrm>
+            <a:off x="5992063" y="310896"/>
+            <a:ext cx="5669280" cy="127381"/>
+          </a:xfrm>
+          <a:prstGeom prst="rect">
+            <a:avLst/>
+          </a:prstGeom>
+          <a:noFill/>
+        </p:spPr>
+        <p:txBody>
+          <a:bodyPr wrap="square" anchor="t" lIns="0" rIns="0" tIns="0" bIns="0">
+            <a:spAutoFit/>
+          </a:bodyPr>
+          <a:lstStyle/>
+          <a:p>
+            <a:pPr algn="r"/>
+            <a:r>
+              <a:rPr sz="550" b="1" i="0" spc="300">
+                <a:solidFill>
+                  <a:srgbClr val="6B6690"/>
+                </a:solidFill>
+                <a:latin typeface="Calibri"/>
+              </a:rPr>
+              <a:t>WEEK 4  ·  FRIDAY  ·  FLIPKART, LUCKNOW  ·  ILLUSTRATIVE CASE</a:t>
+            </a:r>
+          </a:p>
+        </p:txBody>
+      </p:sp>
+      <p:sp>
+        <p:nvSpPr>
+          <p:cNvPr id="7" name="TextBox 6"/>
+          <p:cNvSpPr txBox="1"/>
+          <p:nvPr/>
+        </p:nvSpPr>
+        <p:spPr>
+          <a:xfrm>
+            <a:off x="530352" y="676656"/>
+            <a:ext cx="11130991" cy="512064"/>
+          </a:xfrm>
+          <a:prstGeom prst="rect">
+            <a:avLst/>
+          </a:prstGeom>
+          <a:noFill/>
+        </p:spPr>
+        <p:txBody>
+          <a:bodyPr wrap="square" anchor="b" lIns="0" rIns="0" tIns="0" bIns="0">
+            <a:spAutoFit/>
+          </a:bodyPr>
+          <a:lstStyle/>
+          <a:p>
+            <a:pPr algn="l"/>
+            <a:r>
+              <a:rPr sz="2600" b="0" i="0">
+                <a:solidFill>
+                  <a:srgbClr val="1A0F5C"/>
+                </a:solidFill>
+                <a:latin typeface="Georgia"/>
+              </a:rPr>
+              <a:t>The 2.6 percent sits 0.82 along thirteen weeks</a:t>
+            </a:r>
+          </a:p>
+        </p:txBody>
+      </p:sp>
+      <p:sp>
+        <p:nvSpPr>
+          <p:cNvPr id="8" name="TextBox 7"/>
+          <p:cNvSpPr txBox="1"/>
+          <p:nvPr/>
+        </p:nvSpPr>
+        <p:spPr>
+          <a:xfrm>
+            <a:off x="530352" y="1243584"/>
+            <a:ext cx="11130991" cy="234696"/>
+          </a:xfrm>
+          <a:prstGeom prst="rect">
+            <a:avLst/>
+          </a:prstGeom>
+          <a:noFill/>
+        </p:spPr>
+        <p:txBody>
+          <a:bodyPr wrap="square" anchor="t" lIns="0" rIns="0" tIns="0" bIns="0">
+            <a:spAutoFit/>
+          </a:bodyPr>
+          <a:lstStyle/>
+          <a:p>
+            <a:pPr algn="l"/>
+            <a:r>
+              <a:rPr sz="1200" b="0" i="0">
+                <a:solidFill>
+                  <a:srgbClr val="6B6690"/>
+                </a:solidFill>
+                <a:latin typeface="Calibri"/>
+              </a:rPr>
+              <a:t>How far above the forecast is the 0.82 point, on the weeks we hid?</a:t>
+            </a:r>
+          </a:p>
+        </p:txBody>
+      </p:sp>
+      <p:pic>
+        <p:nvPicPr>
+          <p:cNvPr id="9" name="mermaid diagram" descr="C2_W04_D05_cushion_strip_STUDENT.png"/>
+          <p:cNvPicPr>
+            <a:picLocks noChangeAspect="1"/>
+          </p:cNvPicPr>
+          <p:nvPr/>
+        </p:nvPicPr>
+        <p:blipFill>
+          <a:blip r:embed="rId4"/>
+          <a:stretch>
+            <a:fillRect/>
+          </a:stretch>
+        </p:blipFill>
+        <p:spPr>
+          <a:xfrm>
+            <a:off x="1687216" y="1664208"/>
+            <a:ext cx="8817261" cy="3215640"/>
+          </a:xfrm>
+          <a:prstGeom prst="rect">
+            <a:avLst/>
+          </a:prstGeom>
+        </p:spPr>
+      </p:pic>
+      <p:sp>
+        <p:nvSpPr>
+          <p:cNvPr id="10" name="picture caption"/>
+          <p:cNvSpPr txBox="1"/>
+          <p:nvPr/>
+        </p:nvSpPr>
+        <p:spPr>
+          <a:xfrm>
+            <a:off x="530352" y="4916424"/>
+            <a:ext cx="11130991" cy="316992"/>
+          </a:xfrm>
+          <a:prstGeom prst="rect">
+            <a:avLst/>
+          </a:prstGeom>
+          <a:noFill/>
+        </p:spPr>
+        <p:txBody>
+          <a:bodyPr wrap="square" anchor="t" lIns="0" rIns="0" tIns="0" bIns="0">
+            <a:spAutoFit/>
+          </a:bodyPr>
+          <a:lstStyle/>
+          <a:p>
+            <a:pPr algn="ctr"/>
+            <a:r>
+              <a:rPr sz="1200" b="0" i="0">
+                <a:solidFill>
+                  <a:srgbClr val="6B6690"/>
+                </a:solidFill>
+                <a:latin typeface="Calibri"/>
+              </a:rPr>
+              <a:t>Thirteen hidden weeks sorted by how far demand came above festival-aligned</a:t>
+            </a:r>
+          </a:p>
+        </p:txBody>
+      </p:sp>
+      <p:sp>
+        <p:nvSpPr>
+          <p:cNvPr id="11" name="TextBox 10"/>
+          <p:cNvSpPr txBox="1"/>
+          <p:nvPr/>
+        </p:nvSpPr>
+        <p:spPr>
+          <a:xfrm>
+            <a:off x="530352" y="5242560"/>
+            <a:ext cx="11130991" cy="957072"/>
+          </a:xfrm>
+          <a:prstGeom prst="rect">
+            <a:avLst/>
+          </a:prstGeom>
+          <a:noFill/>
+        </p:spPr>
+        <p:txBody>
+          <a:bodyPr wrap="square" anchor="t" lIns="0" rIns="0" tIns="0" bIns="0">
+            <a:spAutoFit/>
+          </a:bodyPr>
+          <a:lstStyle/>
+          <a:p>
+            <a:r>
+              <a:rPr sz="1600" b="0" i="0">
+                <a:solidFill>
+                  <a:srgbClr val="1A1440"/>
+                </a:solidFill>
+                <a:latin typeface="Calibri"/>
+              </a:rPr>
+              <a:t>Sort the thirteen hidden weeks by how far demand came above festival-aligned: from 5.9 percent below to 7.8 percent above. The 0.82 point falls between the 10th week, 2.1 percent, and the 11th, 2.7; read 0.82 of the way along, it is 2.6 percent. The plan covers 10 of the 13 weeks.</a:t>
+            </a:r>
+          </a:p>
+        </p:txBody>
+      </p:sp>
+      <p:sp>
+        <p:nvSpPr>
+          <p:cNvPr id="12" name="Oval 11"/>
+          <p:cNvSpPr/>
+          <p:nvPr/>
+        </p:nvSpPr>
+        <p:spPr>
+          <a:xfrm>
+            <a:off x="530352" y="6492240"/>
+            <a:ext cx="64008" cy="64008"/>
+          </a:xfrm>
+          <a:prstGeom prst="ellipse">
+            <a:avLst/>
+          </a:prstGeom>
+          <a:solidFill>
+            <a:srgbClr val="CFC9EE"/>
+          </a:solidFill>
+          <a:ln>
+            <a:noFill/>
+          </a:ln>
+          <a:effectLst/>
+        </p:spPr>
+        <p:style>
+          <a:lnRef idx="1">
+            <a:schemeClr val="accent1"/>
+          </a:lnRef>
+          <a:fillRef idx="3">
+            <a:schemeClr val="accent1"/>
+          </a:fillRef>
+          <a:effectRef idx="2">
+            <a:schemeClr val="accent1"/>
+          </a:effectRef>
+          <a:fontRef idx="minor">
+            <a:schemeClr val="lt1"/>
+          </a:fontRef>
+        </p:style>
+        <p:txBody>
+          <a:bodyPr rtlCol="0" anchor="ctr" wrap="square"/>
+          <a:lstStyle/>
+          <a:p>
+            <a:pPr algn="ctr"/>
+          </a:p>
+        </p:txBody>
+      </p:sp>
+      <p:sp>
+        <p:nvSpPr>
+          <p:cNvPr id="13" name="TextBox 12"/>
+          <p:cNvSpPr txBox="1"/>
+          <p:nvPr/>
+        </p:nvSpPr>
+        <p:spPr>
+          <a:xfrm>
+            <a:off x="640080" y="6437376"/>
+            <a:ext cx="1608486" cy="152146"/>
+          </a:xfrm>
+          <a:prstGeom prst="rect">
+            <a:avLst/>
+          </a:prstGeom>
+          <a:noFill/>
+        </p:spPr>
+        <p:txBody>
+          <a:bodyPr wrap="square" anchor="t" lIns="0" rIns="0" tIns="0" bIns="0">
+            <a:spAutoFit/>
+          </a:bodyPr>
+          <a:lstStyle/>
+          <a:p>
+            <a:pPr algn="l"/>
+            <a:r>
+              <a:rPr sz="700" b="0" i="0">
+                <a:solidFill>
+                  <a:srgbClr val="6B6690"/>
+                </a:solidFill>
+                <a:latin typeface="Calibri"/>
+              </a:rPr>
+              <a:t>What shape do the weeks have?</a:t>
+            </a:r>
+          </a:p>
+        </p:txBody>
+      </p:sp>
+      <p:sp>
+        <p:nvSpPr>
+          <p:cNvPr id="14" name="Oval 13"/>
+          <p:cNvSpPr/>
+          <p:nvPr/>
+        </p:nvSpPr>
+        <p:spPr>
+          <a:xfrm>
+            <a:off x="2340006" y="6492240"/>
+            <a:ext cx="64008" cy="64008"/>
+          </a:xfrm>
+          <a:prstGeom prst="ellipse">
+            <a:avLst/>
+          </a:prstGeom>
+          <a:solidFill>
+            <a:srgbClr val="CFC9EE"/>
+          </a:solidFill>
+          <a:ln>
+            <a:noFill/>
+          </a:ln>
+          <a:effectLst/>
+        </p:spPr>
+        <p:style>
+          <a:lnRef idx="1">
+            <a:schemeClr val="accent1"/>
+          </a:lnRef>
+          <a:fillRef idx="3">
+            <a:schemeClr val="accent1"/>
+          </a:fillRef>
+          <a:effectRef idx="2">
+            <a:schemeClr val="accent1"/>
+          </a:effectRef>
+          <a:fontRef idx="minor">
+            <a:schemeClr val="lt1"/>
+          </a:fontRef>
+        </p:style>
+        <p:txBody>
+          <a:bodyPr rtlCol="0" anchor="ctr" wrap="square"/>
+          <a:lstStyle/>
+          <a:p>
+            <a:pPr algn="ctr"/>
+          </a:p>
+        </p:txBody>
+      </p:sp>
+      <p:sp>
+        <p:nvSpPr>
+          <p:cNvPr id="15" name="TextBox 14"/>
+          <p:cNvSpPr txBox="1"/>
+          <p:nvPr/>
+        </p:nvSpPr>
+        <p:spPr>
+          <a:xfrm>
+            <a:off x="2449734" y="6437376"/>
+            <a:ext cx="1746504" cy="152146"/>
+          </a:xfrm>
+          <a:prstGeom prst="rect">
+            <a:avLst/>
+          </a:prstGeom>
+          <a:noFill/>
+        </p:spPr>
+        <p:txBody>
+          <a:bodyPr wrap="square" anchor="t" lIns="0" rIns="0" tIns="0" bIns="0">
+            <a:spAutoFit/>
+          </a:bodyPr>
+          <a:lstStyle/>
+          <a:p>
+            <a:pPr algn="l"/>
+            <a:r>
+              <a:rPr sz="700" b="0" i="0">
+                <a:solidFill>
+                  <a:srgbClr val="6B6690"/>
+                </a:solidFill>
+                <a:latin typeface="Calibri"/>
+              </a:rPr>
+              <a:t>Which rule wins on hidden weeks?</a:t>
+            </a:r>
+          </a:p>
+        </p:txBody>
+      </p:sp>
+      <p:sp>
+        <p:nvSpPr>
+          <p:cNvPr id="16" name="Oval 15"/>
+          <p:cNvSpPr/>
+          <p:nvPr/>
+        </p:nvSpPr>
+        <p:spPr>
+          <a:xfrm>
+            <a:off x="4287678" y="6492240"/>
+            <a:ext cx="64008" cy="64008"/>
+          </a:xfrm>
+          <a:prstGeom prst="ellipse">
+            <a:avLst/>
+          </a:prstGeom>
+          <a:solidFill>
+            <a:srgbClr val="5B3FD6"/>
+          </a:solidFill>
+          <a:ln>
+            <a:noFill/>
+          </a:ln>
+          <a:effectLst/>
+        </p:spPr>
+        <p:style>
+          <a:lnRef idx="1">
+            <a:schemeClr val="accent1"/>
+          </a:lnRef>
+          <a:fillRef idx="3">
+            <a:schemeClr val="accent1"/>
+          </a:fillRef>
+          <a:effectRef idx="2">
+            <a:schemeClr val="accent1"/>
+          </a:effectRef>
+          <a:fontRef idx="minor">
+            <a:schemeClr val="lt1"/>
+          </a:fontRef>
+        </p:style>
+        <p:txBody>
+          <a:bodyPr rtlCol="0" anchor="ctr" wrap="square"/>
+          <a:lstStyle/>
+          <a:p>
+            <a:pPr algn="ctr"/>
+          </a:p>
+        </p:txBody>
+      </p:sp>
+      <p:sp>
+        <p:nvSpPr>
+          <p:cNvPr id="17" name="TextBox 16"/>
+          <p:cNvSpPr txBox="1"/>
+          <p:nvPr/>
+        </p:nvSpPr>
+        <p:spPr>
+          <a:xfrm>
+            <a:off x="4397406" y="6437376"/>
+            <a:ext cx="1746504" cy="152146"/>
+          </a:xfrm>
+          <a:prstGeom prst="rect">
+            <a:avLst/>
+          </a:prstGeom>
+          <a:noFill/>
+        </p:spPr>
+        <p:txBody>
+          <a:bodyPr wrap="square" anchor="t" lIns="0" rIns="0" tIns="0" bIns="0">
+            <a:spAutoFit/>
+          </a:bodyPr>
+          <a:lstStyle/>
+          <a:p>
+            <a:pPr algn="l"/>
+            <a:r>
+              <a:rPr sz="700" b="1" i="0">
+                <a:solidFill>
+                  <a:srgbClr val="5B3FD6"/>
+                </a:solidFill>
+                <a:latin typeface="Calibri"/>
+              </a:rPr>
+              <a:t>Which forecast books the shifts?</a:t>
+            </a:r>
+          </a:p>
+        </p:txBody>
+      </p:sp>
+      <p:sp>
+        <p:nvSpPr>
+          <p:cNvPr id="18" name="TextBox 17"/>
+          <p:cNvSpPr txBox="1"/>
+          <p:nvPr/>
+        </p:nvSpPr>
+        <p:spPr>
+          <a:xfrm>
+            <a:off x="10198303" y="6437376"/>
+            <a:ext cx="1463040" cy="160401"/>
+          </a:xfrm>
+          <a:prstGeom prst="rect">
+            <a:avLst/>
+          </a:prstGeom>
+          <a:noFill/>
+        </p:spPr>
+        <p:txBody>
+          <a:bodyPr wrap="square" anchor="t" lIns="0" rIns="0" tIns="0" bIns="0">
+            <a:spAutoFit/>
+          </a:bodyPr>
+          <a:lstStyle/>
+          <a:p>
+            <a:pPr algn="r"/>
+            <a:r>
+              <a:rPr sz="750" b="0" i="0">
+                <a:solidFill>
+                  <a:srgbClr val="6B6690"/>
+                </a:solidFill>
+                <a:latin typeface="Calibri"/>
+              </a:rPr>
+              <a:t>S33  ·  36 / 40</a:t>
+            </a:r>
+          </a:p>
+        </p:txBody>
+      </p:sp>
+    </p:spTree>
+  </p:cSld>
+  <p:clrMapOvr>
+    <a:masterClrMapping/>
+  </p:clrMapOvr>
+</p:sld>
+</file>
+
+<file path=ppt/slides/slide37.xml><?xml version="1.0" encoding="utf-8"?>
 <p:sld xmlns:a="http://schemas.openxmlformats.org/drawingml/2006/main" xmlns:p="http://schemas.openxmlformats.org/presentationml/2006/main" xmlns:r="http://schemas.openxmlformats.org/officeDocument/2006/relationships">
   <p:cSld>
     <p:spTree>
@@ -35037,7 +35901,7 @@
                 </a:solidFill>
                 <a:latin typeface="Calibri"/>
               </a:rPr>
-              <a:t>Shifts are the plan over 120, rounded up: 20,275 in all. </a:t>
+              <a:t>Shifts are the plan over 120, rounded up: 20,275 in all, 515 more than the 19,760 the forecast alone needs. </a:t>
             </a:r>
             <a:r>
               <a:rPr sz="1600" b="1" i="0">
@@ -35055,7 +35919,7 @@
                 </a:solidFill>
                 <a:latin typeface="Calibri"/>
               </a:rPr>
-              <a:t> 6,615 shipments a week on the hidden weeks, Rs 35,832 of idle shifts if high or Rs 1.7 lakh of late shipments if low; 4,034 a week on 2025's festival.</a:t>
+              <a:t> 6,615 shipments a week on the hidden weeks: about Rs 35,800 of idle shifts if a week lands high, Rs 1.65 lakh of late shipments if low; 4,034 a week on 2025's festival.</a:t>
             </a:r>
           </a:p>
         </p:txBody>
@@ -35327,7 +36191,7 @@
                 </a:solidFill>
                 <a:latin typeface="Calibri"/>
               </a:rPr>
-              <a:t>S33  ·  36 / 39</a:t>
+              <a:t>S34  ·  37 / 40</a:t>
             </a:r>
           </a:p>
         </p:txBody>
@@ -35340,7 +36204,7 @@
 </p:sld>
 </file>
 
-<file path=ppt/slides/slide37.xml><?xml version="1.0" encoding="utf-8"?>
+<file path=ppt/slides/slide38.xml><?xml version="1.0" encoding="utf-8"?>
 <p:sld xmlns:a="http://schemas.openxmlformats.org/drawingml/2006/main" xmlns:p="http://schemas.openxmlformats.org/presentationml/2006/main" xmlns:r="http://schemas.openxmlformats.org/officeDocument/2006/relationships">
   <p:cSld>
     <p:spTree>
@@ -36060,7 +36924,7 @@
         <p:spPr>
           <a:xfrm>
             <a:off x="530352" y="3889248"/>
-            <a:ext cx="11130991" cy="772160"/>
+            <a:ext cx="11130991" cy="1048512"/>
           </a:xfrm>
           <a:prstGeom prst="rect">
             <a:avLst/>
@@ -36085,7 +36949,7 @@
                 </a:solidFill>
                 <a:latin typeface="Calibri"/>
               </a:rPr>
-              <a:t>A scenario, never a measurement: each plan is priced against festival-aligned's weeks. The cushion's Rs 3.3 lakh is what the insurance costs if demand lands exactly on the forecast.</a:t>
+              <a:t>A scenario, never a measurement: if festival-aligned is right about where the rush falls, this is what booking by each other forecast costs; the 2025 back-test is the evidence that it places the rush well. The cushion's Rs 3.3 lakh is what the insurance costs if demand lands exactly on the forecast.</a:t>
             </a:r>
           </a:p>
         </p:txBody>
@@ -36357,868 +37221,7 @@
                 </a:solidFill>
                 <a:latin typeface="Calibri"/>
               </a:rPr>
-              <a:t>S34  ·  37 / 39</a:t>
-            </a:r>
-          </a:p>
-        </p:txBody>
-      </p:sp>
-    </p:spTree>
-  </p:cSld>
-  <p:clrMapOvr>
-    <a:masterClrMapping/>
-  </p:clrMapOvr>
-</p:sld>
-</file>
-
-<file path=ppt/slides/slide38.xml><?xml version="1.0" encoding="utf-8"?>
-<p:sld xmlns:a="http://schemas.openxmlformats.org/drawingml/2006/main" xmlns:p="http://schemas.openxmlformats.org/presentationml/2006/main" xmlns:r="http://schemas.openxmlformats.org/officeDocument/2006/relationships">
-  <p:cSld>
-    <p:spTree>
-      <p:nvGrpSpPr>
-        <p:cNvPr id="1" name=""/>
-        <p:cNvGrpSpPr/>
-        <p:nvPr/>
-      </p:nvGrpSpPr>
-      <p:grpSpPr/>
-      <p:pic>
-        <p:nvPicPr>
-          <p:cNvPr id="2" name="Picture 1" descr="bg_light.jpg"/>
-          <p:cNvPicPr>
-            <a:picLocks noChangeAspect="1"/>
-          </p:cNvPicPr>
-          <p:nvPr/>
-        </p:nvPicPr>
-        <p:blipFill>
-          <a:blip r:embed="rId2"/>
-          <a:stretch>
-            <a:fillRect/>
-          </a:stretch>
-        </p:blipFill>
-        <p:spPr>
-          <a:xfrm>
-            <a:off x="0" y="0"/>
-            <a:ext cx="12191695" cy="6858000"/>
-          </a:xfrm>
-          <a:prstGeom prst="rect">
-            <a:avLst/>
-          </a:prstGeom>
-        </p:spPr>
-      </p:pic>
-      <p:pic>
-        <p:nvPicPr>
-          <p:cNvPr id="3" name="Picture 2" descr="iitgn_logo.png"/>
-          <p:cNvPicPr>
-            <a:picLocks noChangeAspect="1"/>
-          </p:cNvPicPr>
-          <p:nvPr/>
-        </p:nvPicPr>
-        <p:blipFill>
-          <a:blip r:embed="rId3"/>
-          <a:stretch>
-            <a:fillRect/>
-          </a:stretch>
-        </p:blipFill>
-        <p:spPr>
-          <a:xfrm>
-            <a:off x="530352" y="201168"/>
-            <a:ext cx="420624" cy="420624"/>
-          </a:xfrm>
-          <a:prstGeom prst="rect">
-            <a:avLst/>
-          </a:prstGeom>
-        </p:spPr>
-      </p:pic>
-      <p:sp>
-        <p:nvSpPr>
-          <p:cNvPr id="4" name="TextBox 3"/>
-          <p:cNvSpPr txBox="1"/>
-          <p:nvPr/>
-        </p:nvSpPr>
-        <p:spPr>
-          <a:xfrm>
-            <a:off x="1042416" y="228600"/>
-            <a:ext cx="5120640" cy="185166"/>
-          </a:xfrm>
-          <a:prstGeom prst="rect">
-            <a:avLst/>
-          </a:prstGeom>
-          <a:noFill/>
-        </p:spPr>
-        <p:txBody>
-          <a:bodyPr wrap="square" anchor="t" lIns="0" rIns="0" tIns="0" bIns="0">
-            <a:spAutoFit/>
-          </a:bodyPr>
-          <a:lstStyle/>
-          <a:p>
-            <a:pPr algn="l"/>
-            <a:r>
-              <a:rPr sz="900" b="1" i="0">
-                <a:solidFill>
-                  <a:srgbClr val="1A0F5C"/>
-                </a:solidFill>
-                <a:latin typeface="Calibri"/>
-              </a:rPr>
-              <a:t>Indian Institute of Technology Gandhinagar</a:t>
-            </a:r>
-          </a:p>
-        </p:txBody>
-      </p:sp>
-      <p:sp>
-        <p:nvSpPr>
-          <p:cNvPr id="5" name="TextBox 4"/>
-          <p:cNvSpPr txBox="1"/>
-          <p:nvPr/>
-        </p:nvSpPr>
-        <p:spPr>
-          <a:xfrm>
-            <a:off x="1042416" y="420623"/>
-            <a:ext cx="5852160" cy="127381"/>
-          </a:xfrm>
-          <a:prstGeom prst="rect">
-            <a:avLst/>
-          </a:prstGeom>
-          <a:noFill/>
-        </p:spPr>
-        <p:txBody>
-          <a:bodyPr wrap="square" anchor="t" lIns="0" rIns="0" tIns="0" bIns="0">
-            <a:spAutoFit/>
-          </a:bodyPr>
-          <a:lstStyle/>
-          <a:p>
-            <a:pPr algn="l"/>
-            <a:r>
-              <a:rPr sz="550" b="1" i="0" spc="300">
-                <a:solidFill>
-                  <a:srgbClr val="6B6690"/>
-                </a:solidFill>
-                <a:latin typeface="Calibri"/>
-              </a:rPr>
-              <a:t>ADMINISTERED THROUGH THE COMPETENCY ADVANCEMENT ACADEMY</a:t>
-            </a:r>
-          </a:p>
-        </p:txBody>
-      </p:sp>
-      <p:sp>
-        <p:nvSpPr>
-          <p:cNvPr id="6" name="TextBox 5"/>
-          <p:cNvSpPr txBox="1"/>
-          <p:nvPr/>
-        </p:nvSpPr>
-        <p:spPr>
-          <a:xfrm>
-            <a:off x="5992063" y="310896"/>
-            <a:ext cx="5669280" cy="127381"/>
-          </a:xfrm>
-          <a:prstGeom prst="rect">
-            <a:avLst/>
-          </a:prstGeom>
-          <a:noFill/>
-        </p:spPr>
-        <p:txBody>
-          <a:bodyPr wrap="square" anchor="t" lIns="0" rIns="0" tIns="0" bIns="0">
-            <a:spAutoFit/>
-          </a:bodyPr>
-          <a:lstStyle/>
-          <a:p>
-            <a:pPr algn="r"/>
-            <a:r>
-              <a:rPr sz="550" b="1" i="0" spc="300">
-                <a:solidFill>
-                  <a:srgbClr val="6B6690"/>
-                </a:solidFill>
-                <a:latin typeface="Calibri"/>
-              </a:rPr>
-              <a:t>WEEK 4  ·  FRIDAY  ·  FLIPKART, LUCKNOW  ·  ILLUSTRATIVE CASE</a:t>
-            </a:r>
-          </a:p>
-        </p:txBody>
-      </p:sp>
-      <p:sp>
-        <p:nvSpPr>
-          <p:cNvPr id="7" name="TextBox 6"/>
-          <p:cNvSpPr txBox="1"/>
-          <p:nvPr/>
-        </p:nvSpPr>
-        <p:spPr>
-          <a:xfrm>
-            <a:off x="530352" y="676656"/>
-            <a:ext cx="11130991" cy="512064"/>
-          </a:xfrm>
-          <a:prstGeom prst="rect">
-            <a:avLst/>
-          </a:prstGeom>
-          <a:noFill/>
-        </p:spPr>
-        <p:txBody>
-          <a:bodyPr wrap="square" anchor="b" lIns="0" rIns="0" tIns="0" bIns="0">
-            <a:spAutoFit/>
-          </a:bodyPr>
-          <a:lstStyle/>
-          <a:p>
-            <a:pPr algn="l"/>
-            <a:r>
-              <a:rPr sz="2600" b="0" i="0">
-                <a:solidFill>
-                  <a:srgbClr val="1A0F5C"/>
-                </a:solidFill>
-                <a:latin typeface="Georgia"/>
-              </a:rPr>
-              <a:t>What two years of weeks cannot tell us</a:t>
-            </a:r>
-          </a:p>
-        </p:txBody>
-      </p:sp>
-      <p:sp>
-        <p:nvSpPr>
-          <p:cNvPr id="8" name="TextBox 7"/>
-          <p:cNvSpPr txBox="1"/>
-          <p:nvPr/>
-        </p:nvSpPr>
-        <p:spPr>
-          <a:xfrm>
-            <a:off x="530352" y="1243584"/>
-            <a:ext cx="11130991" cy="234696"/>
-          </a:xfrm>
-          <a:prstGeom prst="rect">
-            <a:avLst/>
-          </a:prstGeom>
-          <a:noFill/>
-        </p:spPr>
-        <p:txBody>
-          <a:bodyPr wrap="square" anchor="t" lIns="0" rIns="0" tIns="0" bIns="0">
-            <a:spAutoFit/>
-          </a:bodyPr>
-          <a:lstStyle/>
-          <a:p>
-            <a:pPr algn="l"/>
-            <a:r>
-              <a:rPr sz="1200" b="0" i="0">
-                <a:solidFill>
-                  <a:srgbClr val="6B6690"/>
-                </a:solidFill>
-                <a:latin typeface="Calibri"/>
-              </a:rPr>
-              <a:t>Which doubts sit on the plan, and which fact would settle each?</a:t>
-            </a:r>
-          </a:p>
-        </p:txBody>
-      </p:sp>
-      <p:graphicFrame>
-        <p:nvGraphicFramePr>
-          <p:cNvPr id="9" name="Table 8"/>
-          <p:cNvGraphicFramePr>
-            <a:graphicFrameLocks noGrp="1"/>
-          </p:cNvGraphicFramePr>
-          <p:nvPr/>
-        </p:nvGraphicFramePr>
-        <p:xfrm>
-          <a:off x="530352" y="1956816"/>
-          <a:ext cx="11130991" cy="3556000"/>
-        </p:xfrm>
-        <a:graphic>
-          <a:graphicData uri="http://schemas.openxmlformats.org/drawingml/2006/table">
-            <a:tbl>
-              <a:tblPr firstRow="0" bandRow="0">
-                <a:tableStyleId>{2D5ABB26-0587-4C30-8999-92F81FD0307C}</a:tableStyleId>
-              </a:tblPr>
-              <a:tblGrid>
-                <a:gridCol w="4946853"/>
-                <a:gridCol w="6184138"/>
-              </a:tblGrid>
-              <a:tr h="369824">
-                <a:tc>
-                  <a:txBody>
-                    <a:bodyPr/>
-                    <a:lstStyle/>
-                    <a:p>
-                      <a:r>
-                        <a:rPr sz="1450" b="1" i="0">
-                          <a:solidFill>
-                            <a:srgbClr val="FFFFFF"/>
-                          </a:solidFill>
-                          <a:latin typeface="Calibri"/>
-                        </a:rPr>
-                        <a:t>The doubt</a:t>
-                      </a:r>
-                    </a:p>
-                  </a:txBody>
-                  <a:tcPr marL="101600" marR="101600" marT="38100" marB="38100" anchor="ctr">
-                    <a:solidFill>
-                      <a:srgbClr val="1A0F5C"/>
-                    </a:solidFill>
-                  </a:tcPr>
-                </a:tc>
-                <a:tc>
-                  <a:txBody>
-                    <a:bodyPr/>
-                    <a:lstStyle/>
-                    <a:p>
-                      <a:r>
-                        <a:rPr sz="1450" b="1" i="0">
-                          <a:solidFill>
-                            <a:srgbClr val="FFFFFF"/>
-                          </a:solidFill>
-                          <a:latin typeface="Calibri"/>
-                        </a:rPr>
-                        <a:t>What would settle it</a:t>
-                      </a:r>
-                    </a:p>
-                  </a:txBody>
-                  <a:tcPr marL="101600" marR="101600" marT="38100" marB="38100" anchor="ctr">
-                    <a:solidFill>
-                      <a:srgbClr val="1A0F5C"/>
-                    </a:solidFill>
-                  </a:tcPr>
-                </a:tc>
-              </a:tr>
-              <a:tr h="369824">
-                <a:tc>
-                  <a:txBody>
-                    <a:bodyPr/>
-                    <a:lstStyle/>
-                    <a:p>
-                      <a:r>
-                        <a:rPr sz="1400" b="0" i="0">
-                          <a:solidFill>
-                            <a:srgbClr val="1A1440"/>
-                          </a:solidFill>
-                          <a:latin typeface="Calibri"/>
-                        </a:rPr>
-                        <a:t>The festival moves, and the sale moves with it</a:t>
-                      </a:r>
-                    </a:p>
-                  </a:txBody>
-                  <a:tcPr marL="101600" marR="101600" marT="38100" marB="38100" anchor="ctr">
-                    <a:solidFill>
-                      <a:srgbClr val="FFFFFF"/>
-                    </a:solidFill>
-                  </a:tcPr>
-                </a:tc>
-                <a:tc>
-                  <a:txBody>
-                    <a:bodyPr/>
-                    <a:lstStyle/>
-                    <a:p>
-                      <a:r>
-                        <a:rPr sz="1400" b="0" i="0">
-                          <a:solidFill>
-                            <a:srgbClr val="1A1440"/>
-                          </a:solidFill>
-                          <a:latin typeface="Calibri"/>
-                        </a:rPr>
-                        <a:t>Tested on one festival only: the 2025 back-test</a:t>
-                      </a:r>
-                    </a:p>
-                  </a:txBody>
-                  <a:tcPr marL="101600" marR="101600" marT="38100" marB="38100" anchor="ctr">
-                    <a:solidFill>
-                      <a:srgbClr val="FFFFFF"/>
-                    </a:solidFill>
-                  </a:tcPr>
-                </a:tc>
-              </a:tr>
-              <a:tr h="369824">
-                <a:tc>
-                  <a:txBody>
-                    <a:bodyPr/>
-                    <a:lstStyle/>
-                    <a:p>
-                      <a:r>
-                        <a:rPr sz="1400" b="0" i="0">
-                          <a:solidFill>
-                            <a:srgbClr val="1A1440"/>
-                          </a:solidFill>
-                          <a:latin typeface="Calibri"/>
-                        </a:rPr>
-                        <a:t>Two years hold two festivals</a:t>
-                      </a:r>
-                    </a:p>
-                  </a:txBody>
-                  <a:tcPr marL="101600" marR="101600" marT="38100" marB="38100" anchor="ctr">
-                    <a:solidFill>
-                      <a:srgbClr val="F4F2FA"/>
-                    </a:solidFill>
-                  </a:tcPr>
-                </a:tc>
-                <a:tc>
-                  <a:txBody>
-                    <a:bodyPr/>
-                    <a:lstStyle/>
-                    <a:p>
-                      <a:r>
-                        <a:rPr sz="1400" b="0" i="0">
-                          <a:solidFill>
-                            <a:srgbClr val="1A1440"/>
-                          </a:solidFill>
-                          <a:latin typeface="Calibri"/>
-                        </a:rPr>
-                        <a:t>Only a third year; no check inside the data closes it</a:t>
-                      </a:r>
-                    </a:p>
-                  </a:txBody>
-                  <a:tcPr marL="101600" marR="101600" marT="38100" marB="38100" anchor="ctr">
-                    <a:solidFill>
-                      <a:srgbClr val="F4F2FA"/>
-                    </a:solidFill>
-                  </a:tcPr>
-                </a:tc>
-              </a:tr>
-              <a:tr h="369824">
-                <a:tc>
-                  <a:txBody>
-                    <a:bodyPr/>
-                    <a:lstStyle/>
-                    <a:p>
-                      <a:r>
-                        <a:rPr sz="1400" b="0" i="0">
-                          <a:solidFill>
-                            <a:srgbClr val="1A1440"/>
-                          </a:solidFill>
-                          <a:latin typeface="Calibri"/>
-                        </a:rPr>
-                        <a:t>The hidden weeks hold no festive week</a:t>
-                      </a:r>
-                    </a:p>
-                  </a:txBody>
-                  <a:tcPr marL="101600" marR="101600" marT="38100" marB="38100" anchor="ctr">
-                    <a:solidFill>
-                      <a:srgbClr val="FFFFFF"/>
-                    </a:solidFill>
-                  </a:tcPr>
-                </a:tc>
-                <a:tc>
-                  <a:txBody>
-                    <a:bodyPr/>
-                    <a:lstStyle/>
-                    <a:p>
-                      <a:r>
-                        <a:rPr sz="1400" b="0" i="0">
-                          <a:solidFill>
-                            <a:srgbClr val="1A1440"/>
-                          </a:solidFill>
-                          <a:latin typeface="Calibri"/>
-                        </a:rPr>
-                        <a:t>The 2025 festival's 4,034 a week, one festival</a:t>
-                      </a:r>
-                    </a:p>
-                  </a:txBody>
-                  <a:tcPr marL="101600" marR="101600" marT="38100" marB="38100" anchor="ctr">
-                    <a:solidFill>
-                      <a:srgbClr val="FFFFFF"/>
-                    </a:solidFill>
-                  </a:tcPr>
-                </a:tc>
-              </a:tr>
-              <a:tr h="853440">
-                <a:tc>
-                  <a:txBody>
-                    <a:bodyPr/>
-                    <a:lstStyle/>
-                    <a:p>
-                      <a:r>
-                        <a:rPr sz="1400" b="0" i="0">
-                          <a:solidFill>
-                            <a:srgbClr val="1A1440"/>
-                          </a:solidFill>
-                          <a:latin typeface="Calibri"/>
-                        </a:rPr>
-                        <a:t>Capacity caps the peak</a:t>
-                      </a:r>
-                    </a:p>
-                  </a:txBody>
-                  <a:tcPr marL="101600" marR="101600" marT="38100" marB="38100" anchor="ctr">
-                    <a:solidFill>
-                      <a:srgbClr val="F4F2FA"/>
-                    </a:solidFill>
-                  </a:tcPr>
-                </a:tc>
-                <a:tc>
-                  <a:txBody>
-                    <a:bodyPr/>
-                    <a:lstStyle/>
-                    <a:p>
-                      <a:r>
-                        <a:rPr sz="1400" b="0" i="0">
-                          <a:solidFill>
-                            <a:srgbClr val="1A1440"/>
-                          </a:solidFill>
-                          <a:latin typeface="Calibri"/>
-                        </a:rPr>
-                        <a:t>Overtime reached 1,638 shifts in the week of 6 October 2025 against 5 in an ordinary week, so peak demand may have run above what shipped</a:t>
-                      </a:r>
-                    </a:p>
-                  </a:txBody>
-                  <a:tcPr marL="101600" marR="101600" marT="38100" marB="38100" anchor="ctr">
-                    <a:solidFill>
-                      <a:srgbClr val="F4F2FA"/>
-                    </a:solidFill>
-                  </a:tcPr>
-                </a:tc>
-              </a:tr>
-              <a:tr h="369824">
-                <a:tc>
-                  <a:txBody>
-                    <a:bodyPr/>
-                    <a:lstStyle/>
-                    <a:p>
-                      <a:r>
-                        <a:rPr sz="1400" b="0" i="0">
-                          <a:solidFill>
-                            <a:srgbClr val="1A1440"/>
-                          </a:solidFill>
-                          <a:latin typeface="Calibri"/>
-                        </a:rPr>
-                        <a:t>Growth of 4 percent a year</a:t>
-                      </a:r>
-                    </a:p>
-                  </a:txBody>
-                  <a:tcPr marL="101600" marR="101600" marT="38100" marB="38100" anchor="ctr">
-                    <a:solidFill>
-                      <a:srgbClr val="FFFFFF"/>
-                    </a:solidFill>
-                  </a:tcPr>
-                </a:tc>
-                <a:tc>
-                  <a:txBody>
-                    <a:bodyPr/>
-                    <a:lstStyle/>
-                    <a:p>
-                      <a:r>
-                        <a:rPr sz="1400" b="0" i="0">
-                          <a:solidFill>
-                            <a:srgbClr val="1A1440"/>
-                          </a:solidFill>
-                          <a:latin typeface="Calibri"/>
-                        </a:rPr>
-                        <a:t>Two years' evidence; a third could move it</a:t>
-                      </a:r>
-                    </a:p>
-                  </a:txBody>
-                  <a:tcPr marL="101600" marR="101600" marT="38100" marB="38100" anchor="ctr">
-                    <a:solidFill>
-                      <a:srgbClr val="FFFFFF"/>
-                    </a:solidFill>
-                  </a:tcPr>
-                </a:tc>
-              </a:tr>
-              <a:tr h="853440">
-                <a:tc>
-                  <a:txBody>
-                    <a:bodyPr/>
-                    <a:lstStyle/>
-                    <a:p>
-                      <a:r>
-                        <a:rPr sz="1400" b="0" i="0">
-                          <a:solidFill>
-                            <a:srgbClr val="1A1440"/>
-                          </a:solidFill>
-                          <a:latin typeface="Calibri"/>
-                        </a:rPr>
-                        <a:t>The 2025 festival coincided with GST cuts</a:t>
-                      </a:r>
-                    </a:p>
-                  </a:txBody>
-                  <a:tcPr marL="101600" marR="101600" marT="38100" marB="38100" anchor="ctr">
-                    <a:solidFill>
-                      <a:srgbClr val="F4F2FA"/>
-                    </a:solidFill>
-                  </a:tcPr>
-                </a:tc>
-                <a:tc>
-                  <a:txBody>
-                    <a:bodyPr/>
-                    <a:lstStyle/>
-                    <a:p>
-                      <a:r>
-                        <a:rPr sz="1400" b="0" i="0">
-                          <a:solidFill>
-                            <a:srgbClr val="1A1440"/>
-                          </a:solidFill>
-                          <a:latin typeface="Calibri"/>
-                        </a:rPr>
-                        <a:t>October 2025 two-wheeler retail ran 31,49,846 against 12,87,735 in September, part of it credited to the cuts (FADA, F5, checked 12 October 2026)</a:t>
-                      </a:r>
-                    </a:p>
-                  </a:txBody>
-                  <a:tcPr marL="101600" marR="101600" marT="38100" marB="38100" anchor="ctr">
-                    <a:solidFill>
-                      <a:srgbClr val="F4F2FA"/>
-                    </a:solidFill>
-                  </a:tcPr>
-                </a:tc>
-              </a:tr>
-            </a:tbl>
-          </a:graphicData>
-        </a:graphic>
-      </p:graphicFrame>
-      <p:sp>
-        <p:nvSpPr>
-          <p:cNvPr id="10" name="Oval 9"/>
-          <p:cNvSpPr/>
-          <p:nvPr/>
-        </p:nvSpPr>
-        <p:spPr>
-          <a:xfrm>
-            <a:off x="530352" y="6492240"/>
-            <a:ext cx="64008" cy="64008"/>
-          </a:xfrm>
-          <a:prstGeom prst="ellipse">
-            <a:avLst/>
-          </a:prstGeom>
-          <a:solidFill>
-            <a:srgbClr val="CFC9EE"/>
-          </a:solidFill>
-          <a:ln>
-            <a:noFill/>
-          </a:ln>
-          <a:effectLst/>
-        </p:spPr>
-        <p:style>
-          <a:lnRef idx="1">
-            <a:schemeClr val="accent1"/>
-          </a:lnRef>
-          <a:fillRef idx="3">
-            <a:schemeClr val="accent1"/>
-          </a:fillRef>
-          <a:effectRef idx="2">
-            <a:schemeClr val="accent1"/>
-          </a:effectRef>
-          <a:fontRef idx="minor">
-            <a:schemeClr val="lt1"/>
-          </a:fontRef>
-        </p:style>
-        <p:txBody>
-          <a:bodyPr rtlCol="0" anchor="ctr" wrap="square"/>
-          <a:lstStyle/>
-          <a:p>
-            <a:pPr algn="ctr"/>
-          </a:p>
-        </p:txBody>
-      </p:sp>
-      <p:sp>
-        <p:nvSpPr>
-          <p:cNvPr id="11" name="TextBox 10"/>
-          <p:cNvSpPr txBox="1"/>
-          <p:nvPr/>
-        </p:nvSpPr>
-        <p:spPr>
-          <a:xfrm>
-            <a:off x="640080" y="6437376"/>
-            <a:ext cx="1608486" cy="152146"/>
-          </a:xfrm>
-          <a:prstGeom prst="rect">
-            <a:avLst/>
-          </a:prstGeom>
-          <a:noFill/>
-        </p:spPr>
-        <p:txBody>
-          <a:bodyPr wrap="square" anchor="t" lIns="0" rIns="0" tIns="0" bIns="0">
-            <a:spAutoFit/>
-          </a:bodyPr>
-          <a:lstStyle/>
-          <a:p>
-            <a:pPr algn="l"/>
-            <a:r>
-              <a:rPr sz="700" b="0" i="0">
-                <a:solidFill>
-                  <a:srgbClr val="6B6690"/>
-                </a:solidFill>
-                <a:latin typeface="Calibri"/>
-              </a:rPr>
-              <a:t>What shape do the weeks have?</a:t>
-            </a:r>
-          </a:p>
-        </p:txBody>
-      </p:sp>
-      <p:sp>
-        <p:nvSpPr>
-          <p:cNvPr id="12" name="Oval 11"/>
-          <p:cNvSpPr/>
-          <p:nvPr/>
-        </p:nvSpPr>
-        <p:spPr>
-          <a:xfrm>
-            <a:off x="2340006" y="6492240"/>
-            <a:ext cx="64008" cy="64008"/>
-          </a:xfrm>
-          <a:prstGeom prst="ellipse">
-            <a:avLst/>
-          </a:prstGeom>
-          <a:solidFill>
-            <a:srgbClr val="CFC9EE"/>
-          </a:solidFill>
-          <a:ln>
-            <a:noFill/>
-          </a:ln>
-          <a:effectLst/>
-        </p:spPr>
-        <p:style>
-          <a:lnRef idx="1">
-            <a:schemeClr val="accent1"/>
-          </a:lnRef>
-          <a:fillRef idx="3">
-            <a:schemeClr val="accent1"/>
-          </a:fillRef>
-          <a:effectRef idx="2">
-            <a:schemeClr val="accent1"/>
-          </a:effectRef>
-          <a:fontRef idx="minor">
-            <a:schemeClr val="lt1"/>
-          </a:fontRef>
-        </p:style>
-        <p:txBody>
-          <a:bodyPr rtlCol="0" anchor="ctr" wrap="square"/>
-          <a:lstStyle/>
-          <a:p>
-            <a:pPr algn="ctr"/>
-          </a:p>
-        </p:txBody>
-      </p:sp>
-      <p:sp>
-        <p:nvSpPr>
-          <p:cNvPr id="13" name="TextBox 12"/>
-          <p:cNvSpPr txBox="1"/>
-          <p:nvPr/>
-        </p:nvSpPr>
-        <p:spPr>
-          <a:xfrm>
-            <a:off x="2449734" y="6437376"/>
-            <a:ext cx="1746504" cy="152146"/>
-          </a:xfrm>
-          <a:prstGeom prst="rect">
-            <a:avLst/>
-          </a:prstGeom>
-          <a:noFill/>
-        </p:spPr>
-        <p:txBody>
-          <a:bodyPr wrap="square" anchor="t" lIns="0" rIns="0" tIns="0" bIns="0">
-            <a:spAutoFit/>
-          </a:bodyPr>
-          <a:lstStyle/>
-          <a:p>
-            <a:pPr algn="l"/>
-            <a:r>
-              <a:rPr sz="700" b="0" i="0">
-                <a:solidFill>
-                  <a:srgbClr val="6B6690"/>
-                </a:solidFill>
-                <a:latin typeface="Calibri"/>
-              </a:rPr>
-              <a:t>Which rule wins on hidden weeks?</a:t>
-            </a:r>
-          </a:p>
-        </p:txBody>
-      </p:sp>
-      <p:sp>
-        <p:nvSpPr>
-          <p:cNvPr id="14" name="Oval 13"/>
-          <p:cNvSpPr/>
-          <p:nvPr/>
-        </p:nvSpPr>
-        <p:spPr>
-          <a:xfrm>
-            <a:off x="4287678" y="6492240"/>
-            <a:ext cx="64008" cy="64008"/>
-          </a:xfrm>
-          <a:prstGeom prst="ellipse">
-            <a:avLst/>
-          </a:prstGeom>
-          <a:solidFill>
-            <a:srgbClr val="5B3FD6"/>
-          </a:solidFill>
-          <a:ln>
-            <a:noFill/>
-          </a:ln>
-          <a:effectLst/>
-        </p:spPr>
-        <p:style>
-          <a:lnRef idx="1">
-            <a:schemeClr val="accent1"/>
-          </a:lnRef>
-          <a:fillRef idx="3">
-            <a:schemeClr val="accent1"/>
-          </a:fillRef>
-          <a:effectRef idx="2">
-            <a:schemeClr val="accent1"/>
-          </a:effectRef>
-          <a:fontRef idx="minor">
-            <a:schemeClr val="lt1"/>
-          </a:fontRef>
-        </p:style>
-        <p:txBody>
-          <a:bodyPr rtlCol="0" anchor="ctr" wrap="square"/>
-          <a:lstStyle/>
-          <a:p>
-            <a:pPr algn="ctr"/>
-          </a:p>
-        </p:txBody>
-      </p:sp>
-      <p:sp>
-        <p:nvSpPr>
-          <p:cNvPr id="15" name="TextBox 14"/>
-          <p:cNvSpPr txBox="1"/>
-          <p:nvPr/>
-        </p:nvSpPr>
-        <p:spPr>
-          <a:xfrm>
-            <a:off x="4397406" y="6437376"/>
-            <a:ext cx="1746504" cy="152146"/>
-          </a:xfrm>
-          <a:prstGeom prst="rect">
-            <a:avLst/>
-          </a:prstGeom>
-          <a:noFill/>
-        </p:spPr>
-        <p:txBody>
-          <a:bodyPr wrap="square" anchor="t" lIns="0" rIns="0" tIns="0" bIns="0">
-            <a:spAutoFit/>
-          </a:bodyPr>
-          <a:lstStyle/>
-          <a:p>
-            <a:pPr algn="l"/>
-            <a:r>
-              <a:rPr sz="700" b="1" i="0">
-                <a:solidFill>
-                  <a:srgbClr val="5B3FD6"/>
-                </a:solidFill>
-                <a:latin typeface="Calibri"/>
-              </a:rPr>
-              <a:t>Which forecast books the shifts?</a:t>
-            </a:r>
-          </a:p>
-        </p:txBody>
-      </p:sp>
-      <p:sp>
-        <p:nvSpPr>
-          <p:cNvPr id="16" name="TextBox 15"/>
-          <p:cNvSpPr txBox="1"/>
-          <p:nvPr/>
-        </p:nvSpPr>
-        <p:spPr>
-          <a:xfrm>
-            <a:off x="10198303" y="6437376"/>
-            <a:ext cx="1463040" cy="160401"/>
-          </a:xfrm>
-          <a:prstGeom prst="rect">
-            <a:avLst/>
-          </a:prstGeom>
-          <a:noFill/>
-        </p:spPr>
-        <p:txBody>
-          <a:bodyPr wrap="square" anchor="t" lIns="0" rIns="0" tIns="0" bIns="0">
-            <a:spAutoFit/>
-          </a:bodyPr>
-          <a:lstStyle/>
-          <a:p>
-            <a:pPr algn="r"/>
-            <a:r>
-              <a:rPr sz="750" b="0" i="0">
-                <a:solidFill>
-                  <a:srgbClr val="6B6690"/>
-                </a:solidFill>
-                <a:latin typeface="Calibri"/>
-              </a:rPr>
-              <a:t>S35  ·  38 / 39</a:t>
+              <a:t>S35  ·  38 / 40</a:t>
             </a:r>
           </a:p>
         </p:txBody>
@@ -37424,7 +37427,7 @@
                 </a:solidFill>
                 <a:latin typeface="Georgia"/>
               </a:rPr>
-              <a:t>Close: beat the bot, place the festival, price it</a:t>
+              <a:t>What two years of weeks cannot tell us</a:t>
             </a:r>
           </a:p>
         </p:txBody>
@@ -37459,42 +37462,380 @@
                 </a:solidFill>
                 <a:latin typeface="Calibri"/>
               </a:rPr>
-              <a:t>What do finance and the vendor's sponsor hear, and what does the morning leave on the board?</a:t>
-            </a:r>
-          </a:p>
-        </p:txBody>
-      </p:sp>
-      <p:sp>
-        <p:nvSpPr>
-          <p:cNvPr id="9" name="Rounded Rectangle 8"/>
+              <a:t>Which doubts sit on the plan, and which fact would settle each?</a:t>
+            </a:r>
+          </a:p>
+        </p:txBody>
+      </p:sp>
+      <p:graphicFrame>
+        <p:nvGraphicFramePr>
+          <p:cNvPr id="9" name="Table 8"/>
+          <p:cNvGraphicFramePr>
+            <a:graphicFrameLocks noGrp="1"/>
+          </p:cNvGraphicFramePr>
+          <p:nvPr/>
+        </p:nvGraphicFramePr>
+        <p:xfrm>
+          <a:off x="530352" y="1921256"/>
+          <a:ext cx="11130991" cy="4039616"/>
+        </p:xfrm>
+        <a:graphic>
+          <a:graphicData uri="http://schemas.openxmlformats.org/drawingml/2006/table">
+            <a:tbl>
+              <a:tblPr firstRow="0" bandRow="0">
+                <a:tableStyleId>{2D5ABB26-0587-4C30-8999-92F81FD0307C}</a:tableStyleId>
+              </a:tblPr>
+              <a:tblGrid>
+                <a:gridCol w="4946853"/>
+                <a:gridCol w="6184138"/>
+              </a:tblGrid>
+              <a:tr h="352552">
+                <a:tc>
+                  <a:txBody>
+                    <a:bodyPr/>
+                    <a:lstStyle/>
+                    <a:p>
+                      <a:r>
+                        <a:rPr sz="1350" b="1" i="0">
+                          <a:solidFill>
+                            <a:srgbClr val="FFFFFF"/>
+                          </a:solidFill>
+                          <a:latin typeface="Calibri"/>
+                        </a:rPr>
+                        <a:t>The doubt</a:t>
+                      </a:r>
+                    </a:p>
+                  </a:txBody>
+                  <a:tcPr marL="101600" marR="101600" marT="38100" marB="38100" anchor="ctr">
+                    <a:solidFill>
+                      <a:srgbClr val="1A0F5C"/>
+                    </a:solidFill>
+                  </a:tcPr>
+                </a:tc>
+                <a:tc>
+                  <a:txBody>
+                    <a:bodyPr/>
+                    <a:lstStyle/>
+                    <a:p>
+                      <a:r>
+                        <a:rPr sz="1350" b="1" i="0">
+                          <a:solidFill>
+                            <a:srgbClr val="FFFFFF"/>
+                          </a:solidFill>
+                          <a:latin typeface="Calibri"/>
+                        </a:rPr>
+                        <a:t>What we have, and what would settle it</a:t>
+                      </a:r>
+                    </a:p>
+                  </a:txBody>
+                  <a:tcPr marL="101600" marR="101600" marT="38100" marB="38100" anchor="ctr">
+                    <a:solidFill>
+                      <a:srgbClr val="1A0F5C"/>
+                    </a:solidFill>
+                  </a:tcPr>
+                </a:tc>
+              </a:tr>
+              <a:tr h="352552">
+                <a:tc>
+                  <a:txBody>
+                    <a:bodyPr/>
+                    <a:lstStyle/>
+                    <a:p>
+                      <a:r>
+                        <a:rPr sz="1300" b="0" i="0">
+                          <a:solidFill>
+                            <a:srgbClr val="1A1440"/>
+                          </a:solidFill>
+                          <a:latin typeface="Calibri"/>
+                        </a:rPr>
+                        <a:t>The festival moves, and the sale moves with it</a:t>
+                      </a:r>
+                    </a:p>
+                  </a:txBody>
+                  <a:tcPr marL="101600" marR="101600" marT="38100" marB="38100" anchor="ctr">
+                    <a:solidFill>
+                      <a:srgbClr val="FFFFFF"/>
+                    </a:solidFill>
+                  </a:tcPr>
+                </a:tc>
+                <a:tc>
+                  <a:txBody>
+                    <a:bodyPr/>
+                    <a:lstStyle/>
+                    <a:p>
+                      <a:r>
+                        <a:rPr sz="1300" b="0" i="0">
+                          <a:solidFill>
+                            <a:srgbClr val="1A1440"/>
+                          </a:solidFill>
+                          <a:latin typeface="Calibri"/>
+                        </a:rPr>
+                        <a:t>One festival, the 2025 back-test; another festival would settle it</a:t>
+                      </a:r>
+                    </a:p>
+                  </a:txBody>
+                  <a:tcPr marL="101600" marR="101600" marT="38100" marB="38100" anchor="ctr">
+                    <a:solidFill>
+                      <a:srgbClr val="FFFFFF"/>
+                    </a:solidFill>
+                  </a:tcPr>
+                </a:tc>
+              </a:tr>
+              <a:tr h="352552">
+                <a:tc>
+                  <a:txBody>
+                    <a:bodyPr/>
+                    <a:lstStyle/>
+                    <a:p>
+                      <a:r>
+                        <a:rPr sz="1300" b="0" i="0">
+                          <a:solidFill>
+                            <a:srgbClr val="1A1440"/>
+                          </a:solidFill>
+                          <a:latin typeface="Calibri"/>
+                        </a:rPr>
+                        <a:t>Two years hold two festivals</a:t>
+                      </a:r>
+                    </a:p>
+                  </a:txBody>
+                  <a:tcPr marL="101600" marR="101600" marT="38100" marB="38100" anchor="ctr">
+                    <a:solidFill>
+                      <a:srgbClr val="F4F2FA"/>
+                    </a:solidFill>
+                  </a:tcPr>
+                </a:tc>
+                <a:tc>
+                  <a:txBody>
+                    <a:bodyPr/>
+                    <a:lstStyle/>
+                    <a:p>
+                      <a:r>
+                        <a:rPr sz="1300" b="0" i="0">
+                          <a:solidFill>
+                            <a:srgbClr val="1A1440"/>
+                          </a:solidFill>
+                          <a:latin typeface="Calibri"/>
+                        </a:rPr>
+                        <a:t>Two examples of the festival's shape; only a third year settles it</a:t>
+                      </a:r>
+                    </a:p>
+                  </a:txBody>
+                  <a:tcPr marL="101600" marR="101600" marT="38100" marB="38100" anchor="ctr">
+                    <a:solidFill>
+                      <a:srgbClr val="F4F2FA"/>
+                    </a:solidFill>
+                  </a:tcPr>
+                </a:tc>
+              </a:tr>
+              <a:tr h="577088">
+                <a:tc>
+                  <a:txBody>
+                    <a:bodyPr/>
+                    <a:lstStyle/>
+                    <a:p>
+                      <a:r>
+                        <a:rPr sz="1300" b="0" i="0">
+                          <a:solidFill>
+                            <a:srgbClr val="1A1440"/>
+                          </a:solidFill>
+                          <a:latin typeface="Calibri"/>
+                        </a:rPr>
+                        <a:t>The hidden weeks hold no festive week</a:t>
+                      </a:r>
+                    </a:p>
+                  </a:txBody>
+                  <a:tcPr marL="101600" marR="101600" marT="38100" marB="38100" anchor="ctr">
+                    <a:solidFill>
+                      <a:srgbClr val="FFFFFF"/>
+                    </a:solidFill>
+                  </a:tcPr>
+                </a:tc>
+                <a:tc>
+                  <a:txBody>
+                    <a:bodyPr/>
+                    <a:lstStyle/>
+                    <a:p>
+                      <a:r>
+                        <a:rPr sz="1300" b="0" i="0">
+                          <a:solidFill>
+                            <a:srgbClr val="1A1440"/>
+                          </a:solidFill>
+                          <a:latin typeface="Calibri"/>
+                        </a:rPr>
+                        <a:t>The 2025 festival's 4,034 a week; a hold-out that spans a festival would settle it</a:t>
+                      </a:r>
+                    </a:p>
+                  </a:txBody>
+                  <a:tcPr marL="101600" marR="101600" marT="38100" marB="38100" anchor="ctr">
+                    <a:solidFill>
+                      <a:srgbClr val="FFFFFF"/>
+                    </a:solidFill>
+                  </a:tcPr>
+                </a:tc>
+              </a:tr>
+              <a:tr h="801624">
+                <a:tc>
+                  <a:txBody>
+                    <a:bodyPr/>
+                    <a:lstStyle/>
+                    <a:p>
+                      <a:r>
+                        <a:rPr sz="1300" b="0" i="0">
+                          <a:solidFill>
+                            <a:srgbClr val="1A1440"/>
+                          </a:solidFill>
+                          <a:latin typeface="Calibri"/>
+                        </a:rPr>
+                        <a:t>Capacity caps the peak</a:t>
+                      </a:r>
+                    </a:p>
+                  </a:txBody>
+                  <a:tcPr marL="101600" marR="101600" marT="38100" marB="38100" anchor="ctr">
+                    <a:solidFill>
+                      <a:srgbClr val="F4F2FA"/>
+                    </a:solidFill>
+                  </a:tcPr>
+                </a:tc>
+                <a:tc>
+                  <a:txBody>
+                    <a:bodyPr/>
+                    <a:lstStyle/>
+                    <a:p>
+                      <a:r>
+                        <a:rPr sz="1300" b="0" i="0">
+                          <a:solidFill>
+                            <a:srgbClr val="1A1440"/>
+                          </a:solidFill>
+                          <a:latin typeface="Calibri"/>
+                        </a:rPr>
+                        <a:t>Overtime reached 1,638 shifts in the week of 6 October 2025 against 5 in the week of 24 November 2025, so peak demand may have run above what shipped; orders that could not ship would settle it</a:t>
+                      </a:r>
+                    </a:p>
+                  </a:txBody>
+                  <a:tcPr marL="101600" marR="101600" marT="38100" marB="38100" anchor="ctr">
+                    <a:solidFill>
+                      <a:srgbClr val="F4F2FA"/>
+                    </a:solidFill>
+                  </a:tcPr>
+                </a:tc>
+              </a:tr>
+              <a:tr h="352552">
+                <a:tc>
+                  <a:txBody>
+                    <a:bodyPr/>
+                    <a:lstStyle/>
+                    <a:p>
+                      <a:r>
+                        <a:rPr sz="1300" b="0" i="0">
+                          <a:solidFill>
+                            <a:srgbClr val="1A1440"/>
+                          </a:solidFill>
+                          <a:latin typeface="Calibri"/>
+                        </a:rPr>
+                        <a:t>Growth of 4 percent a year</a:t>
+                      </a:r>
+                    </a:p>
+                  </a:txBody>
+                  <a:tcPr marL="101600" marR="101600" marT="38100" marB="38100" anchor="ctr">
+                    <a:solidFill>
+                      <a:srgbClr val="FFFFFF"/>
+                    </a:solidFill>
+                  </a:tcPr>
+                </a:tc>
+                <a:tc>
+                  <a:txBody>
+                    <a:bodyPr/>
+                    <a:lstStyle/>
+                    <a:p>
+                      <a:r>
+                        <a:rPr sz="1300" b="0" i="0">
+                          <a:solidFill>
+                            <a:srgbClr val="1A1440"/>
+                          </a:solidFill>
+                          <a:latin typeface="Calibri"/>
+                        </a:rPr>
+                        <a:t>Two years' evidence; a third year would settle it</a:t>
+                      </a:r>
+                    </a:p>
+                  </a:txBody>
+                  <a:tcPr marL="101600" marR="101600" marT="38100" marB="38100" anchor="ctr">
+                    <a:solidFill>
+                      <a:srgbClr val="FFFFFF"/>
+                    </a:solidFill>
+                  </a:tcPr>
+                </a:tc>
+              </a:tr>
+              <a:tr h="1250696">
+                <a:tc>
+                  <a:txBody>
+                    <a:bodyPr/>
+                    <a:lstStyle/>
+                    <a:p>
+                      <a:r>
+                        <a:rPr sz="1300" b="0" i="0">
+                          <a:solidFill>
+                            <a:srgbClr val="1A1440"/>
+                          </a:solidFill>
+                          <a:latin typeface="Calibri"/>
+                        </a:rPr>
+                        <a:t>A tax change rode on the 2025 festival</a:t>
+                      </a:r>
+                    </a:p>
+                  </a:txBody>
+                  <a:tcPr marL="101600" marR="101600" marT="38100" marB="38100" anchor="ctr">
+                    <a:solidFill>
+                      <a:srgbClr val="F4F2FA"/>
+                    </a:solidFill>
+                  </a:tcPr>
+                </a:tc>
+                <a:tc>
+                  <a:txBody>
+                    <a:bodyPr/>
+                    <a:lstStyle/>
+                    <a:p>
+                      <a:r>
+                        <a:rPr sz="1300" b="0" i="0">
+                          <a:solidFill>
+                            <a:srgbClr val="1A1440"/>
+                          </a:solidFill>
+                          <a:latin typeface="Calibri"/>
+                        </a:rPr>
+                        <a:t>Two-wheeler sales to buyers ran at 31.5 lakh in October 2025 against 12.9 lakh in September, part of it credited to cuts in GST, India's goods and services tax (FADA, the Federation of Automobile Dealers Associations, release of 7 November 2025, checked 12 October 2026); a series with the tax change marked would settle it</a:t>
+                      </a:r>
+                    </a:p>
+                  </a:txBody>
+                  <a:tcPr marL="101600" marR="101600" marT="38100" marB="38100" anchor="ctr">
+                    <a:solidFill>
+                      <a:srgbClr val="F4F2FA"/>
+                    </a:solidFill>
+                  </a:tcPr>
+                </a:tc>
+              </a:tr>
+            </a:tbl>
+          </a:graphicData>
+        </a:graphic>
+      </p:graphicFrame>
+      <p:sp>
+        <p:nvSpPr>
+          <p:cNvPr id="10" name="Oval 9"/>
           <p:cNvSpPr/>
           <p:nvPr/>
         </p:nvSpPr>
         <p:spPr>
           <a:xfrm>
-            <a:off x="530352" y="1956816"/>
-            <a:ext cx="3588410" cy="2385568"/>
-          </a:xfrm>
-          <a:prstGeom prst="roundRect">
-            <a:avLst>
-              <a:gd name="adj" fmla="val 5000"/>
-            </a:avLst>
+            <a:off x="530352" y="6492240"/>
+            <a:ext cx="64008" cy="64008"/>
+          </a:xfrm>
+          <a:prstGeom prst="ellipse">
+            <a:avLst/>
           </a:prstGeom>
           <a:solidFill>
-            <a:srgbClr val="FFFFFF"/>
+            <a:srgbClr val="CFC9EE"/>
           </a:solidFill>
-          <a:ln w="9525">
-            <a:solidFill>
-              <a:srgbClr val="E4E1F1"/>
-            </a:solidFill>
+          <a:ln>
+            <a:noFill/>
           </a:ln>
-          <a:effectLst>
-            <a:outerShdw blurRad="76200" dist="19050" dir="5400000" algn="bl" rotWithShape="0">
-              <a:srgbClr val="1A0F5C">
-                <a:alpha val="12000"/>
-              </a:srgbClr>
-            </a:outerShdw>
-          </a:effectLst>
+          <a:effectLst/>
         </p:spPr>
         <p:style>
           <a:lnRef idx="1">
@@ -37520,20 +37861,55 @@
       </p:sp>
       <p:sp>
         <p:nvSpPr>
-          <p:cNvPr id="10" name="Oval 9"/>
+          <p:cNvPr id="11" name="TextBox 10"/>
+          <p:cNvSpPr txBox="1"/>
+          <p:nvPr/>
+        </p:nvSpPr>
+        <p:spPr>
+          <a:xfrm>
+            <a:off x="640080" y="6437376"/>
+            <a:ext cx="1608486" cy="152146"/>
+          </a:xfrm>
+          <a:prstGeom prst="rect">
+            <a:avLst/>
+          </a:prstGeom>
+          <a:noFill/>
+        </p:spPr>
+        <p:txBody>
+          <a:bodyPr wrap="square" anchor="t" lIns="0" rIns="0" tIns="0" bIns="0">
+            <a:spAutoFit/>
+          </a:bodyPr>
+          <a:lstStyle/>
+          <a:p>
+            <a:pPr algn="l"/>
+            <a:r>
+              <a:rPr sz="700" b="0" i="0">
+                <a:solidFill>
+                  <a:srgbClr val="6B6690"/>
+                </a:solidFill>
+                <a:latin typeface="Calibri"/>
+              </a:rPr>
+              <a:t>What shape do the weeks have?</a:t>
+            </a:r>
+          </a:p>
+        </p:txBody>
+      </p:sp>
+      <p:sp>
+        <p:nvSpPr>
+          <p:cNvPr id="12" name="Oval 11"/>
           <p:cNvSpPr/>
           <p:nvPr/>
         </p:nvSpPr>
         <p:spPr>
           <a:xfrm>
-            <a:off x="731519" y="2157984"/>
-            <a:ext cx="457200" cy="457200"/>
+            <a:off x="2340006" y="6492240"/>
+            <a:ext cx="64008" cy="64008"/>
           </a:xfrm>
           <a:prstGeom prst="ellipse">
             <a:avLst/>
           </a:prstGeom>
           <a:solidFill>
-            <a:srgbClr val="EEEAFB"/>
+            <a:srgbClr val="CFC9EE"/>
           </a:solidFill>
           <a:ln>
             <a:noFill/>
@@ -37562,40 +37938,16 @@
           </a:p>
         </p:txBody>
       </p:sp>
-      <p:pic>
-        <p:nvPicPr>
-          <p:cNvPr id="11" name="Picture 10" descr="calculator_852ec1ae1794.png"/>
-          <p:cNvPicPr>
-            <a:picLocks noChangeAspect="1"/>
-          </p:cNvPicPr>
-          <p:nvPr/>
-        </p:nvPicPr>
-        <p:blipFill>
-          <a:blip r:embed="rId4"/>
-          <a:stretch>
-            <a:fillRect/>
-          </a:stretch>
-        </p:blipFill>
-        <p:spPr>
-          <a:xfrm>
-            <a:off x="841247" y="2267712"/>
-            <a:ext cx="237744" cy="237744"/>
-          </a:xfrm>
-          <a:prstGeom prst="rect">
-            <a:avLst/>
-          </a:prstGeom>
-        </p:spPr>
-      </p:pic>
-      <p:sp>
-        <p:nvSpPr>
-          <p:cNvPr id="12" name="TextBox 11"/>
-          <p:cNvSpPr txBox="1"/>
-          <p:nvPr/>
-        </p:nvSpPr>
-        <p:spPr>
-          <a:xfrm>
-            <a:off x="731519" y="2724912"/>
-            <a:ext cx="3186074" cy="160401"/>
+      <p:sp>
+        <p:nvSpPr>
+          <p:cNvPr id="13" name="TextBox 12"/>
+          <p:cNvSpPr txBox="1"/>
+          <p:nvPr/>
+        </p:nvSpPr>
+        <p:spPr>
+          <a:xfrm>
+            <a:off x="2449734" y="6437376"/>
+            <a:ext cx="1746504" cy="152146"/>
           </a:xfrm>
           <a:prstGeom prst="rect">
             <a:avLst/>
@@ -37610,384 +37962,27 @@
           <a:p>
             <a:pPr algn="l"/>
             <a:r>
-              <a:rPr sz="750" b="1" i="0" spc="250">
-                <a:solidFill>
-                  <a:srgbClr val="5B3FD6"/>
-                </a:solidFill>
-                <a:latin typeface="Calibri"/>
-              </a:rPr>
-              <a:t>TO FINANCE</a:t>
-            </a:r>
-          </a:p>
-        </p:txBody>
-      </p:sp>
-      <p:sp>
-        <p:nvSpPr>
-          <p:cNvPr id="13" name="TextBox 12"/>
-          <p:cNvSpPr txBox="1"/>
-          <p:nvPr/>
-        </p:nvSpPr>
-        <p:spPr>
-          <a:xfrm>
-            <a:off x="731519" y="2962656"/>
-            <a:ext cx="3186074" cy="267716"/>
-          </a:xfrm>
-          <a:prstGeom prst="rect">
-            <a:avLst/>
-          </a:prstGeom>
-          <a:noFill/>
-        </p:spPr>
-        <p:txBody>
-          <a:bodyPr wrap="square" anchor="t" lIns="0" rIns="0" tIns="0" bIns="0">
-            <a:spAutoFit/>
-          </a:bodyPr>
-          <a:lstStyle/>
-          <a:p>
-            <a:pPr algn="l"/>
-            <a:r>
-              <a:rPr sz="1400" b="1" i="0">
-                <a:solidFill>
-                  <a:srgbClr val="1A0F5C"/>
-                </a:solidFill>
-                <a:latin typeface="Calibri"/>
-              </a:rPr>
-              <a:t>Right growth, wrong weeks</a:t>
-            </a:r>
-          </a:p>
-        </p:txBody>
-      </p:sp>
-      <p:sp>
-        <p:nvSpPr>
-          <p:cNvPr id="14" name="TextBox 13"/>
-          <p:cNvSpPr txBox="1"/>
-          <p:nvPr/>
-        </p:nvSpPr>
-        <p:spPr>
-          <a:xfrm>
-            <a:off x="731519" y="3303524"/>
-            <a:ext cx="3186074" cy="581406"/>
-          </a:xfrm>
-          <a:prstGeom prst="rect">
-            <a:avLst/>
-          </a:prstGeom>
-          <a:noFill/>
-        </p:spPr>
-        <p:txBody>
-          <a:bodyPr wrap="square" anchor="t" lIns="0" rIns="0" tIns="0" bIns="0">
-            <a:spAutoFit/>
-          </a:bodyPr>
-          <a:lstStyle/>
-          <a:p>
-            <a:pPr algn="l"/>
-            <a:r>
-              <a:rPr sz="1100" b="0" i="0">
+              <a:rPr sz="700" b="0" i="0">
                 <a:solidFill>
                   <a:srgbClr val="6B6690"/>
                 </a:solidFill>
                 <a:latin typeface="Calibri"/>
               </a:rPr>
-              <a:t>Your 4 percent is the growth two years show. Copied by calendar, it books the peak on 5 October and sits 308,048 shipments short.</a:t>
-            </a:r>
-          </a:p>
-        </p:txBody>
-      </p:sp>
-      <p:sp>
-        <p:nvSpPr>
-          <p:cNvPr id="15" name="Rounded Rectangle 14"/>
+              <a:t>Which rule wins on hidden weeks?</a:t>
+            </a:r>
+          </a:p>
+        </p:txBody>
+      </p:sp>
+      <p:sp>
+        <p:nvSpPr>
+          <p:cNvPr id="14" name="Oval 13"/>
           <p:cNvSpPr/>
           <p:nvPr/>
         </p:nvSpPr>
         <p:spPr>
           <a:xfrm>
-            <a:off x="4301642" y="1956816"/>
-            <a:ext cx="3588410" cy="2385568"/>
-          </a:xfrm>
-          <a:prstGeom prst="roundRect">
-            <a:avLst>
-              <a:gd name="adj" fmla="val 5000"/>
-            </a:avLst>
-          </a:prstGeom>
-          <a:solidFill>
-            <a:srgbClr val="FFFFFF"/>
-          </a:solidFill>
-          <a:ln w="9525">
-            <a:solidFill>
-              <a:srgbClr val="E4E1F1"/>
-            </a:solidFill>
-          </a:ln>
-          <a:effectLst>
-            <a:outerShdw blurRad="76200" dist="19050" dir="5400000" algn="bl" rotWithShape="0">
-              <a:srgbClr val="1A0F5C">
-                <a:alpha val="12000"/>
-              </a:srgbClr>
-            </a:outerShdw>
-          </a:effectLst>
-        </p:spPr>
-        <p:style>
-          <a:lnRef idx="1">
-            <a:schemeClr val="accent1"/>
-          </a:lnRef>
-          <a:fillRef idx="3">
-            <a:schemeClr val="accent1"/>
-          </a:fillRef>
-          <a:effectRef idx="2">
-            <a:schemeClr val="accent1"/>
-          </a:effectRef>
-          <a:fontRef idx="minor">
-            <a:schemeClr val="lt1"/>
-          </a:fontRef>
-        </p:style>
-        <p:txBody>
-          <a:bodyPr rtlCol="0" anchor="ctr" wrap="square"/>
-          <a:lstStyle/>
-          <a:p>
-            <a:pPr algn="ctr"/>
-          </a:p>
-        </p:txBody>
-      </p:sp>
-      <p:sp>
-        <p:nvSpPr>
-          <p:cNvPr id="16" name="Oval 15"/>
-          <p:cNvSpPr/>
-          <p:nvPr/>
-        </p:nvSpPr>
-        <p:spPr>
-          <a:xfrm>
-            <a:off x="4502810" y="2157984"/>
-            <a:ext cx="457200" cy="457200"/>
-          </a:xfrm>
-          <a:prstGeom prst="ellipse">
-            <a:avLst/>
-          </a:prstGeom>
-          <a:solidFill>
-            <a:srgbClr val="EEEAFB"/>
-          </a:solidFill>
-          <a:ln>
-            <a:noFill/>
-          </a:ln>
-          <a:effectLst/>
-        </p:spPr>
-        <p:style>
-          <a:lnRef idx="1">
-            <a:schemeClr val="accent1"/>
-          </a:lnRef>
-          <a:fillRef idx="3">
-            <a:schemeClr val="accent1"/>
-          </a:fillRef>
-          <a:effectRef idx="2">
-            <a:schemeClr val="accent1"/>
-          </a:effectRef>
-          <a:fontRef idx="minor">
-            <a:schemeClr val="lt1"/>
-          </a:fontRef>
-        </p:style>
-        <p:txBody>
-          <a:bodyPr rtlCol="0" anchor="ctr" wrap="square"/>
-          <a:lstStyle/>
-          <a:p>
-            <a:pPr algn="ctr"/>
-          </a:p>
-        </p:txBody>
-      </p:sp>
-      <p:pic>
-        <p:nvPicPr>
-          <p:cNvPr id="17" name="Picture 16" descr="trending-up_0f9f07881489.png"/>
-          <p:cNvPicPr>
-            <a:picLocks noChangeAspect="1"/>
-          </p:cNvPicPr>
-          <p:nvPr/>
-        </p:nvPicPr>
-        <p:blipFill>
-          <a:blip r:embed="rId5"/>
-          <a:stretch>
-            <a:fillRect/>
-          </a:stretch>
-        </p:blipFill>
-        <p:spPr>
-          <a:xfrm>
-            <a:off x="4612538" y="2267712"/>
-            <a:ext cx="237744" cy="237744"/>
-          </a:xfrm>
-          <a:prstGeom prst="rect">
-            <a:avLst/>
-          </a:prstGeom>
-        </p:spPr>
-      </p:pic>
-      <p:sp>
-        <p:nvSpPr>
-          <p:cNvPr id="18" name="TextBox 17"/>
-          <p:cNvSpPr txBox="1"/>
-          <p:nvPr/>
-        </p:nvSpPr>
-        <p:spPr>
-          <a:xfrm>
-            <a:off x="4502810" y="2724912"/>
-            <a:ext cx="3186074" cy="160401"/>
-          </a:xfrm>
-          <a:prstGeom prst="rect">
-            <a:avLst/>
-          </a:prstGeom>
-          <a:noFill/>
-        </p:spPr>
-        <p:txBody>
-          <a:bodyPr wrap="square" anchor="t" lIns="0" rIns="0" tIns="0" bIns="0">
-            <a:spAutoFit/>
-          </a:bodyPr>
-          <a:lstStyle/>
-          <a:p>
-            <a:pPr algn="l"/>
-            <a:r>
-              <a:rPr sz="750" b="1" i="0" spc="250">
-                <a:solidFill>
-                  <a:srgbClr val="5B3FD6"/>
-                </a:solidFill>
-                <a:latin typeface="Calibri"/>
-              </a:rPr>
-              <a:t>TO THE VENDOR'S SPONSOR</a:t>
-            </a:r>
-          </a:p>
-        </p:txBody>
-      </p:sp>
-      <p:sp>
-        <p:nvSpPr>
-          <p:cNvPr id="19" name="TextBox 18"/>
-          <p:cNvSpPr txBox="1"/>
-          <p:nvPr/>
-        </p:nvSpPr>
-        <p:spPr>
-          <a:xfrm>
-            <a:off x="4502810" y="2962656"/>
-            <a:ext cx="3186074" cy="267716"/>
-          </a:xfrm>
-          <a:prstGeom prst="rect">
-            <a:avLst/>
-          </a:prstGeom>
-          <a:noFill/>
-        </p:spPr>
-        <p:txBody>
-          <a:bodyPr wrap="square" anchor="t" lIns="0" rIns="0" tIns="0" bIns="0">
-            <a:spAutoFit/>
-          </a:bodyPr>
-          <a:lstStyle/>
-          <a:p>
-            <a:pPr algn="l"/>
-            <a:r>
-              <a:rPr sz="1400" b="1" i="0">
-                <a:solidFill>
-                  <a:srgbClr val="1A0F5C"/>
-                </a:solidFill>
-                <a:latin typeface="Calibri"/>
-              </a:rPr>
-              <a:t>A fit, never a forecast</a:t>
-            </a:r>
-          </a:p>
-        </p:txBody>
-      </p:sp>
-      <p:sp>
-        <p:nvSpPr>
-          <p:cNvPr id="20" name="TextBox 19"/>
-          <p:cNvSpPr txBox="1"/>
-          <p:nvPr/>
-        </p:nvSpPr>
-        <p:spPr>
-          <a:xfrm>
-            <a:off x="4502810" y="3303524"/>
-            <a:ext cx="3186074" cy="399796"/>
-          </a:xfrm>
-          <a:prstGeom prst="rect">
-            <a:avLst/>
-          </a:prstGeom>
-          <a:noFill/>
-        </p:spPr>
-        <p:txBody>
-          <a:bodyPr wrap="square" anchor="t" lIns="0" rIns="0" tIns="0" bIns="0">
-            <a:spAutoFit/>
-          </a:bodyPr>
-          <a:lstStyle/>
-          <a:p>
-            <a:pPr algn="l"/>
-            <a:r>
-              <a:rPr sz="1100" b="0" i="0">
-                <a:solidFill>
-                  <a:srgbClr val="6B6690"/>
-                </a:solidFill>
-                <a:latin typeface="Calibri"/>
-              </a:rPr>
-              <a:t>Within 1.4 percent on history, and 16,400 a week off on thirteen weeks it never saw.</a:t>
-            </a:r>
-          </a:p>
-        </p:txBody>
-      </p:sp>
-      <p:sp>
-        <p:nvSpPr>
-          <p:cNvPr id="21" name="Rounded Rectangle 20"/>
-          <p:cNvSpPr/>
-          <p:nvPr/>
-        </p:nvSpPr>
-        <p:spPr>
-          <a:xfrm>
-            <a:off x="8072932" y="1956816"/>
-            <a:ext cx="3588410" cy="2385568"/>
-          </a:xfrm>
-          <a:prstGeom prst="roundRect">
-            <a:avLst>
-              <a:gd name="adj" fmla="val 5000"/>
-            </a:avLst>
-          </a:prstGeom>
-          <a:gradFill rotWithShape="1">
-            <a:gsLst>
-              <a:gs pos="0">
-                <a:srgbClr val="2C1A86"/>
-              </a:gs>
-              <a:gs pos="100000">
-                <a:srgbClr val="1A0F5C"/>
-              </a:gs>
-            </a:gsLst>
-            <a:lin scaled="0" ang="16200000"/>
-          </a:gradFill>
-          <a:ln>
-            <a:noFill/>
-          </a:ln>
-          <a:effectLst>
-            <a:outerShdw blurRad="76200" dist="19050" dir="5400000" algn="bl" rotWithShape="0">
-              <a:srgbClr val="1A0F5C">
-                <a:alpha val="12000"/>
-              </a:srgbClr>
-            </a:outerShdw>
-          </a:effectLst>
-        </p:spPr>
-        <p:style>
-          <a:lnRef idx="1">
-            <a:schemeClr val="accent1"/>
-          </a:lnRef>
-          <a:fillRef idx="3">
-            <a:schemeClr val="accent1"/>
-          </a:fillRef>
-          <a:effectRef idx="2">
-            <a:schemeClr val="accent1"/>
-          </a:effectRef>
-          <a:fontRef idx="minor">
-            <a:schemeClr val="lt1"/>
-          </a:fontRef>
-        </p:style>
-        <p:txBody>
-          <a:bodyPr rtlCol="0" anchor="ctr" wrap="square"/>
-          <a:lstStyle/>
-          <a:p>
-            <a:pPr algn="ctr"/>
-          </a:p>
-        </p:txBody>
-      </p:sp>
-      <p:sp>
-        <p:nvSpPr>
-          <p:cNvPr id="22" name="Oval 21"/>
-          <p:cNvSpPr/>
-          <p:nvPr/>
-        </p:nvSpPr>
-        <p:spPr>
-          <a:xfrm>
-            <a:off x="8274100" y="2157984"/>
-            <a:ext cx="457200" cy="457200"/>
+            <a:off x="4287678" y="6492240"/>
+            <a:ext cx="64008" cy="64008"/>
           </a:xfrm>
           <a:prstGeom prst="ellipse">
             <a:avLst/>
@@ -38022,340 +38017,9 @@
           </a:p>
         </p:txBody>
       </p:sp>
-      <p:pic>
-        <p:nvPicPr>
-          <p:cNvPr id="23" name="Picture 22" descr="badge-check_df01016c75a5.png"/>
-          <p:cNvPicPr>
-            <a:picLocks noChangeAspect="1"/>
-          </p:cNvPicPr>
-          <p:nvPr/>
-        </p:nvPicPr>
-        <p:blipFill>
-          <a:blip r:embed="rId6"/>
-          <a:stretch>
-            <a:fillRect/>
-          </a:stretch>
-        </p:blipFill>
-        <p:spPr>
-          <a:xfrm>
-            <a:off x="8383828" y="2267712"/>
-            <a:ext cx="237744" cy="237744"/>
-          </a:xfrm>
-          <a:prstGeom prst="rect">
-            <a:avLst/>
-          </a:prstGeom>
-        </p:spPr>
-      </p:pic>
-      <p:sp>
-        <p:nvSpPr>
-          <p:cNvPr id="24" name="TextBox 23"/>
-          <p:cNvSpPr txBox="1"/>
-          <p:nvPr/>
-        </p:nvSpPr>
-        <p:spPr>
-          <a:xfrm>
-            <a:off x="8274100" y="2724912"/>
-            <a:ext cx="3186074" cy="160401"/>
-          </a:xfrm>
-          <a:prstGeom prst="rect">
-            <a:avLst/>
-          </a:prstGeom>
-          <a:noFill/>
-        </p:spPr>
-        <p:txBody>
-          <a:bodyPr wrap="square" anchor="t" lIns="0" rIns="0" tIns="0" bIns="0">
-            <a:spAutoFit/>
-          </a:bodyPr>
-          <a:lstStyle/>
-          <a:p>
-            <a:pPr algn="l"/>
-            <a:r>
-              <a:rPr sz="750" b="1" i="0" spc="250">
-                <a:solidFill>
-                  <a:srgbClr val="D9A7FF"/>
-                </a:solidFill>
-                <a:latin typeface="Calibri"/>
-              </a:rPr>
-              <a:t>THE RULE</a:t>
-            </a:r>
-          </a:p>
-        </p:txBody>
-      </p:sp>
-      <p:sp>
-        <p:nvSpPr>
-          <p:cNvPr id="25" name="TextBox 24"/>
-          <p:cNvSpPr txBox="1"/>
-          <p:nvPr/>
-        </p:nvSpPr>
-        <p:spPr>
-          <a:xfrm>
-            <a:off x="8274100" y="2962656"/>
-            <a:ext cx="3186074" cy="498856"/>
-          </a:xfrm>
-          <a:prstGeom prst="rect">
-            <a:avLst/>
-          </a:prstGeom>
-          <a:noFill/>
-        </p:spPr>
-        <p:txBody>
-          <a:bodyPr wrap="square" anchor="t" lIns="0" rIns="0" tIns="0" bIns="0">
-            <a:spAutoFit/>
-          </a:bodyPr>
-          <a:lstStyle/>
-          <a:p>
-            <a:pPr algn="l"/>
-            <a:r>
-              <a:rPr sz="1400" b="1" i="0">
-                <a:solidFill>
-                  <a:srgbClr val="FFFFFF"/>
-                </a:solidFill>
-                <a:latin typeface="Calibri"/>
-              </a:rPr>
-              <a:t>Beat the bot, then place the festival</a:t>
-            </a:r>
-          </a:p>
-        </p:txBody>
-      </p:sp>
-      <p:sp>
-        <p:nvSpPr>
-          <p:cNvPr id="26" name="TextBox 25"/>
-          <p:cNvSpPr txBox="1"/>
-          <p:nvPr/>
-        </p:nvSpPr>
-        <p:spPr>
-          <a:xfrm>
-            <a:off x="8274100" y="3534664"/>
-            <a:ext cx="3186074" cy="581406"/>
-          </a:xfrm>
-          <a:prstGeom prst="rect">
-            <a:avLst/>
-          </a:prstGeom>
-          <a:noFill/>
-        </p:spPr>
-        <p:txBody>
-          <a:bodyPr wrap="square" anchor="t" lIns="0" rIns="0" tIns="0" bIns="0">
-            <a:spAutoFit/>
-          </a:bodyPr>
-          <a:lstStyle/>
-          <a:p>
-            <a:pPr algn="l"/>
-            <a:r>
-              <a:rPr sz="1100" b="0" i="0">
-                <a:solidFill>
-                  <a:srgbClr val="CFC9EE"/>
-                </a:solidFill>
-                <a:latin typeface="Calibri"/>
-              </a:rPr>
-              <a:t>Score on hidden weeks in shipments and rupees; copy by distance from Diwali; plan at the 0.82 share.</a:t>
-            </a:r>
-          </a:p>
-        </p:txBody>
-      </p:sp>
-      <p:sp>
-        <p:nvSpPr>
-          <p:cNvPr id="27" name="Oval 26"/>
-          <p:cNvSpPr/>
-          <p:nvPr/>
-        </p:nvSpPr>
-        <p:spPr>
-          <a:xfrm>
-            <a:off x="530352" y="6492240"/>
-            <a:ext cx="64008" cy="64008"/>
-          </a:xfrm>
-          <a:prstGeom prst="ellipse">
-            <a:avLst/>
-          </a:prstGeom>
-          <a:solidFill>
-            <a:srgbClr val="CFC9EE"/>
-          </a:solidFill>
-          <a:ln>
-            <a:noFill/>
-          </a:ln>
-          <a:effectLst/>
-        </p:spPr>
-        <p:style>
-          <a:lnRef idx="1">
-            <a:schemeClr val="accent1"/>
-          </a:lnRef>
-          <a:fillRef idx="3">
-            <a:schemeClr val="accent1"/>
-          </a:fillRef>
-          <a:effectRef idx="2">
-            <a:schemeClr val="accent1"/>
-          </a:effectRef>
-          <a:fontRef idx="minor">
-            <a:schemeClr val="lt1"/>
-          </a:fontRef>
-        </p:style>
-        <p:txBody>
-          <a:bodyPr rtlCol="0" anchor="ctr" wrap="square"/>
-          <a:lstStyle/>
-          <a:p>
-            <a:pPr algn="ctr"/>
-          </a:p>
-        </p:txBody>
-      </p:sp>
-      <p:sp>
-        <p:nvSpPr>
-          <p:cNvPr id="28" name="TextBox 27"/>
-          <p:cNvSpPr txBox="1"/>
-          <p:nvPr/>
-        </p:nvSpPr>
-        <p:spPr>
-          <a:xfrm>
-            <a:off x="640080" y="6437376"/>
-            <a:ext cx="1608486" cy="152146"/>
-          </a:xfrm>
-          <a:prstGeom prst="rect">
-            <a:avLst/>
-          </a:prstGeom>
-          <a:noFill/>
-        </p:spPr>
-        <p:txBody>
-          <a:bodyPr wrap="square" anchor="t" lIns="0" rIns="0" tIns="0" bIns="0">
-            <a:spAutoFit/>
-          </a:bodyPr>
-          <a:lstStyle/>
-          <a:p>
-            <a:pPr algn="l"/>
-            <a:r>
-              <a:rPr sz="700" b="0" i="0">
-                <a:solidFill>
-                  <a:srgbClr val="6B6690"/>
-                </a:solidFill>
-                <a:latin typeface="Calibri"/>
-              </a:rPr>
-              <a:t>What shape do the weeks have?</a:t>
-            </a:r>
-          </a:p>
-        </p:txBody>
-      </p:sp>
-      <p:sp>
-        <p:nvSpPr>
-          <p:cNvPr id="29" name="Oval 28"/>
-          <p:cNvSpPr/>
-          <p:nvPr/>
-        </p:nvSpPr>
-        <p:spPr>
-          <a:xfrm>
-            <a:off x="2340006" y="6492240"/>
-            <a:ext cx="64008" cy="64008"/>
-          </a:xfrm>
-          <a:prstGeom prst="ellipse">
-            <a:avLst/>
-          </a:prstGeom>
-          <a:solidFill>
-            <a:srgbClr val="CFC9EE"/>
-          </a:solidFill>
-          <a:ln>
-            <a:noFill/>
-          </a:ln>
-          <a:effectLst/>
-        </p:spPr>
-        <p:style>
-          <a:lnRef idx="1">
-            <a:schemeClr val="accent1"/>
-          </a:lnRef>
-          <a:fillRef idx="3">
-            <a:schemeClr val="accent1"/>
-          </a:fillRef>
-          <a:effectRef idx="2">
-            <a:schemeClr val="accent1"/>
-          </a:effectRef>
-          <a:fontRef idx="minor">
-            <a:schemeClr val="lt1"/>
-          </a:fontRef>
-        </p:style>
-        <p:txBody>
-          <a:bodyPr rtlCol="0" anchor="ctr" wrap="square"/>
-          <a:lstStyle/>
-          <a:p>
-            <a:pPr algn="ctr"/>
-          </a:p>
-        </p:txBody>
-      </p:sp>
-      <p:sp>
-        <p:nvSpPr>
-          <p:cNvPr id="30" name="TextBox 29"/>
-          <p:cNvSpPr txBox="1"/>
-          <p:nvPr/>
-        </p:nvSpPr>
-        <p:spPr>
-          <a:xfrm>
-            <a:off x="2449734" y="6437376"/>
-            <a:ext cx="1746504" cy="152146"/>
-          </a:xfrm>
-          <a:prstGeom prst="rect">
-            <a:avLst/>
-          </a:prstGeom>
-          <a:noFill/>
-        </p:spPr>
-        <p:txBody>
-          <a:bodyPr wrap="square" anchor="t" lIns="0" rIns="0" tIns="0" bIns="0">
-            <a:spAutoFit/>
-          </a:bodyPr>
-          <a:lstStyle/>
-          <a:p>
-            <a:pPr algn="l"/>
-            <a:r>
-              <a:rPr sz="700" b="0" i="0">
-                <a:solidFill>
-                  <a:srgbClr val="6B6690"/>
-                </a:solidFill>
-                <a:latin typeface="Calibri"/>
-              </a:rPr>
-              <a:t>Which rule wins on hidden weeks?</a:t>
-            </a:r>
-          </a:p>
-        </p:txBody>
-      </p:sp>
-      <p:sp>
-        <p:nvSpPr>
-          <p:cNvPr id="31" name="Oval 30"/>
-          <p:cNvSpPr/>
-          <p:nvPr/>
-        </p:nvSpPr>
-        <p:spPr>
-          <a:xfrm>
-            <a:off x="4287678" y="6492240"/>
-            <a:ext cx="64008" cy="64008"/>
-          </a:xfrm>
-          <a:prstGeom prst="ellipse">
-            <a:avLst/>
-          </a:prstGeom>
-          <a:solidFill>
-            <a:srgbClr val="5B3FD6"/>
-          </a:solidFill>
-          <a:ln>
-            <a:noFill/>
-          </a:ln>
-          <a:effectLst/>
-        </p:spPr>
-        <p:style>
-          <a:lnRef idx="1">
-            <a:schemeClr val="accent1"/>
-          </a:lnRef>
-          <a:fillRef idx="3">
-            <a:schemeClr val="accent1"/>
-          </a:fillRef>
-          <a:effectRef idx="2">
-            <a:schemeClr val="accent1"/>
-          </a:effectRef>
-          <a:fontRef idx="minor">
-            <a:schemeClr val="lt1"/>
-          </a:fontRef>
-        </p:style>
-        <p:txBody>
-          <a:bodyPr rtlCol="0" anchor="ctr" wrap="square"/>
-          <a:lstStyle/>
-          <a:p>
-            <a:pPr algn="ctr"/>
-          </a:p>
-        </p:txBody>
-      </p:sp>
-      <p:sp>
-        <p:nvSpPr>
-          <p:cNvPr id="32" name="TextBox 31"/>
+      <p:sp>
+        <p:nvSpPr>
+          <p:cNvPr id="15" name="TextBox 14"/>
           <p:cNvSpPr txBox="1"/>
           <p:nvPr/>
         </p:nvSpPr>
@@ -38390,7 +38054,7 @@
       </p:sp>
       <p:sp>
         <p:nvSpPr>
-          <p:cNvPr id="33" name="TextBox 32"/>
+          <p:cNvPr id="16" name="TextBox 15"/>
           <p:cNvSpPr txBox="1"/>
           <p:nvPr/>
         </p:nvSpPr>
@@ -38418,7 +38082,7 @@
                 </a:solidFill>
                 <a:latin typeface="Calibri"/>
               </a:rPr>
-              <a:t>S36  ·  39 / 39</a:t>
+              <a:t>S36  ·  39 / 40</a:t>
             </a:r>
           </a:p>
         </p:txBody>
@@ -38929,7 +38593,1207 @@
                 </a:solidFill>
                 <a:latin typeface="Calibri"/>
               </a:rPr>
-              <a:t>4 / 39</a:t>
+              <a:t>4 / 40</a:t>
+            </a:r>
+          </a:p>
+        </p:txBody>
+      </p:sp>
+    </p:spTree>
+  </p:cSld>
+  <p:clrMapOvr>
+    <a:masterClrMapping/>
+  </p:clrMapOvr>
+</p:sld>
+</file>
+
+<file path=ppt/slides/slide40.xml><?xml version="1.0" encoding="utf-8"?>
+<p:sld xmlns:a="http://schemas.openxmlformats.org/drawingml/2006/main" xmlns:p="http://schemas.openxmlformats.org/presentationml/2006/main" xmlns:r="http://schemas.openxmlformats.org/officeDocument/2006/relationships">
+  <p:cSld>
+    <p:spTree>
+      <p:nvGrpSpPr>
+        <p:cNvPr id="1" name=""/>
+        <p:cNvGrpSpPr/>
+        <p:nvPr/>
+      </p:nvGrpSpPr>
+      <p:grpSpPr/>
+      <p:pic>
+        <p:nvPicPr>
+          <p:cNvPr id="2" name="Picture 1" descr="bg_light.jpg"/>
+          <p:cNvPicPr>
+            <a:picLocks noChangeAspect="1"/>
+          </p:cNvPicPr>
+          <p:nvPr/>
+        </p:nvPicPr>
+        <p:blipFill>
+          <a:blip r:embed="rId2"/>
+          <a:stretch>
+            <a:fillRect/>
+          </a:stretch>
+        </p:blipFill>
+        <p:spPr>
+          <a:xfrm>
+            <a:off x="0" y="0"/>
+            <a:ext cx="12191695" cy="6858000"/>
+          </a:xfrm>
+          <a:prstGeom prst="rect">
+            <a:avLst/>
+          </a:prstGeom>
+        </p:spPr>
+      </p:pic>
+      <p:pic>
+        <p:nvPicPr>
+          <p:cNvPr id="3" name="Picture 2" descr="iitgn_logo.png"/>
+          <p:cNvPicPr>
+            <a:picLocks noChangeAspect="1"/>
+          </p:cNvPicPr>
+          <p:nvPr/>
+        </p:nvPicPr>
+        <p:blipFill>
+          <a:blip r:embed="rId3"/>
+          <a:stretch>
+            <a:fillRect/>
+          </a:stretch>
+        </p:blipFill>
+        <p:spPr>
+          <a:xfrm>
+            <a:off x="530352" y="201168"/>
+            <a:ext cx="420624" cy="420624"/>
+          </a:xfrm>
+          <a:prstGeom prst="rect">
+            <a:avLst/>
+          </a:prstGeom>
+        </p:spPr>
+      </p:pic>
+      <p:sp>
+        <p:nvSpPr>
+          <p:cNvPr id="4" name="TextBox 3"/>
+          <p:cNvSpPr txBox="1"/>
+          <p:nvPr/>
+        </p:nvSpPr>
+        <p:spPr>
+          <a:xfrm>
+            <a:off x="1042416" y="228600"/>
+            <a:ext cx="5120640" cy="185166"/>
+          </a:xfrm>
+          <a:prstGeom prst="rect">
+            <a:avLst/>
+          </a:prstGeom>
+          <a:noFill/>
+        </p:spPr>
+        <p:txBody>
+          <a:bodyPr wrap="square" anchor="t" lIns="0" rIns="0" tIns="0" bIns="0">
+            <a:spAutoFit/>
+          </a:bodyPr>
+          <a:lstStyle/>
+          <a:p>
+            <a:pPr algn="l"/>
+            <a:r>
+              <a:rPr sz="900" b="1" i="0">
+                <a:solidFill>
+                  <a:srgbClr val="1A0F5C"/>
+                </a:solidFill>
+                <a:latin typeface="Calibri"/>
+              </a:rPr>
+              <a:t>Indian Institute of Technology Gandhinagar</a:t>
+            </a:r>
+          </a:p>
+        </p:txBody>
+      </p:sp>
+      <p:sp>
+        <p:nvSpPr>
+          <p:cNvPr id="5" name="TextBox 4"/>
+          <p:cNvSpPr txBox="1"/>
+          <p:nvPr/>
+        </p:nvSpPr>
+        <p:spPr>
+          <a:xfrm>
+            <a:off x="1042416" y="420623"/>
+            <a:ext cx="5852160" cy="127381"/>
+          </a:xfrm>
+          <a:prstGeom prst="rect">
+            <a:avLst/>
+          </a:prstGeom>
+          <a:noFill/>
+        </p:spPr>
+        <p:txBody>
+          <a:bodyPr wrap="square" anchor="t" lIns="0" rIns="0" tIns="0" bIns="0">
+            <a:spAutoFit/>
+          </a:bodyPr>
+          <a:lstStyle/>
+          <a:p>
+            <a:pPr algn="l"/>
+            <a:r>
+              <a:rPr sz="550" b="1" i="0" spc="300">
+                <a:solidFill>
+                  <a:srgbClr val="6B6690"/>
+                </a:solidFill>
+                <a:latin typeface="Calibri"/>
+              </a:rPr>
+              <a:t>ADMINISTERED THROUGH THE COMPETENCY ADVANCEMENT ACADEMY</a:t>
+            </a:r>
+          </a:p>
+        </p:txBody>
+      </p:sp>
+      <p:sp>
+        <p:nvSpPr>
+          <p:cNvPr id="6" name="TextBox 5"/>
+          <p:cNvSpPr txBox="1"/>
+          <p:nvPr/>
+        </p:nvSpPr>
+        <p:spPr>
+          <a:xfrm>
+            <a:off x="5992063" y="310896"/>
+            <a:ext cx="5669280" cy="127381"/>
+          </a:xfrm>
+          <a:prstGeom prst="rect">
+            <a:avLst/>
+          </a:prstGeom>
+          <a:noFill/>
+        </p:spPr>
+        <p:txBody>
+          <a:bodyPr wrap="square" anchor="t" lIns="0" rIns="0" tIns="0" bIns="0">
+            <a:spAutoFit/>
+          </a:bodyPr>
+          <a:lstStyle/>
+          <a:p>
+            <a:pPr algn="r"/>
+            <a:r>
+              <a:rPr sz="550" b="1" i="0" spc="300">
+                <a:solidFill>
+                  <a:srgbClr val="6B6690"/>
+                </a:solidFill>
+                <a:latin typeface="Calibri"/>
+              </a:rPr>
+              <a:t>WEEK 4  ·  FRIDAY  ·  FLIPKART, LUCKNOW  ·  ILLUSTRATIVE CASE</a:t>
+            </a:r>
+          </a:p>
+        </p:txBody>
+      </p:sp>
+      <p:sp>
+        <p:nvSpPr>
+          <p:cNvPr id="7" name="TextBox 6"/>
+          <p:cNvSpPr txBox="1"/>
+          <p:nvPr/>
+        </p:nvSpPr>
+        <p:spPr>
+          <a:xfrm>
+            <a:off x="530352" y="676656"/>
+            <a:ext cx="11130991" cy="512064"/>
+          </a:xfrm>
+          <a:prstGeom prst="rect">
+            <a:avLst/>
+          </a:prstGeom>
+          <a:noFill/>
+        </p:spPr>
+        <p:txBody>
+          <a:bodyPr wrap="square" anchor="b" lIns="0" rIns="0" tIns="0" bIns="0">
+            <a:spAutoFit/>
+          </a:bodyPr>
+          <a:lstStyle/>
+          <a:p>
+            <a:pPr algn="l"/>
+            <a:r>
+              <a:rPr sz="2600" b="0" i="0">
+                <a:solidFill>
+                  <a:srgbClr val="1A0F5C"/>
+                </a:solidFill>
+                <a:latin typeface="Georgia"/>
+              </a:rPr>
+              <a:t>Close: beat the bot, place the festival, price it</a:t>
+            </a:r>
+          </a:p>
+        </p:txBody>
+      </p:sp>
+      <p:sp>
+        <p:nvSpPr>
+          <p:cNvPr id="8" name="TextBox 7"/>
+          <p:cNvSpPr txBox="1"/>
+          <p:nvPr/>
+        </p:nvSpPr>
+        <p:spPr>
+          <a:xfrm>
+            <a:off x="530352" y="1243584"/>
+            <a:ext cx="11130991" cy="234696"/>
+          </a:xfrm>
+          <a:prstGeom prst="rect">
+            <a:avLst/>
+          </a:prstGeom>
+          <a:noFill/>
+        </p:spPr>
+        <p:txBody>
+          <a:bodyPr wrap="square" anchor="t" lIns="0" rIns="0" tIns="0" bIns="0">
+            <a:spAutoFit/>
+          </a:bodyPr>
+          <a:lstStyle/>
+          <a:p>
+            <a:pPr algn="l"/>
+            <a:r>
+              <a:rPr sz="1200" b="0" i="0">
+                <a:solidFill>
+                  <a:srgbClr val="6B6690"/>
+                </a:solidFill>
+                <a:latin typeface="Calibri"/>
+              </a:rPr>
+              <a:t>What do finance and the vendor's sponsor hear, and what does the morning leave on the board?</a:t>
+            </a:r>
+          </a:p>
+        </p:txBody>
+      </p:sp>
+      <p:sp>
+        <p:nvSpPr>
+          <p:cNvPr id="9" name="Rounded Rectangle 8"/>
+          <p:cNvSpPr/>
+          <p:nvPr/>
+        </p:nvSpPr>
+        <p:spPr>
+          <a:xfrm>
+            <a:off x="530352" y="1956816"/>
+            <a:ext cx="3588410" cy="2385568"/>
+          </a:xfrm>
+          <a:prstGeom prst="roundRect">
+            <a:avLst>
+              <a:gd name="adj" fmla="val 5000"/>
+            </a:avLst>
+          </a:prstGeom>
+          <a:solidFill>
+            <a:srgbClr val="FFFFFF"/>
+          </a:solidFill>
+          <a:ln w="9525">
+            <a:solidFill>
+              <a:srgbClr val="E4E1F1"/>
+            </a:solidFill>
+          </a:ln>
+          <a:effectLst>
+            <a:outerShdw blurRad="76200" dist="19050" dir="5400000" algn="bl" rotWithShape="0">
+              <a:srgbClr val="1A0F5C">
+                <a:alpha val="12000"/>
+              </a:srgbClr>
+            </a:outerShdw>
+          </a:effectLst>
+        </p:spPr>
+        <p:style>
+          <a:lnRef idx="1">
+            <a:schemeClr val="accent1"/>
+          </a:lnRef>
+          <a:fillRef idx="3">
+            <a:schemeClr val="accent1"/>
+          </a:fillRef>
+          <a:effectRef idx="2">
+            <a:schemeClr val="accent1"/>
+          </a:effectRef>
+          <a:fontRef idx="minor">
+            <a:schemeClr val="lt1"/>
+          </a:fontRef>
+        </p:style>
+        <p:txBody>
+          <a:bodyPr rtlCol="0" anchor="ctr" wrap="square"/>
+          <a:lstStyle/>
+          <a:p>
+            <a:pPr algn="ctr"/>
+          </a:p>
+        </p:txBody>
+      </p:sp>
+      <p:sp>
+        <p:nvSpPr>
+          <p:cNvPr id="10" name="Oval 9"/>
+          <p:cNvSpPr/>
+          <p:nvPr/>
+        </p:nvSpPr>
+        <p:spPr>
+          <a:xfrm>
+            <a:off x="731519" y="2157984"/>
+            <a:ext cx="457200" cy="457200"/>
+          </a:xfrm>
+          <a:prstGeom prst="ellipse">
+            <a:avLst/>
+          </a:prstGeom>
+          <a:solidFill>
+            <a:srgbClr val="EEEAFB"/>
+          </a:solidFill>
+          <a:ln>
+            <a:noFill/>
+          </a:ln>
+          <a:effectLst/>
+        </p:spPr>
+        <p:style>
+          <a:lnRef idx="1">
+            <a:schemeClr val="accent1"/>
+          </a:lnRef>
+          <a:fillRef idx="3">
+            <a:schemeClr val="accent1"/>
+          </a:fillRef>
+          <a:effectRef idx="2">
+            <a:schemeClr val="accent1"/>
+          </a:effectRef>
+          <a:fontRef idx="minor">
+            <a:schemeClr val="lt1"/>
+          </a:fontRef>
+        </p:style>
+        <p:txBody>
+          <a:bodyPr rtlCol="0" anchor="ctr" wrap="square"/>
+          <a:lstStyle/>
+          <a:p>
+            <a:pPr algn="ctr"/>
+          </a:p>
+        </p:txBody>
+      </p:sp>
+      <p:pic>
+        <p:nvPicPr>
+          <p:cNvPr id="11" name="Picture 10" descr="calculator_852ec1ae1794.png"/>
+          <p:cNvPicPr>
+            <a:picLocks noChangeAspect="1"/>
+          </p:cNvPicPr>
+          <p:nvPr/>
+        </p:nvPicPr>
+        <p:blipFill>
+          <a:blip r:embed="rId4"/>
+          <a:stretch>
+            <a:fillRect/>
+          </a:stretch>
+        </p:blipFill>
+        <p:spPr>
+          <a:xfrm>
+            <a:off x="841247" y="2267712"/>
+            <a:ext cx="237744" cy="237744"/>
+          </a:xfrm>
+          <a:prstGeom prst="rect">
+            <a:avLst/>
+          </a:prstGeom>
+        </p:spPr>
+      </p:pic>
+      <p:sp>
+        <p:nvSpPr>
+          <p:cNvPr id="12" name="TextBox 11"/>
+          <p:cNvSpPr txBox="1"/>
+          <p:nvPr/>
+        </p:nvSpPr>
+        <p:spPr>
+          <a:xfrm>
+            <a:off x="731519" y="2724912"/>
+            <a:ext cx="3186074" cy="160401"/>
+          </a:xfrm>
+          <a:prstGeom prst="rect">
+            <a:avLst/>
+          </a:prstGeom>
+          <a:noFill/>
+        </p:spPr>
+        <p:txBody>
+          <a:bodyPr wrap="square" anchor="t" lIns="0" rIns="0" tIns="0" bIns="0">
+            <a:spAutoFit/>
+          </a:bodyPr>
+          <a:lstStyle/>
+          <a:p>
+            <a:pPr algn="l"/>
+            <a:r>
+              <a:rPr sz="750" b="1" i="0" spc="250">
+                <a:solidFill>
+                  <a:srgbClr val="5B3FD6"/>
+                </a:solidFill>
+                <a:latin typeface="Calibri"/>
+              </a:rPr>
+              <a:t>TO FINANCE</a:t>
+            </a:r>
+          </a:p>
+        </p:txBody>
+      </p:sp>
+      <p:sp>
+        <p:nvSpPr>
+          <p:cNvPr id="13" name="TextBox 12"/>
+          <p:cNvSpPr txBox="1"/>
+          <p:nvPr/>
+        </p:nvSpPr>
+        <p:spPr>
+          <a:xfrm>
+            <a:off x="731519" y="2962656"/>
+            <a:ext cx="3186074" cy="267716"/>
+          </a:xfrm>
+          <a:prstGeom prst="rect">
+            <a:avLst/>
+          </a:prstGeom>
+          <a:noFill/>
+        </p:spPr>
+        <p:txBody>
+          <a:bodyPr wrap="square" anchor="t" lIns="0" rIns="0" tIns="0" bIns="0">
+            <a:spAutoFit/>
+          </a:bodyPr>
+          <a:lstStyle/>
+          <a:p>
+            <a:pPr algn="l"/>
+            <a:r>
+              <a:rPr sz="1400" b="1" i="0">
+                <a:solidFill>
+                  <a:srgbClr val="1A0F5C"/>
+                </a:solidFill>
+                <a:latin typeface="Calibri"/>
+              </a:rPr>
+              <a:t>Right growth, wrong weeks</a:t>
+            </a:r>
+          </a:p>
+        </p:txBody>
+      </p:sp>
+      <p:sp>
+        <p:nvSpPr>
+          <p:cNvPr id="14" name="TextBox 13"/>
+          <p:cNvSpPr txBox="1"/>
+          <p:nvPr/>
+        </p:nvSpPr>
+        <p:spPr>
+          <a:xfrm>
+            <a:off x="731519" y="3303524"/>
+            <a:ext cx="3186074" cy="581406"/>
+          </a:xfrm>
+          <a:prstGeom prst="rect">
+            <a:avLst/>
+          </a:prstGeom>
+          <a:noFill/>
+        </p:spPr>
+        <p:txBody>
+          <a:bodyPr wrap="square" anchor="t" lIns="0" rIns="0" tIns="0" bIns="0">
+            <a:spAutoFit/>
+          </a:bodyPr>
+          <a:lstStyle/>
+          <a:p>
+            <a:pPr algn="l"/>
+            <a:r>
+              <a:rPr sz="1100" b="0" i="0">
+                <a:solidFill>
+                  <a:srgbClr val="6B6690"/>
+                </a:solidFill>
+                <a:latin typeface="Calibri"/>
+              </a:rPr>
+              <a:t>Your 4 percent is the growth two years show. Copied by calendar, it books the peak on 5 October and sits 308,048 shipments short.</a:t>
+            </a:r>
+          </a:p>
+        </p:txBody>
+      </p:sp>
+      <p:sp>
+        <p:nvSpPr>
+          <p:cNvPr id="15" name="Rounded Rectangle 14"/>
+          <p:cNvSpPr/>
+          <p:nvPr/>
+        </p:nvSpPr>
+        <p:spPr>
+          <a:xfrm>
+            <a:off x="4301642" y="1956816"/>
+            <a:ext cx="3588410" cy="2385568"/>
+          </a:xfrm>
+          <a:prstGeom prst="roundRect">
+            <a:avLst>
+              <a:gd name="adj" fmla="val 5000"/>
+            </a:avLst>
+          </a:prstGeom>
+          <a:solidFill>
+            <a:srgbClr val="FFFFFF"/>
+          </a:solidFill>
+          <a:ln w="9525">
+            <a:solidFill>
+              <a:srgbClr val="E4E1F1"/>
+            </a:solidFill>
+          </a:ln>
+          <a:effectLst>
+            <a:outerShdw blurRad="76200" dist="19050" dir="5400000" algn="bl" rotWithShape="0">
+              <a:srgbClr val="1A0F5C">
+                <a:alpha val="12000"/>
+              </a:srgbClr>
+            </a:outerShdw>
+          </a:effectLst>
+        </p:spPr>
+        <p:style>
+          <a:lnRef idx="1">
+            <a:schemeClr val="accent1"/>
+          </a:lnRef>
+          <a:fillRef idx="3">
+            <a:schemeClr val="accent1"/>
+          </a:fillRef>
+          <a:effectRef idx="2">
+            <a:schemeClr val="accent1"/>
+          </a:effectRef>
+          <a:fontRef idx="minor">
+            <a:schemeClr val="lt1"/>
+          </a:fontRef>
+        </p:style>
+        <p:txBody>
+          <a:bodyPr rtlCol="0" anchor="ctr" wrap="square"/>
+          <a:lstStyle/>
+          <a:p>
+            <a:pPr algn="ctr"/>
+          </a:p>
+        </p:txBody>
+      </p:sp>
+      <p:sp>
+        <p:nvSpPr>
+          <p:cNvPr id="16" name="Oval 15"/>
+          <p:cNvSpPr/>
+          <p:nvPr/>
+        </p:nvSpPr>
+        <p:spPr>
+          <a:xfrm>
+            <a:off x="4502810" y="2157984"/>
+            <a:ext cx="457200" cy="457200"/>
+          </a:xfrm>
+          <a:prstGeom prst="ellipse">
+            <a:avLst/>
+          </a:prstGeom>
+          <a:solidFill>
+            <a:srgbClr val="EEEAFB"/>
+          </a:solidFill>
+          <a:ln>
+            <a:noFill/>
+          </a:ln>
+          <a:effectLst/>
+        </p:spPr>
+        <p:style>
+          <a:lnRef idx="1">
+            <a:schemeClr val="accent1"/>
+          </a:lnRef>
+          <a:fillRef idx="3">
+            <a:schemeClr val="accent1"/>
+          </a:fillRef>
+          <a:effectRef idx="2">
+            <a:schemeClr val="accent1"/>
+          </a:effectRef>
+          <a:fontRef idx="minor">
+            <a:schemeClr val="lt1"/>
+          </a:fontRef>
+        </p:style>
+        <p:txBody>
+          <a:bodyPr rtlCol="0" anchor="ctr" wrap="square"/>
+          <a:lstStyle/>
+          <a:p>
+            <a:pPr algn="ctr"/>
+          </a:p>
+        </p:txBody>
+      </p:sp>
+      <p:pic>
+        <p:nvPicPr>
+          <p:cNvPr id="17" name="Picture 16" descr="trending-up_0f9f07881489.png"/>
+          <p:cNvPicPr>
+            <a:picLocks noChangeAspect="1"/>
+          </p:cNvPicPr>
+          <p:nvPr/>
+        </p:nvPicPr>
+        <p:blipFill>
+          <a:blip r:embed="rId5"/>
+          <a:stretch>
+            <a:fillRect/>
+          </a:stretch>
+        </p:blipFill>
+        <p:spPr>
+          <a:xfrm>
+            <a:off x="4612538" y="2267712"/>
+            <a:ext cx="237744" cy="237744"/>
+          </a:xfrm>
+          <a:prstGeom prst="rect">
+            <a:avLst/>
+          </a:prstGeom>
+        </p:spPr>
+      </p:pic>
+      <p:sp>
+        <p:nvSpPr>
+          <p:cNvPr id="18" name="TextBox 17"/>
+          <p:cNvSpPr txBox="1"/>
+          <p:nvPr/>
+        </p:nvSpPr>
+        <p:spPr>
+          <a:xfrm>
+            <a:off x="4502810" y="2724912"/>
+            <a:ext cx="3186074" cy="160401"/>
+          </a:xfrm>
+          <a:prstGeom prst="rect">
+            <a:avLst/>
+          </a:prstGeom>
+          <a:noFill/>
+        </p:spPr>
+        <p:txBody>
+          <a:bodyPr wrap="square" anchor="t" lIns="0" rIns="0" tIns="0" bIns="0">
+            <a:spAutoFit/>
+          </a:bodyPr>
+          <a:lstStyle/>
+          <a:p>
+            <a:pPr algn="l"/>
+            <a:r>
+              <a:rPr sz="750" b="1" i="0" spc="250">
+                <a:solidFill>
+                  <a:srgbClr val="5B3FD6"/>
+                </a:solidFill>
+                <a:latin typeface="Calibri"/>
+              </a:rPr>
+              <a:t>TO THE VENDOR'S SPONSOR</a:t>
+            </a:r>
+          </a:p>
+        </p:txBody>
+      </p:sp>
+      <p:sp>
+        <p:nvSpPr>
+          <p:cNvPr id="19" name="TextBox 18"/>
+          <p:cNvSpPr txBox="1"/>
+          <p:nvPr/>
+        </p:nvSpPr>
+        <p:spPr>
+          <a:xfrm>
+            <a:off x="4502810" y="2962656"/>
+            <a:ext cx="3186074" cy="267716"/>
+          </a:xfrm>
+          <a:prstGeom prst="rect">
+            <a:avLst/>
+          </a:prstGeom>
+          <a:noFill/>
+        </p:spPr>
+        <p:txBody>
+          <a:bodyPr wrap="square" anchor="t" lIns="0" rIns="0" tIns="0" bIns="0">
+            <a:spAutoFit/>
+          </a:bodyPr>
+          <a:lstStyle/>
+          <a:p>
+            <a:pPr algn="l"/>
+            <a:r>
+              <a:rPr sz="1400" b="1" i="0">
+                <a:solidFill>
+                  <a:srgbClr val="1A0F5C"/>
+                </a:solidFill>
+                <a:latin typeface="Calibri"/>
+              </a:rPr>
+              <a:t>A fit, never a forecast</a:t>
+            </a:r>
+          </a:p>
+        </p:txBody>
+      </p:sp>
+      <p:sp>
+        <p:nvSpPr>
+          <p:cNvPr id="20" name="TextBox 19"/>
+          <p:cNvSpPr txBox="1"/>
+          <p:nvPr/>
+        </p:nvSpPr>
+        <p:spPr>
+          <a:xfrm>
+            <a:off x="4502810" y="3303524"/>
+            <a:ext cx="3186074" cy="399796"/>
+          </a:xfrm>
+          <a:prstGeom prst="rect">
+            <a:avLst/>
+          </a:prstGeom>
+          <a:noFill/>
+        </p:spPr>
+        <p:txBody>
+          <a:bodyPr wrap="square" anchor="t" lIns="0" rIns="0" tIns="0" bIns="0">
+            <a:spAutoFit/>
+          </a:bodyPr>
+          <a:lstStyle/>
+          <a:p>
+            <a:pPr algn="l"/>
+            <a:r>
+              <a:rPr sz="1100" b="0" i="0">
+                <a:solidFill>
+                  <a:srgbClr val="6B6690"/>
+                </a:solidFill>
+                <a:latin typeface="Calibri"/>
+              </a:rPr>
+              <a:t>Within 1.4 percent on history, and 16,400 a week off on thirteen weeks it never saw.</a:t>
+            </a:r>
+          </a:p>
+        </p:txBody>
+      </p:sp>
+      <p:sp>
+        <p:nvSpPr>
+          <p:cNvPr id="21" name="Rounded Rectangle 20"/>
+          <p:cNvSpPr/>
+          <p:nvPr/>
+        </p:nvSpPr>
+        <p:spPr>
+          <a:xfrm>
+            <a:off x="8072932" y="1956816"/>
+            <a:ext cx="3588410" cy="2385568"/>
+          </a:xfrm>
+          <a:prstGeom prst="roundRect">
+            <a:avLst>
+              <a:gd name="adj" fmla="val 5000"/>
+            </a:avLst>
+          </a:prstGeom>
+          <a:gradFill rotWithShape="1">
+            <a:gsLst>
+              <a:gs pos="0">
+                <a:srgbClr val="2C1A86"/>
+              </a:gs>
+              <a:gs pos="100000">
+                <a:srgbClr val="1A0F5C"/>
+              </a:gs>
+            </a:gsLst>
+            <a:lin scaled="0" ang="16200000"/>
+          </a:gradFill>
+          <a:ln>
+            <a:noFill/>
+          </a:ln>
+          <a:effectLst>
+            <a:outerShdw blurRad="76200" dist="19050" dir="5400000" algn="bl" rotWithShape="0">
+              <a:srgbClr val="1A0F5C">
+                <a:alpha val="12000"/>
+              </a:srgbClr>
+            </a:outerShdw>
+          </a:effectLst>
+        </p:spPr>
+        <p:style>
+          <a:lnRef idx="1">
+            <a:schemeClr val="accent1"/>
+          </a:lnRef>
+          <a:fillRef idx="3">
+            <a:schemeClr val="accent1"/>
+          </a:fillRef>
+          <a:effectRef idx="2">
+            <a:schemeClr val="accent1"/>
+          </a:effectRef>
+          <a:fontRef idx="minor">
+            <a:schemeClr val="lt1"/>
+          </a:fontRef>
+        </p:style>
+        <p:txBody>
+          <a:bodyPr rtlCol="0" anchor="ctr" wrap="square"/>
+          <a:lstStyle/>
+          <a:p>
+            <a:pPr algn="ctr"/>
+          </a:p>
+        </p:txBody>
+      </p:sp>
+      <p:sp>
+        <p:nvSpPr>
+          <p:cNvPr id="22" name="Oval 21"/>
+          <p:cNvSpPr/>
+          <p:nvPr/>
+        </p:nvSpPr>
+        <p:spPr>
+          <a:xfrm>
+            <a:off x="8274100" y="2157984"/>
+            <a:ext cx="457200" cy="457200"/>
+          </a:xfrm>
+          <a:prstGeom prst="ellipse">
+            <a:avLst/>
+          </a:prstGeom>
+          <a:solidFill>
+            <a:srgbClr val="5B3FD6"/>
+          </a:solidFill>
+          <a:ln>
+            <a:noFill/>
+          </a:ln>
+          <a:effectLst/>
+        </p:spPr>
+        <p:style>
+          <a:lnRef idx="1">
+            <a:schemeClr val="accent1"/>
+          </a:lnRef>
+          <a:fillRef idx="3">
+            <a:schemeClr val="accent1"/>
+          </a:fillRef>
+          <a:effectRef idx="2">
+            <a:schemeClr val="accent1"/>
+          </a:effectRef>
+          <a:fontRef idx="minor">
+            <a:schemeClr val="lt1"/>
+          </a:fontRef>
+        </p:style>
+        <p:txBody>
+          <a:bodyPr rtlCol="0" anchor="ctr" wrap="square"/>
+          <a:lstStyle/>
+          <a:p>
+            <a:pPr algn="ctr"/>
+          </a:p>
+        </p:txBody>
+      </p:sp>
+      <p:pic>
+        <p:nvPicPr>
+          <p:cNvPr id="23" name="Picture 22" descr="badge-check_df01016c75a5.png"/>
+          <p:cNvPicPr>
+            <a:picLocks noChangeAspect="1"/>
+          </p:cNvPicPr>
+          <p:nvPr/>
+        </p:nvPicPr>
+        <p:blipFill>
+          <a:blip r:embed="rId6"/>
+          <a:stretch>
+            <a:fillRect/>
+          </a:stretch>
+        </p:blipFill>
+        <p:spPr>
+          <a:xfrm>
+            <a:off x="8383828" y="2267712"/>
+            <a:ext cx="237744" cy="237744"/>
+          </a:xfrm>
+          <a:prstGeom prst="rect">
+            <a:avLst/>
+          </a:prstGeom>
+        </p:spPr>
+      </p:pic>
+      <p:sp>
+        <p:nvSpPr>
+          <p:cNvPr id="24" name="TextBox 23"/>
+          <p:cNvSpPr txBox="1"/>
+          <p:nvPr/>
+        </p:nvSpPr>
+        <p:spPr>
+          <a:xfrm>
+            <a:off x="8274100" y="2724912"/>
+            <a:ext cx="3186074" cy="160401"/>
+          </a:xfrm>
+          <a:prstGeom prst="rect">
+            <a:avLst/>
+          </a:prstGeom>
+          <a:noFill/>
+        </p:spPr>
+        <p:txBody>
+          <a:bodyPr wrap="square" anchor="t" lIns="0" rIns="0" tIns="0" bIns="0">
+            <a:spAutoFit/>
+          </a:bodyPr>
+          <a:lstStyle/>
+          <a:p>
+            <a:pPr algn="l"/>
+            <a:r>
+              <a:rPr sz="750" b="1" i="0" spc="250">
+                <a:solidFill>
+                  <a:srgbClr val="D9A7FF"/>
+                </a:solidFill>
+                <a:latin typeface="Calibri"/>
+              </a:rPr>
+              <a:t>THE RULE</a:t>
+            </a:r>
+          </a:p>
+        </p:txBody>
+      </p:sp>
+      <p:sp>
+        <p:nvSpPr>
+          <p:cNvPr id="25" name="TextBox 24"/>
+          <p:cNvSpPr txBox="1"/>
+          <p:nvPr/>
+        </p:nvSpPr>
+        <p:spPr>
+          <a:xfrm>
+            <a:off x="8274100" y="2962656"/>
+            <a:ext cx="3186074" cy="498856"/>
+          </a:xfrm>
+          <a:prstGeom prst="rect">
+            <a:avLst/>
+          </a:prstGeom>
+          <a:noFill/>
+        </p:spPr>
+        <p:txBody>
+          <a:bodyPr wrap="square" anchor="t" lIns="0" rIns="0" tIns="0" bIns="0">
+            <a:spAutoFit/>
+          </a:bodyPr>
+          <a:lstStyle/>
+          <a:p>
+            <a:pPr algn="l"/>
+            <a:r>
+              <a:rPr sz="1400" b="1" i="0">
+                <a:solidFill>
+                  <a:srgbClr val="FFFFFF"/>
+                </a:solidFill>
+                <a:latin typeface="Calibri"/>
+              </a:rPr>
+              <a:t>Beat the bot, then place the festival</a:t>
+            </a:r>
+          </a:p>
+        </p:txBody>
+      </p:sp>
+      <p:sp>
+        <p:nvSpPr>
+          <p:cNvPr id="26" name="TextBox 25"/>
+          <p:cNvSpPr txBox="1"/>
+          <p:nvPr/>
+        </p:nvSpPr>
+        <p:spPr>
+          <a:xfrm>
+            <a:off x="8274100" y="3534664"/>
+            <a:ext cx="3186074" cy="581406"/>
+          </a:xfrm>
+          <a:prstGeom prst="rect">
+            <a:avLst/>
+          </a:prstGeom>
+          <a:noFill/>
+        </p:spPr>
+        <p:txBody>
+          <a:bodyPr wrap="square" anchor="t" lIns="0" rIns="0" tIns="0" bIns="0">
+            <a:spAutoFit/>
+          </a:bodyPr>
+          <a:lstStyle/>
+          <a:p>
+            <a:pPr algn="l"/>
+            <a:r>
+              <a:rPr sz="1100" b="0" i="0">
+                <a:solidFill>
+                  <a:srgbClr val="CFC9EE"/>
+                </a:solidFill>
+                <a:latin typeface="Calibri"/>
+              </a:rPr>
+              <a:t>Score on hidden weeks in shipments and rupees; copy by distance from Diwali; cover demand in 0.82 of weeks.</a:t>
+            </a:r>
+          </a:p>
+        </p:txBody>
+      </p:sp>
+      <p:sp>
+        <p:nvSpPr>
+          <p:cNvPr id="27" name="Oval 26"/>
+          <p:cNvSpPr/>
+          <p:nvPr/>
+        </p:nvSpPr>
+        <p:spPr>
+          <a:xfrm>
+            <a:off x="530352" y="6492240"/>
+            <a:ext cx="64008" cy="64008"/>
+          </a:xfrm>
+          <a:prstGeom prst="ellipse">
+            <a:avLst/>
+          </a:prstGeom>
+          <a:solidFill>
+            <a:srgbClr val="CFC9EE"/>
+          </a:solidFill>
+          <a:ln>
+            <a:noFill/>
+          </a:ln>
+          <a:effectLst/>
+        </p:spPr>
+        <p:style>
+          <a:lnRef idx="1">
+            <a:schemeClr val="accent1"/>
+          </a:lnRef>
+          <a:fillRef idx="3">
+            <a:schemeClr val="accent1"/>
+          </a:fillRef>
+          <a:effectRef idx="2">
+            <a:schemeClr val="accent1"/>
+          </a:effectRef>
+          <a:fontRef idx="minor">
+            <a:schemeClr val="lt1"/>
+          </a:fontRef>
+        </p:style>
+        <p:txBody>
+          <a:bodyPr rtlCol="0" anchor="ctr" wrap="square"/>
+          <a:lstStyle/>
+          <a:p>
+            <a:pPr algn="ctr"/>
+          </a:p>
+        </p:txBody>
+      </p:sp>
+      <p:sp>
+        <p:nvSpPr>
+          <p:cNvPr id="28" name="TextBox 27"/>
+          <p:cNvSpPr txBox="1"/>
+          <p:nvPr/>
+        </p:nvSpPr>
+        <p:spPr>
+          <a:xfrm>
+            <a:off x="640080" y="6437376"/>
+            <a:ext cx="1608486" cy="152146"/>
+          </a:xfrm>
+          <a:prstGeom prst="rect">
+            <a:avLst/>
+          </a:prstGeom>
+          <a:noFill/>
+        </p:spPr>
+        <p:txBody>
+          <a:bodyPr wrap="square" anchor="t" lIns="0" rIns="0" tIns="0" bIns="0">
+            <a:spAutoFit/>
+          </a:bodyPr>
+          <a:lstStyle/>
+          <a:p>
+            <a:pPr algn="l"/>
+            <a:r>
+              <a:rPr sz="700" b="0" i="0">
+                <a:solidFill>
+                  <a:srgbClr val="6B6690"/>
+                </a:solidFill>
+                <a:latin typeface="Calibri"/>
+              </a:rPr>
+              <a:t>What shape do the weeks have?</a:t>
+            </a:r>
+          </a:p>
+        </p:txBody>
+      </p:sp>
+      <p:sp>
+        <p:nvSpPr>
+          <p:cNvPr id="29" name="Oval 28"/>
+          <p:cNvSpPr/>
+          <p:nvPr/>
+        </p:nvSpPr>
+        <p:spPr>
+          <a:xfrm>
+            <a:off x="2340006" y="6492240"/>
+            <a:ext cx="64008" cy="64008"/>
+          </a:xfrm>
+          <a:prstGeom prst="ellipse">
+            <a:avLst/>
+          </a:prstGeom>
+          <a:solidFill>
+            <a:srgbClr val="CFC9EE"/>
+          </a:solidFill>
+          <a:ln>
+            <a:noFill/>
+          </a:ln>
+          <a:effectLst/>
+        </p:spPr>
+        <p:style>
+          <a:lnRef idx="1">
+            <a:schemeClr val="accent1"/>
+          </a:lnRef>
+          <a:fillRef idx="3">
+            <a:schemeClr val="accent1"/>
+          </a:fillRef>
+          <a:effectRef idx="2">
+            <a:schemeClr val="accent1"/>
+          </a:effectRef>
+          <a:fontRef idx="minor">
+            <a:schemeClr val="lt1"/>
+          </a:fontRef>
+        </p:style>
+        <p:txBody>
+          <a:bodyPr rtlCol="0" anchor="ctr" wrap="square"/>
+          <a:lstStyle/>
+          <a:p>
+            <a:pPr algn="ctr"/>
+          </a:p>
+        </p:txBody>
+      </p:sp>
+      <p:sp>
+        <p:nvSpPr>
+          <p:cNvPr id="30" name="TextBox 29"/>
+          <p:cNvSpPr txBox="1"/>
+          <p:nvPr/>
+        </p:nvSpPr>
+        <p:spPr>
+          <a:xfrm>
+            <a:off x="2449734" y="6437376"/>
+            <a:ext cx="1746504" cy="152146"/>
+          </a:xfrm>
+          <a:prstGeom prst="rect">
+            <a:avLst/>
+          </a:prstGeom>
+          <a:noFill/>
+        </p:spPr>
+        <p:txBody>
+          <a:bodyPr wrap="square" anchor="t" lIns="0" rIns="0" tIns="0" bIns="0">
+            <a:spAutoFit/>
+          </a:bodyPr>
+          <a:lstStyle/>
+          <a:p>
+            <a:pPr algn="l"/>
+            <a:r>
+              <a:rPr sz="700" b="0" i="0">
+                <a:solidFill>
+                  <a:srgbClr val="6B6690"/>
+                </a:solidFill>
+                <a:latin typeface="Calibri"/>
+              </a:rPr>
+              <a:t>Which rule wins on hidden weeks?</a:t>
+            </a:r>
+          </a:p>
+        </p:txBody>
+      </p:sp>
+      <p:sp>
+        <p:nvSpPr>
+          <p:cNvPr id="31" name="Oval 30"/>
+          <p:cNvSpPr/>
+          <p:nvPr/>
+        </p:nvSpPr>
+        <p:spPr>
+          <a:xfrm>
+            <a:off x="4287678" y="6492240"/>
+            <a:ext cx="64008" cy="64008"/>
+          </a:xfrm>
+          <a:prstGeom prst="ellipse">
+            <a:avLst/>
+          </a:prstGeom>
+          <a:solidFill>
+            <a:srgbClr val="5B3FD6"/>
+          </a:solidFill>
+          <a:ln>
+            <a:noFill/>
+          </a:ln>
+          <a:effectLst/>
+        </p:spPr>
+        <p:style>
+          <a:lnRef idx="1">
+            <a:schemeClr val="accent1"/>
+          </a:lnRef>
+          <a:fillRef idx="3">
+            <a:schemeClr val="accent1"/>
+          </a:fillRef>
+          <a:effectRef idx="2">
+            <a:schemeClr val="accent1"/>
+          </a:effectRef>
+          <a:fontRef idx="minor">
+            <a:schemeClr val="lt1"/>
+          </a:fontRef>
+        </p:style>
+        <p:txBody>
+          <a:bodyPr rtlCol="0" anchor="ctr" wrap="square"/>
+          <a:lstStyle/>
+          <a:p>
+            <a:pPr algn="ctr"/>
+          </a:p>
+        </p:txBody>
+      </p:sp>
+      <p:sp>
+        <p:nvSpPr>
+          <p:cNvPr id="32" name="TextBox 31"/>
+          <p:cNvSpPr txBox="1"/>
+          <p:nvPr/>
+        </p:nvSpPr>
+        <p:spPr>
+          <a:xfrm>
+            <a:off x="4397406" y="6437376"/>
+            <a:ext cx="1746504" cy="152146"/>
+          </a:xfrm>
+          <a:prstGeom prst="rect">
+            <a:avLst/>
+          </a:prstGeom>
+          <a:noFill/>
+        </p:spPr>
+        <p:txBody>
+          <a:bodyPr wrap="square" anchor="t" lIns="0" rIns="0" tIns="0" bIns="0">
+            <a:spAutoFit/>
+          </a:bodyPr>
+          <a:lstStyle/>
+          <a:p>
+            <a:pPr algn="l"/>
+            <a:r>
+              <a:rPr sz="700" b="1" i="0">
+                <a:solidFill>
+                  <a:srgbClr val="5B3FD6"/>
+                </a:solidFill>
+                <a:latin typeface="Calibri"/>
+              </a:rPr>
+              <a:t>Which forecast books the shifts?</a:t>
+            </a:r>
+          </a:p>
+        </p:txBody>
+      </p:sp>
+      <p:sp>
+        <p:nvSpPr>
+          <p:cNvPr id="33" name="TextBox 32"/>
+          <p:cNvSpPr txBox="1"/>
+          <p:nvPr/>
+        </p:nvSpPr>
+        <p:spPr>
+          <a:xfrm>
+            <a:off x="10198303" y="6437376"/>
+            <a:ext cx="1463040" cy="160401"/>
+          </a:xfrm>
+          <a:prstGeom prst="rect">
+            <a:avLst/>
+          </a:prstGeom>
+          <a:noFill/>
+        </p:spPr>
+        <p:txBody>
+          <a:bodyPr wrap="square" anchor="t" lIns="0" rIns="0" tIns="0" bIns="0">
+            <a:spAutoFit/>
+          </a:bodyPr>
+          <a:lstStyle/>
+          <a:p>
+            <a:pPr algn="r"/>
+            <a:r>
+              <a:rPr sz="750" b="0" i="0">
+                <a:solidFill>
+                  <a:srgbClr val="6B6690"/>
+                </a:solidFill>
+                <a:latin typeface="Calibri"/>
+              </a:rPr>
+              <a:t>S37  ·  40 / 40</a:t>
             </a:r>
           </a:p>
         </p:txBody>
@@ -40441,7 +41305,7 @@
                 </a:solidFill>
                 <a:latin typeface="Calibri"/>
               </a:rPr>
-              <a:t>S4  ·  5 / 39</a:t>
+              <a:t>S4  ·  5 / 40</a:t>
             </a:r>
           </a:p>
         </p:txBody>
@@ -41862,7 +42726,7 @@
                 </a:solidFill>
                 <a:latin typeface="Calibri"/>
               </a:rPr>
-              <a:t>S5  ·  6 / 39</a:t>
+              <a:t>S5  ·  6 / 40</a:t>
             </a:r>
           </a:p>
         </p:txBody>
@@ -42124,8 +42988,8 @@
         </p:blipFill>
         <p:spPr>
           <a:xfrm>
-            <a:off x="2374267" y="1664208"/>
-            <a:ext cx="7443160" cy="3215640"/>
+            <a:off x="2254330" y="1664208"/>
+            <a:ext cx="7683035" cy="3319272"/>
           </a:xfrm>
           <a:prstGeom prst="rect">
             <a:avLst/>
@@ -42140,7 +43004,7 @@
         </p:nvSpPr>
         <p:spPr>
           <a:xfrm>
-            <a:off x="530352" y="4916424"/>
+            <a:off x="530352" y="5020056"/>
             <a:ext cx="11130991" cy="316992"/>
           </a:xfrm>
           <a:prstGeom prst="rect">
@@ -42175,28 +43039,28 @@
         </p:nvSpPr>
         <p:spPr>
           <a:xfrm>
-            <a:off x="530352" y="5242560"/>
-            <a:ext cx="11130991" cy="957072"/>
-          </a:xfrm>
-          <a:prstGeom prst="rect">
-            <a:avLst/>
-          </a:prstGeom>
-          <a:noFill/>
-        </p:spPr>
-        <p:txBody>
-          <a:bodyPr wrap="square" anchor="t" lIns="0" rIns="0" tIns="0" bIns="0">
-            <a:spAutoFit/>
-          </a:bodyPr>
-          <a:lstStyle/>
-          <a:p>
-            <a:r>
-              <a:rPr sz="1600" b="0" i="0">
+            <a:off x="530352" y="5346192"/>
+            <a:ext cx="11130991" cy="853440"/>
+          </a:xfrm>
+          <a:prstGeom prst="rect">
+            <a:avLst/>
+          </a:prstGeom>
+          <a:noFill/>
+        </p:spPr>
+        <p:txBody>
+          <a:bodyPr wrap="square" anchor="t" lIns="0" rIns="0" tIns="0" bIns="0">
+            <a:spAutoFit/>
+          </a:bodyPr>
+          <a:lstStyle/>
+          <a:p>
+            <a:r>
+              <a:rPr sz="1400" b="0" i="0">
                 <a:solidFill>
                   <a:srgbClr val="1A1440"/>
                 </a:solidFill>
                 <a:latin typeface="Calibri"/>
               </a:rPr>
-              <a:t>The busiest week is two weeks before Diwali's week both times: 401,000 shipments in the week of 14 October 2024 and 418,200 in the week of 6 October 2025. Diwali's own week ships 296,900 and 308,900, and the week after is the lowest.</a:t>
+              <a:t>The busiest week is two weeks before Diwali's week both times: 401,000 shipments in the week of 14 October 2024 and 418,200 in the week of 6 October 2025. Both fall in the festive sale, which the calendar table flags in the third and second weeks before Diwali's week. Diwali's own week ships 296,900 and 308,900, and the week after is the lowest.</a:t>
             </a:r>
           </a:p>
         </p:txBody>
@@ -42468,7 +43332,7 @@
                 </a:solidFill>
                 <a:latin typeface="Calibri"/>
               </a:rPr>
-              <a:t>S6  ·  7 / 39</a:t>
+              <a:t>S6  ·  7 / 40</a:t>
             </a:r>
           </a:p>
         </p:txBody>
@@ -42730,8 +43594,8 @@
         </p:blipFill>
         <p:spPr>
           <a:xfrm>
-            <a:off x="1796047" y="1664208"/>
-            <a:ext cx="8599600" cy="3215640"/>
+            <a:off x="2165572" y="1664208"/>
+            <a:ext cx="7860550" cy="2939288"/>
           </a:xfrm>
           <a:prstGeom prst="rect">
             <a:avLst/>
@@ -42746,7 +43610,7 @@
         </p:nvSpPr>
         <p:spPr>
           <a:xfrm>
-            <a:off x="530352" y="4916424"/>
+            <a:off x="530352" y="4640072"/>
             <a:ext cx="11130991" cy="316992"/>
           </a:xfrm>
           <a:prstGeom prst="rect">
@@ -42781,8 +43645,8 @@
         </p:nvSpPr>
         <p:spPr>
           <a:xfrm>
-            <a:off x="530352" y="5242560"/>
-            <a:ext cx="11130991" cy="957072"/>
+            <a:off x="530352" y="4966208"/>
+            <a:ext cx="11130991" cy="1233424"/>
           </a:xfrm>
           <a:prstGeom prst="rect">
             <a:avLst/>
@@ -42802,7 +43666,7 @@
                 </a:solidFill>
                 <a:latin typeface="Calibri"/>
               </a:rPr>
-              <a:t>Read them in this order: the slow climb (trend), the yearly peak (season), the repeat inside a month (here, payday weeks) and what is left over (noise). A planner books against the first three and buys a cushion for the fourth. The numbers are invented so each shape stands alone.</a:t>
+              <a:t>Read them in this order: the slow climb (trend), the repeat on a fixed beat, yearly here (season), the rise and fall with no fixed length (cycle) and what is left over (noise). A series can carry more than one season. A planner books against the first three and buys a cushion for the fourth. The numbers are invented so each shape stands alone.</a:t>
             </a:r>
           </a:p>
         </p:txBody>
@@ -43074,7 +43938,7 @@
                 </a:solidFill>
                 <a:latin typeface="Calibri"/>
               </a:rPr>
-              <a:t>S7  ·  8 / 39</a:t>
+              <a:t>S7  ·  8 / 40</a:t>
             </a:r>
           </a:p>
         </p:txBody>
@@ -43330,7 +44194,7 @@
         </p:nvGraphicFramePr>
         <p:xfrm>
           <a:off x="530352" y="1956816"/>
-          <a:ext cx="11130990" cy="2816352"/>
+          <a:ext cx="11130990" cy="3541776"/>
         </p:xfrm>
         <a:graphic>
           <a:graphicData uri="http://schemas.openxmlformats.org/drawingml/2006/table">
@@ -43339,9 +44203,9 @@
                 <a:tableStyleId>{2D5ABB26-0587-4C30-8999-92F81FD0307C}</a:tableStyleId>
               </a:tblPr>
               <a:tblGrid>
-                <a:gridCol w="1697149"/>
-                <a:gridCol w="4800324"/>
-                <a:gridCol w="4633517"/>
+                <a:gridCol w="3493997"/>
+                <a:gridCol w="3886014"/>
+                <a:gridCol w="3750979"/>
               </a:tblGrid>
               <a:tr h="369824">
                 <a:tc>
@@ -43492,7 +44356,7 @@
                           </a:solidFill>
                           <a:latin typeface="Calibri"/>
                         </a:rPr>
-                        <a:t>Same week last year</a:t>
+                        <a:t>Same week last year: the house bot, or seasonal copy</a:t>
                       </a:r>
                     </a:p>
                   </a:txBody>
@@ -43514,7 +44378,7 @@
                           </a:solidFill>
                           <a:latin typeface="Calibri"/>
                         </a:rPr>
-                        <a:t>The same point one cycle back, here 52 weeks</a:t>
+                        <a:t>The same point one season back, here 52 weeks</a:t>
                       </a:r>
                     </a:p>
                   </a:txBody>
@@ -43582,7 +44446,7 @@
                           </a:solidFill>
                           <a:latin typeface="Calibri"/>
                         </a:rPr>
-                        <a:t>The straight line through the first and last values</a:t>
+                        <a:t>The line from the first value to the last, extended</a:t>
                       </a:r>
                     </a:p>
                   </a:txBody>
@@ -43604,7 +44468,7 @@
                           </a:solidFill>
                           <a:latin typeface="Calibri"/>
                         </a:rPr>
-                        <a:t>The average change added on</a:t>
+                        <a:t>51 plus the average step, (51 - 50) / 3: about 51.3</a:t>
                       </a:r>
                     </a:p>
                   </a:txBody>
@@ -43615,7 +44479,7 @@
                   </a:tcPr>
                 </a:tc>
               </a:tr>
-              <a:tr h="611632">
+              <a:tr h="1337056">
                 <a:tc>
                   <a:txBody>
                     <a:bodyPr/>
@@ -43650,7 +44514,7 @@
                           </a:solidFill>
                           <a:latin typeface="Calibri"/>
                         </a:rPr>
-                        <a:t>The week at the same distance from last year's Diwali, plus the year's growth</a:t>
+                        <a:t>From five weeks before Diwali's week to four after, the week at the same distance from last year's Diwali; otherwise the same calendar week; then plus 4 percent</a:t>
                       </a:r>
                     </a:p>
                   </a:txBody>
@@ -43954,7 +44818,7 @@
                 </a:solidFill>
                 <a:latin typeface="Calibri"/>
               </a:rPr>
-              <a:t>S8  ·  9 / 39</a:t>
+              <a:t>S8  ·  9 / 40</a:t>
             </a:r>
           </a:p>
         </p:txBody>

--- a/content/W04/D5/slides/C2_W04_D05_half1_STUDENT.pptx
+++ b/content/W04/D5/slides/C2_W04_D05_half1_STUDENT.pptx
@@ -29241,7 +29241,7 @@
                 </a:solidFill>
                 <a:latin typeface="Calibri"/>
               </a:rPr>
-              <a:t>LEVEL</a:t>
+              <a:t>CUSHION</a:t>
             </a:r>
           </a:p>
         </p:txBody>

--- a/content/W04/D5/slides/C2_W04_D05_half1_STUDENT.pptx
+++ b/content/W04/D5/slides/C2_W04_D05_half1_STUDENT.pptx
@@ -2556,7 +2556,22 @@
           </a:p>
           <a:p>
             <a:r>
-              <a:t>score, only its fit. Transition: what plus 22 and plus 4 measure.</a:t>
+              <a:t>score, only its fit. Predict before S31 appears: finance's eight weeks sit 4 percent above the</a:t>
+            </a:r>
+          </a:p>
+          <a:p>
+            <a:r>
+              <a:t>same calendar weeks of 2025; against 2025's weeks counted from Diwali, are they above or below,</a:t>
+            </a:r>
+          </a:p>
+          <a:p>
+            <a:r>
+              <a:t>and by roughly how much? Take a show of hands and write the split on the board. Transition: what</a:t>
+            </a:r>
+          </a:p>
+          <a:p>
+            <a:r>
+              <a:t>plus 22 and plus 4 measure.</a:t>
             </a:r>
           </a:p>
         </p:txBody>
@@ -2636,7 +2651,17 @@
           </a:p>
           <a:p>
             <a:r>
-              <a:t>plus 19.5 against it. Transition: how far above the forecast to plan.</a:t>
+              <a:t>plus 19.5 against it. Predict before S32 appears: should the plan book the forecast itself, less,</a:t>
+            </a:r>
+          </a:p>
+          <a:p>
+            <a:r>
+              <a:t>or more, and in about how many weeks of ten should it cover demand? Most rooms say the forecast</a:t>
+            </a:r>
+          </a:p>
+          <a:p>
+            <a:r>
+              <a:t>itself, covering half. Transition: how far above the forecast to plan.</a:t>
             </a:r>
           </a:p>
         </p:txBody>

--- a/content/W04/D5/slides/C2_W04_D05_half1_STUDENT.pptx
+++ b/content/W04/D5/slides/C2_W04_D05_half1_STUDENT.pptx
@@ -1241,7 +1241,12 @@
           <a:lstStyle/>
           <a:p>
             <a:r>
-              <a:t>LIVE, 4 minutes. Thirteen hidden weeks cover the eight-week horizon with room. Point at the</a:t>
+              <a:t>LIVE, 4 minutes. Thirteen hidden weeks cover the ten-week horizon with room. The plan books eight</a:t>
+            </a:r>
+          </a:p>
+          <a:p>
+            <a:r>
+              <a:t>weeks, but its last week is ten weeks past the data, and the horizon is the farthest week ahead. Point at the</a:t>
             </a:r>
           </a:p>
           <a:p>
@@ -1866,7 +1871,7 @@
           </a:p>
           <a:p>
             <a:r>
-              <a:t>reason: being short costs 4.6 times being long. Transition: why the vendor still does not win.</a:t>
+              <a:t>reason: a late shipment costs 4.6 times a spare one. Transition: why the vendor still does not win.</a:t>
             </a:r>
           </a:p>
         </p:txBody>
@@ -3611,17 +3616,17 @@
           </a:p>
           <a:p>
             <a:r>
-              <a:t>simple rule any model must beat, and the house bot is the tournament's. The 4 percent is measured,</a:t>
-            </a:r>
-          </a:p>
-          <a:p>
-            <a:r>
-              <a:t>not borrowed from finance: notebook 02 sets the latest 39 training weeks against the same weeks a</a:t>
-            </a:r>
-          </a:p>
-          <a:p>
-            <a:r>
-              <a:t>year earlier and gets 4.0 percent. Transition: the three rules on one real week.</a:t>
+              <a:t>simple rule any model must beat, and the house bot is the tournament's. The 4 percent is measured:</a:t>
+            </a:r>
+          </a:p>
+          <a:p>
+            <a:r>
+              <a:t>notebook 02 sets the latest 39 training weeks against the same weeks a year earlier and gets 4.0</a:t>
+            </a:r>
+          </a:p>
+          <a:p>
+            <a:r>
+              <a:t>percent, the same figure finance uses. Transition: the three rules on one real week.</a:t>
             </a:r>
           </a:p>
         </p:txBody>
@@ -11629,7 +11634,7 @@
                           </a:solidFill>
                           <a:latin typeface="Calibri"/>
                         </a:rPr>
-                        <a:t>Ekart, the supply chain behind Flipkart's deliveries, added 14 million cubic feet of warehousing space ahead of The Big Billion Days, Flipkart's yearly festive sale, and more than 2.5 lakh direct and indirect festive jobs were created (Flipkart's announcement, checked 12 October 2026)</a:t>
+                        <a:t>Ekart, the supply chain behind Flipkart's deliveries, added 14 million cubic feet of warehousing space ahead of The Big Billion Days, Flipkart's yearly festive sale, and more than 2.5 lakh direct and indirect festive employment opportunities were created (Flipkart's announcement, checked 12 October 2026)</a:t>
                       </a:r>
                     </a:p>
                   </a:txBody>
@@ -12282,7 +12287,7 @@
         <p:spPr>
           <a:xfrm>
             <a:off x="530352" y="3703320"/>
-            <a:ext cx="11130991" cy="1324864"/>
+            <a:ext cx="11130991" cy="1877568"/>
           </a:xfrm>
           <a:prstGeom prst="rect">
             <a:avLst/>
@@ -12325,7 +12330,7 @@
                 </a:solidFill>
                 <a:latin typeface="Calibri"/>
               </a:rPr>
-              <a:t> the computer copied last year's dates, and the festival moved, so its busiest week came at the wrong time. In the M5 forecasting competition, on Walmart's daily sales of 3,049 products, the house bot's rule (there, the same weekday last week) scored 0.847 against 1.752 for naive, lower being better (M5 results workbook, checked 12 October 2026).</a:t>
+              <a:t> the computer copied last year's dates, and the festival moved, so its busiest week came at the wrong time. In the M5 forecasting competition, on Walmart's daily sales of 3,049 products, the house bot's rule one season back (there, the same weekday a week earlier) scored 0.847 against 1.752 for naive on M5's weighted scaled error, lower being better, and only 35.8 percent of the competing teams beat it; the winner, a machine-learning method, reached 0.520 (M5 results workbook and accuracy paper, checked 12 October 2026).</a:t>
             </a:r>
           </a:p>
         </p:txBody>
@@ -13733,7 +13738,7 @@
                 </a:solidFill>
                 <a:latin typeface="Calibri"/>
               </a:rPr>
-              <a:t>The last thirteen, forecast from one week.</a:t>
+              <a:t>The last thirteen, forecast from one origin.</a:t>
             </a:r>
           </a:p>
         </p:txBody>
@@ -15085,8 +15090,8 @@
         </p:blipFill>
         <p:spPr>
           <a:xfrm>
-            <a:off x="2316106" y="1664208"/>
-            <a:ext cx="7559481" cy="2939288"/>
+            <a:off x="2138421" y="1664208"/>
+            <a:ext cx="7914852" cy="3077464"/>
           </a:xfrm>
           <a:prstGeom prst="rect">
             <a:avLst/>
@@ -15101,7 +15106,7 @@
         </p:nvSpPr>
         <p:spPr>
           <a:xfrm>
-            <a:off x="530352" y="4640072"/>
+            <a:off x="530352" y="4778248"/>
             <a:ext cx="11130991" cy="316992"/>
           </a:xfrm>
           <a:prstGeom prst="rect">
@@ -15136,22 +15141,22 @@
         </p:nvSpPr>
         <p:spPr>
           <a:xfrm>
-            <a:off x="530352" y="4966208"/>
-            <a:ext cx="11130991" cy="1233424"/>
-          </a:xfrm>
-          <a:prstGeom prst="rect">
-            <a:avLst/>
-          </a:prstGeom>
-          <a:noFill/>
-        </p:spPr>
-        <p:txBody>
-          <a:bodyPr wrap="square" anchor="t" lIns="0" rIns="0" tIns="0" bIns="0">
-            <a:spAutoFit/>
-          </a:bodyPr>
-          <a:lstStyle/>
-          <a:p>
-            <a:r>
-              <a:rPr sz="1600" b="0" i="0">
+            <a:off x="530352" y="5104384"/>
+            <a:ext cx="11130991" cy="1095247"/>
+          </a:xfrm>
+          <a:prstGeom prst="rect">
+            <a:avLst/>
+          </a:prstGeom>
+          <a:noFill/>
+        </p:spPr>
+        <p:txBody>
+          <a:bodyPr wrap="square" anchor="t" lIns="0" rIns="0" tIns="0" bIns="0">
+            <a:spAutoFit/>
+          </a:bodyPr>
+          <a:lstStyle/>
+          <a:p>
+            <a:r>
+              <a:rPr sz="1400" b="0" i="0">
                 <a:solidFill>
                   <a:srgbClr val="1A1440"/>
                 </a:solidFill>
@@ -15160,7 +15165,7 @@
               <a:t>The </a:t>
             </a:r>
             <a:r>
-              <a:rPr sz="1600" b="1" i="0">
+              <a:rPr sz="1400" b="1" i="0">
                 <a:solidFill>
                   <a:srgbClr val="1A1440"/>
                 </a:solidFill>
@@ -15169,7 +15174,7 @@
               <a:t>hidden weeks</a:t>
             </a:r>
             <a:r>
-              <a:rPr sz="1600" b="0" i="0">
+              <a:rPr sz="1400" b="0" i="0">
                 <a:solidFill>
                   <a:srgbClr val="1A1440"/>
                 </a:solidFill>
@@ -15178,7 +15183,7 @@
               <a:t> (the hold-out, or test set) are kept from every rule: 29 June to 21 September 2026. The 91 </a:t>
             </a:r>
             <a:r>
-              <a:rPr sz="1600" b="1" i="0">
+              <a:rPr sz="1400" b="1" i="0">
                 <a:solidFill>
                   <a:srgbClr val="1A1440"/>
                 </a:solidFill>
@@ -15187,7 +15192,7 @@
               <a:t>training weeks</a:t>
             </a:r>
             <a:r>
-              <a:rPr sz="1600" b="0" i="0">
+              <a:rPr sz="1400" b="0" i="0">
                 <a:solidFill>
                   <a:srgbClr val="1A1440"/>
                 </a:solidFill>
@@ -15196,7 +15201,7 @@
               <a:t> before them are all a rule may see; the last, 22 June, is the </a:t>
             </a:r>
             <a:r>
-              <a:rPr sz="1600" b="1" i="0">
+              <a:rPr sz="1400" b="1" i="0">
                 <a:solidFill>
                   <a:srgbClr val="1A1440"/>
                 </a:solidFill>
@@ -15205,16 +15210,16 @@
               <a:t>origin</a:t>
             </a:r>
             <a:r>
-              <a:rPr sz="1600" b="0" i="0">
+              <a:rPr sz="1400" b="0" i="0">
                 <a:solidFill>
                   <a:srgbClr val="1A1440"/>
                 </a:solidFill>
                 <a:latin typeface="Calibri"/>
               </a:rPr>
-              <a:t> every forecast is made from. The plan's reach, eight weeks, is the </a:t>
-            </a:r>
-            <a:r>
-              <a:rPr sz="1600" b="1" i="0">
+              <a:t> every forecast is made from. The plan's last week, 30 November, sits ten weeks after the last week of data, 21 September: that reach, ten weeks, is the </a:t>
+            </a:r>
+            <a:r>
+              <a:rPr sz="1400" b="1" i="0">
                 <a:solidFill>
                   <a:srgbClr val="1A1440"/>
                 </a:solidFill>
@@ -15223,7 +15228,7 @@
               <a:t>horizon</a:t>
             </a:r>
             <a:r>
-              <a:rPr sz="1600" b="0" i="0">
+              <a:rPr sz="1400" b="0" i="0">
                 <a:solidFill>
                   <a:srgbClr val="1A1440"/>
                 </a:solidFill>
@@ -26037,7 +26042,7 @@
         <p:spPr>
           <a:xfrm>
             <a:off x="530352" y="3960495"/>
-            <a:ext cx="11130991" cy="1048512"/>
+            <a:ext cx="11130991" cy="1601216"/>
           </a:xfrm>
           <a:prstGeom prst="rect">
             <a:avLst/>
@@ -26062,7 +26067,7 @@
                 </a:solidFill>
                 <a:latin typeface="Calibri"/>
               </a:rPr>
-              <a:t>On 1,045 monthly series, statistical methods beat every machine-learning method, and the best fits to the past did not forecast best (Makridakis and colleagues, PLOS ONE, 2018, checked 12 October 2026). </a:t>
+              <a:t>On 1,045 monthly series, statistical methods beat the machine-learning ones at every horizon tested, and even Naive 2, a seasonal random walk, beat half of them one step ahead (Makridakis and colleagues, PLOS ONE, 2018); in the M5 competition machine learning took every top place. Either way the winner was decided on weeks the model never saw (both checked 12 October 2026). </a:t>
             </a:r>
             <a:r>
               <a:rPr sz="1600" b="1" i="0">
@@ -27564,7 +27569,7 @@
                 </a:solidFill>
                 <a:latin typeface="Calibri"/>
               </a:rPr>
-              <a:t>Its average miss on thirteen weeks it never saw: about Rs 35,800 of idle shifts if a week lands high, Rs 1.65 lakh of late shipments if low.</a:t>
+              <a:t>The forecast's average miss on thirteen weeks it never saw: about Rs 35,800 of idle shifts when it runs that far high, Rs 1.65 lakh of late shipments when that far low.</a:t>
             </a:r>
           </a:p>
         </p:txBody>
@@ -34536,7 +34541,7 @@
                 </a:solidFill>
                 <a:latin typeface="Calibri"/>
               </a:rPr>
-              <a:t>Sort the thirteen hidden weeks by how far demand came above festival-aligned: from 5.9 percent below to 7.8 percent above. The 0.82 point falls between the 10th week, 2.1 percent, and the 11th, 2.7; read 0.82 of the way along, it is 2.6 percent. The plan covers 10 of the 13 weeks.</a:t>
+              <a:t>Sort the thirteen hidden weeks by how far demand came above festival-aligned: from 5.9 percent below to 7.8 percent above. The 0.82 point falls between the 10th week, 2.1 percent, and the 11th, 2.7; read 0.82 of the way along, it is 2.6 percent. The plan covers 10 of the 13 weeks, and the 11th sits just above it.</a:t>
             </a:r>
           </a:p>
         </p:txBody>
@@ -35063,8 +35068,8 @@
           <p:nvPr/>
         </p:nvGraphicFramePr>
         <p:xfrm>
-          <a:off x="530352" y="1682496"/>
-          <a:ext cx="11130990" cy="3017520"/>
+          <a:off x="530352" y="1820672"/>
+          <a:ext cx="11130990" cy="2798064"/>
         </p:xfrm>
         <a:graphic>
           <a:graphicData uri="http://schemas.openxmlformats.org/drawingml/2006/table">
@@ -35074,18 +35079,18 @@
               </a:tblPr>
               <a:tblGrid>
                 <a:gridCol w="914400"/>
-                <a:gridCol w="2123058"/>
-                <a:gridCol w="4957996"/>
-                <a:gridCol w="3135536"/>
+                <a:gridCol w="914400"/>
+                <a:gridCol w="5672996"/>
+                <a:gridCol w="3629194"/>
               </a:tblGrid>
-              <a:tr h="335280">
+              <a:tr h="310896">
                 <a:tc>
                   <a:txBody>
                     <a:bodyPr/>
                     <a:lstStyle/>
                     <a:p>
                       <a:r>
-                        <a:rPr sz="1250" b="1" i="0">
+                        <a:rPr sz="1050" b="1" i="0">
                           <a:solidFill>
                             <a:srgbClr val="FFFFFF"/>
                           </a:solidFill>
@@ -35107,7 +35112,7 @@
                     <a:lstStyle/>
                     <a:p>
                       <a:r>
-                        <a:rPr sz="1250" b="1" i="0">
+                        <a:rPr sz="1050" b="1" i="0">
                           <a:solidFill>
                             <a:srgbClr val="FFFFFF"/>
                           </a:solidFill>
@@ -35129,7 +35134,7 @@
                     <a:lstStyle/>
                     <a:p>
                       <a:r>
-                        <a:rPr sz="1250" b="1" i="0">
+                        <a:rPr sz="1050" b="1" i="0">
                           <a:solidFill>
                             <a:srgbClr val="FFFFFF"/>
                           </a:solidFill>
@@ -35151,7 +35156,7 @@
                     <a:lstStyle/>
                     <a:p>
                       <a:r>
-                        <a:rPr sz="1250" b="1" i="0">
+                        <a:rPr sz="1050" b="1" i="0">
                           <a:solidFill>
                             <a:srgbClr val="FFFFFF"/>
                           </a:solidFill>
@@ -35168,14 +35173,14 @@
                   </a:tcPr>
                 </a:tc>
               </a:tr>
-              <a:tr h="335280">
+              <a:tr h="310896">
                 <a:tc>
                   <a:txBody>
                     <a:bodyPr/>
                     <a:lstStyle/>
                     <a:p>
                       <a:r>
-                        <a:rPr sz="1200" b="0" i="0">
+                        <a:rPr sz="1000" b="0" i="0">
                           <a:solidFill>
                             <a:srgbClr val="1A1440"/>
                           </a:solidFill>
@@ -35197,7 +35202,7 @@
                     <a:lstStyle/>
                     <a:p>
                       <a:r>
-                        <a:rPr sz="1200" b="0" i="0">
+                        <a:rPr sz="1000" b="0" i="0">
                           <a:solidFill>
                             <a:srgbClr val="1A1440"/>
                           </a:solidFill>
@@ -35219,7 +35224,7 @@
                     <a:lstStyle/>
                     <a:p>
                       <a:r>
-                        <a:rPr sz="1200" b="0" i="0">
+                        <a:rPr sz="1000" b="0" i="0">
                           <a:solidFill>
                             <a:srgbClr val="1A1440"/>
                           </a:solidFill>
@@ -35241,7 +35246,7 @@
                     <a:lstStyle/>
                     <a:p>
                       <a:r>
-                        <a:rPr sz="1200" b="0" i="0">
+                        <a:rPr sz="1000" b="0" i="0">
                           <a:solidFill>
                             <a:srgbClr val="1A1440"/>
                           </a:solidFill>
@@ -35258,14 +35263,14 @@
                   </a:tcPr>
                 </a:tc>
               </a:tr>
-              <a:tr h="335280">
+              <a:tr h="310896">
                 <a:tc>
                   <a:txBody>
                     <a:bodyPr/>
                     <a:lstStyle/>
                     <a:p>
                       <a:r>
-                        <a:rPr sz="1200" b="0" i="0">
+                        <a:rPr sz="1000" b="0" i="0">
                           <a:solidFill>
                             <a:srgbClr val="1A1440"/>
                           </a:solidFill>
@@ -35287,7 +35292,7 @@
                     <a:lstStyle/>
                     <a:p>
                       <a:r>
-                        <a:rPr sz="1200" b="0" i="0">
+                        <a:rPr sz="1000" b="0" i="0">
                           <a:solidFill>
                             <a:srgbClr val="1A1440"/>
                           </a:solidFill>
@@ -35309,7 +35314,7 @@
                     <a:lstStyle/>
                     <a:p>
                       <a:r>
-                        <a:rPr sz="1200" b="0" i="0">
+                        <a:rPr sz="1000" b="0" i="0">
                           <a:solidFill>
                             <a:srgbClr val="1A1440"/>
                           </a:solidFill>
@@ -35331,7 +35336,7 @@
                     <a:lstStyle/>
                     <a:p>
                       <a:r>
-                        <a:rPr sz="1200" b="0" i="0">
+                        <a:rPr sz="1000" b="0" i="0">
                           <a:solidFill>
                             <a:srgbClr val="1A1440"/>
                           </a:solidFill>
@@ -35348,14 +35353,14 @@
                   </a:tcPr>
                 </a:tc>
               </a:tr>
-              <a:tr h="335280">
+              <a:tr h="310896">
                 <a:tc>
                   <a:txBody>
                     <a:bodyPr/>
                     <a:lstStyle/>
                     <a:p>
                       <a:r>
-                        <a:rPr sz="1200" b="0" i="0">
+                        <a:rPr sz="1000" b="0" i="0">
                           <a:solidFill>
                             <a:srgbClr val="1A1440"/>
                           </a:solidFill>
@@ -35377,7 +35382,7 @@
                     <a:lstStyle/>
                     <a:p>
                       <a:r>
-                        <a:rPr sz="1200" b="0" i="0">
+                        <a:rPr sz="1000" b="0" i="0">
                           <a:solidFill>
                             <a:srgbClr val="1A1440"/>
                           </a:solidFill>
@@ -35399,7 +35404,7 @@
                     <a:lstStyle/>
                     <a:p>
                       <a:r>
-                        <a:rPr sz="1200" b="0" i="0">
+                        <a:rPr sz="1000" b="0" i="0">
                           <a:solidFill>
                             <a:srgbClr val="1A1440"/>
                           </a:solidFill>
@@ -35421,7 +35426,7 @@
                     <a:lstStyle/>
                     <a:p>
                       <a:r>
-                        <a:rPr sz="1200" b="0" i="0">
+                        <a:rPr sz="1000" b="0" i="0">
                           <a:solidFill>
                             <a:srgbClr val="1A1440"/>
                           </a:solidFill>
@@ -35438,14 +35443,14 @@
                   </a:tcPr>
                 </a:tc>
               </a:tr>
-              <a:tr h="335280">
+              <a:tr h="310896">
                 <a:tc>
                   <a:txBody>
                     <a:bodyPr/>
                     <a:lstStyle/>
                     <a:p>
                       <a:r>
-                        <a:rPr sz="1200" b="0" i="0">
+                        <a:rPr sz="1000" b="0" i="0">
                           <a:solidFill>
                             <a:srgbClr val="1A1440"/>
                           </a:solidFill>
@@ -35467,7 +35472,7 @@
                     <a:lstStyle/>
                     <a:p>
                       <a:r>
-                        <a:rPr sz="1200" b="0" i="0">
+                        <a:rPr sz="1000" b="0" i="0">
                           <a:solidFill>
                             <a:srgbClr val="1A1440"/>
                           </a:solidFill>
@@ -35489,7 +35494,7 @@
                     <a:lstStyle/>
                     <a:p>
                       <a:r>
-                        <a:rPr sz="1200" b="0" i="0">
+                        <a:rPr sz="1000" b="0" i="0">
                           <a:solidFill>
                             <a:srgbClr val="1A1440"/>
                           </a:solidFill>
@@ -35511,7 +35516,7 @@
                     <a:lstStyle/>
                     <a:p>
                       <a:r>
-                        <a:rPr sz="1200" b="0" i="0">
+                        <a:rPr sz="1000" b="0" i="0">
                           <a:solidFill>
                             <a:srgbClr val="1A1440"/>
                           </a:solidFill>
@@ -35528,14 +35533,14 @@
                   </a:tcPr>
                 </a:tc>
               </a:tr>
-              <a:tr h="335280">
+              <a:tr h="310896">
                 <a:tc>
                   <a:txBody>
                     <a:bodyPr/>
                     <a:lstStyle/>
                     <a:p>
                       <a:r>
-                        <a:rPr sz="1200" b="0" i="0">
+                        <a:rPr sz="1000" b="0" i="0">
                           <a:solidFill>
                             <a:srgbClr val="1A1440"/>
                           </a:solidFill>
@@ -35557,7 +35562,7 @@
                     <a:lstStyle/>
                     <a:p>
                       <a:r>
-                        <a:rPr sz="1200" b="0" i="0">
+                        <a:rPr sz="1000" b="0" i="0">
                           <a:solidFill>
                             <a:srgbClr val="1A1440"/>
                           </a:solidFill>
@@ -35579,7 +35584,7 @@
                     <a:lstStyle/>
                     <a:p>
                       <a:r>
-                        <a:rPr sz="1200" b="0" i="0">
+                        <a:rPr sz="1000" b="0" i="0">
                           <a:solidFill>
                             <a:srgbClr val="1A1440"/>
                           </a:solidFill>
@@ -35601,7 +35606,7 @@
                     <a:lstStyle/>
                     <a:p>
                       <a:r>
-                        <a:rPr sz="1200" b="0" i="0">
+                        <a:rPr sz="1000" b="0" i="0">
                           <a:solidFill>
                             <a:srgbClr val="1A1440"/>
                           </a:solidFill>
@@ -35618,14 +35623,14 @@
                   </a:tcPr>
                 </a:tc>
               </a:tr>
-              <a:tr h="335280">
+              <a:tr h="310896">
                 <a:tc>
                   <a:txBody>
                     <a:bodyPr/>
                     <a:lstStyle/>
                     <a:p>
                       <a:r>
-                        <a:rPr sz="1200" b="0" i="0">
+                        <a:rPr sz="1000" b="0" i="0">
                           <a:solidFill>
                             <a:srgbClr val="1A1440"/>
                           </a:solidFill>
@@ -35647,7 +35652,7 @@
                     <a:lstStyle/>
                     <a:p>
                       <a:r>
-                        <a:rPr sz="1200" b="0" i="0">
+                        <a:rPr sz="1000" b="0" i="0">
                           <a:solidFill>
                             <a:srgbClr val="1A1440"/>
                           </a:solidFill>
@@ -35669,7 +35674,7 @@
                     <a:lstStyle/>
                     <a:p>
                       <a:r>
-                        <a:rPr sz="1200" b="0" i="0">
+                        <a:rPr sz="1000" b="0" i="0">
                           <a:solidFill>
                             <a:srgbClr val="1A1440"/>
                           </a:solidFill>
@@ -35691,7 +35696,7 @@
                     <a:lstStyle/>
                     <a:p>
                       <a:r>
-                        <a:rPr sz="1200" b="0" i="0">
+                        <a:rPr sz="1000" b="0" i="0">
                           <a:solidFill>
                             <a:srgbClr val="1A1440"/>
                           </a:solidFill>
@@ -35708,14 +35713,14 @@
                   </a:tcPr>
                 </a:tc>
               </a:tr>
-              <a:tr h="335280">
+              <a:tr h="310896">
                 <a:tc>
                   <a:txBody>
                     <a:bodyPr/>
                     <a:lstStyle/>
                     <a:p>
                       <a:r>
-                        <a:rPr sz="1200" b="0" i="0">
+                        <a:rPr sz="1000" b="0" i="0">
                           <a:solidFill>
                             <a:srgbClr val="1A1440"/>
                           </a:solidFill>
@@ -35737,7 +35742,7 @@
                     <a:lstStyle/>
                     <a:p>
                       <a:r>
-                        <a:rPr sz="1200" b="0" i="0">
+                        <a:rPr sz="1000" b="0" i="0">
                           <a:solidFill>
                             <a:srgbClr val="1A1440"/>
                           </a:solidFill>
@@ -35759,7 +35764,7 @@
                     <a:lstStyle/>
                     <a:p>
                       <a:r>
-                        <a:rPr sz="1200" b="0" i="0">
+                        <a:rPr sz="1000" b="0" i="0">
                           <a:solidFill>
                             <a:srgbClr val="1A1440"/>
                           </a:solidFill>
@@ -35781,7 +35786,7 @@
                     <a:lstStyle/>
                     <a:p>
                       <a:r>
-                        <a:rPr sz="1200" b="0" i="0">
+                        <a:rPr sz="1000" b="0" i="0">
                           <a:solidFill>
                             <a:srgbClr val="1A1440"/>
                           </a:solidFill>
@@ -35798,14 +35803,14 @@
                   </a:tcPr>
                 </a:tc>
               </a:tr>
-              <a:tr h="335280">
+              <a:tr h="310896">
                 <a:tc>
                   <a:txBody>
                     <a:bodyPr/>
                     <a:lstStyle/>
                     <a:p>
                       <a:r>
-                        <a:rPr sz="1200" b="0" i="0">
+                        <a:rPr sz="1000" b="0" i="0">
                           <a:solidFill>
                             <a:srgbClr val="1A1440"/>
                           </a:solidFill>
@@ -35827,7 +35832,7 @@
                     <a:lstStyle/>
                     <a:p>
                       <a:r>
-                        <a:rPr sz="1200" b="0" i="0">
+                        <a:rPr sz="1000" b="0" i="0">
                           <a:solidFill>
                             <a:srgbClr val="1A1440"/>
                           </a:solidFill>
@@ -35849,7 +35854,7 @@
                     <a:lstStyle/>
                     <a:p>
                       <a:r>
-                        <a:rPr sz="1200" b="0" i="0">
+                        <a:rPr sz="1000" b="0" i="0">
                           <a:solidFill>
                             <a:srgbClr val="1A1440"/>
                           </a:solidFill>
@@ -35871,7 +35876,7 @@
                     <a:lstStyle/>
                     <a:p>
                       <a:r>
-                        <a:rPr sz="1200" b="0" i="0">
+                        <a:rPr sz="1000" b="0" i="0">
                           <a:solidFill>
                             <a:srgbClr val="1A1440"/>
                           </a:solidFill>
@@ -35900,8 +35905,8 @@
         </p:nvSpPr>
         <p:spPr>
           <a:xfrm>
-            <a:off x="530352" y="4956048"/>
-            <a:ext cx="11130991" cy="1048512"/>
+            <a:off x="530352" y="4874768"/>
+            <a:ext cx="11130991" cy="1186688"/>
           </a:xfrm>
           <a:prstGeom prst="rect">
             <a:avLst/>
@@ -35916,11 +35921,11 @@
           <a:p>
             <a:pPr>
               <a:spcAft>
-                <a:spcPts val="800"/>
+                <a:spcPts val="700"/>
               </a:spcAft>
             </a:pPr>
             <a:r>
-              <a:rPr sz="1600" b="0" i="0">
+              <a:rPr sz="1400" b="0" i="0">
                 <a:solidFill>
                   <a:srgbClr val="1A1440"/>
                 </a:solidFill>
@@ -35929,7 +35934,7 @@
               <a:t>Shifts are the plan over 120, rounded up: 20,275 in all, 515 more than the 19,760 the forecast alone needs. </a:t>
             </a:r>
             <a:r>
-              <a:rPr sz="1600" b="1" i="0">
+              <a:rPr sz="1400" b="1" i="0">
                 <a:solidFill>
                   <a:srgbClr val="1A1440"/>
                 </a:solidFill>
@@ -35938,13 +35943,13 @@
               <a:t>The error bar:</a:t>
             </a:r>
             <a:r>
-              <a:rPr sz="1600" b="0" i="0">
+              <a:rPr sz="1400" b="0" i="0">
                 <a:solidFill>
                   <a:srgbClr val="1A1440"/>
                 </a:solidFill>
                 <a:latin typeface="Calibri"/>
               </a:rPr>
-              <a:t> 6,615 shipments a week on the hidden weeks: about Rs 35,800 of idle shifts if a week lands high, Rs 1.65 lakh of late shipments if low; 4,034 a week on 2025's festival.</a:t>
+              <a:t> the forecast missed by 6,615 shipments a week on the hidden weeks, about Rs 35,800 of idle shifts when it ran that far high and Rs 1.65 lakh of late shipments when that far low, and by 4,034 a week on 2025's festival. For 19 October, demand at the hidden weeks' extremes would need 3,413 to 3,906 shifts against the 3,719 booked.</a:t>
             </a:r>
           </a:p>
         </p:txBody>
@@ -39065,7 +39070,7 @@
         <p:spPr>
           <a:xfrm>
             <a:off x="731519" y="3303524"/>
-            <a:ext cx="3186074" cy="581406"/>
+            <a:ext cx="3186074" cy="763016"/>
           </a:xfrm>
           <a:prstGeom prst="rect">
             <a:avLst/>
@@ -39086,7 +39091,7 @@
                 </a:solidFill>
                 <a:latin typeface="Calibri"/>
               </a:rPr>
-              <a:t>Your 4 percent is the growth two years show. Copied by calendar, it books the peak on 5 October and sits 308,048 shipments short.</a:t>
+              <a:t>Your 4 percent is the growth two years show. Copied by calendar, it puts the peak on 5 October, before the plan's first week, and sits 308,048 shipments short.</a:t>
             </a:r>
           </a:p>
         </p:txBody>
@@ -44539,7 +44544,7 @@
                           </a:solidFill>
                           <a:latin typeface="Calibri"/>
                         </a:rPr>
-                        <a:t>From five weeks before Diwali's week to four after, the week at the same distance from last year's Diwali; otherwise the same calendar week; then plus 4 percent</a:t>
+                        <a:t>From five weeks before Diwali's week to four after, the week at the same distance from last year's Diwali; otherwise the same calendar week; then plus 4 percent, the growth the two years show</a:t>
                       </a:r>
                     </a:p>
                   </a:txBody>

--- a/content/W04/D5/slides/C2_W04_D05_half1_STUDENT.pptx
+++ b/content/W04/D5/slides/C2_W04_D05_half1_STUDENT.pptx
@@ -796,7 +796,7 @@
           </a:p>
           <a:p>
             <a:r>
-              <a:t>Veritasium's move: the reveal follows the vote of S9. Transition: where Diwali falls in 2026.</a:t>
+              <a:t>As in a Veritasium video, the reveal follows the vote of S9. Transition: where Diwali falls in 2026.</a:t>
             </a:r>
           </a:p>
         </p:txBody>
@@ -1486,12 +1486,12 @@
           <a:lstStyle/>
           <a:p>
             <a:r>
-              <a:t>LIVE, 3 minutes. Brilliant's move: the room answers before the scoreboard. Note the tie in d is</a:t>
-            </a:r>
-          </a:p>
-          <a:p>
-            <a:r>
-              <a:t>announced, not hidden: the next slide says why. Transition: the answer.</a:t>
+              <a:t>LIVE, 3 minutes. The room answers before the scoreboard runs, as learners do on Brilliant. Option d</a:t>
+            </a:r>
+          </a:p>
+          <a:p>
+            <a:r>
+              <a:t>names the tie on purpose, and the next slide says why. Transition: the answer.</a:t>
             </a:r>
           </a:p>
         </p:txBody>
@@ -1561,7 +1561,7 @@
           <a:lstStyle/>
           <a:p>
             <a:r>
-              <a:t>LIVE, 5 minutes. Tufte's small multiples: one rule per panel on the same axes. The bot beats naive</a:t>
+              <a:t>LIVE, 5 minutes. The chart uses Tufte's small multiples, one rule per panel on the same axes. The bot beats naive</a:t>
             </a:r>
           </a:p>
           <a:p>
@@ -3216,12 +3216,22 @@
           <a:lstStyle/>
           <a:p>
             <a:r>
-              <a:t>LIVE, 3 minutes. Each stakeholder is partly right: concede the true part first. The afternoon</a:t>
-            </a:r>
-          </a:p>
-          <a:p>
-            <a:r>
-              <a:t>writes the staffing note from these three cards. Transition: lunch, then half two.</a:t>
+              <a:t>LIVE, 3 minutes. The forecast joins the week's map as the promise the plan is held to: Thursday's</a:t>
+            </a:r>
+          </a:p>
+          <a:p>
+            <a:r>
+              <a:t>time axis feeds it and Monday's guardrails bound what it may chase. Each stakeholder is partly</a:t>
+            </a:r>
+          </a:p>
+          <a:p>
+            <a:r>
+              <a:t>right, so concede the true part first; the afternoon writes the staffing note from these three</a:t>
+            </a:r>
+          </a:p>
+          <a:p>
+            <a:r>
+              <a:t>lines. Transition: lunch, then half two.</a:t>
             </a:r>
           </a:p>
         </p:txBody>
@@ -3521,7 +3531,7 @@
           <a:lstStyle/>
           <a:p>
             <a:r>
-              <a:t>LIVE, 3 minutes. 3Blue1Brown's move: the picture first, the names after. The real series has a</a:t>
+              <a:t>LIVE, 3 minutes. Show the picture first and the names after, as 3Blue1Brown does. The real series has a</a:t>
             </a:r>
           </a:p>
           <a:p>
@@ -37692,7 +37702,7 @@
                           </a:solidFill>
                           <a:latin typeface="Calibri"/>
                         </a:rPr>
-                        <a:t>The 2025 festival's 4,034 a week; a hold-out that spans a festival would settle it</a:t>
+                        <a:t>The 2025 festival's 4,034 a week; a rolling origin through that festival would settle it</a:t>
                       </a:r>
                     </a:p>
                   </a:txBody>
@@ -37830,7 +37840,7 @@
                           </a:solidFill>
                           <a:latin typeface="Calibri"/>
                         </a:rPr>
-                        <a:t>Two-wheeler sales to buyers ran at 31.5 lakh in October 2025 against 12.9 lakh in September, part of it credited to cuts in GST, India's goods and services tax (FADA, the Federation of Automobile Dealers Associations, release of 7 November 2025, checked 12 October 2026); a series with the tax change marked would settle it</a:t>
+                        <a:t>Two-wheeler retail registrations ran at 31.5 lakh in October 2025 against 12.9 lakh in September, part of it credited to cuts in GST, India's goods and services tax (FADA, the Federation of Automobile Dealers Associations, release of 7 November 2025, checked 12 October 2026); a series with the tax change marked would settle it</a:t>
                       </a:r>
                     </a:p>
                   </a:txBody>
@@ -38869,334 +38879,9 @@
           </a:p>
         </p:txBody>
       </p:sp>
-      <p:sp>
-        <p:nvSpPr>
-          <p:cNvPr id="9" name="Rounded Rectangle 8"/>
-          <p:cNvSpPr/>
-          <p:nvPr/>
-        </p:nvSpPr>
-        <p:spPr>
-          <a:xfrm>
-            <a:off x="530352" y="1956816"/>
-            <a:ext cx="3588410" cy="2385568"/>
-          </a:xfrm>
-          <a:prstGeom prst="roundRect">
-            <a:avLst>
-              <a:gd name="adj" fmla="val 5000"/>
-            </a:avLst>
-          </a:prstGeom>
-          <a:solidFill>
-            <a:srgbClr val="FFFFFF"/>
-          </a:solidFill>
-          <a:ln w="9525">
-            <a:solidFill>
-              <a:srgbClr val="E4E1F1"/>
-            </a:solidFill>
-          </a:ln>
-          <a:effectLst>
-            <a:outerShdw blurRad="76200" dist="19050" dir="5400000" algn="bl" rotWithShape="0">
-              <a:srgbClr val="1A0F5C">
-                <a:alpha val="12000"/>
-              </a:srgbClr>
-            </a:outerShdw>
-          </a:effectLst>
-        </p:spPr>
-        <p:style>
-          <a:lnRef idx="1">
-            <a:schemeClr val="accent1"/>
-          </a:lnRef>
-          <a:fillRef idx="3">
-            <a:schemeClr val="accent1"/>
-          </a:fillRef>
-          <a:effectRef idx="2">
-            <a:schemeClr val="accent1"/>
-          </a:effectRef>
-          <a:fontRef idx="minor">
-            <a:schemeClr val="lt1"/>
-          </a:fontRef>
-        </p:style>
-        <p:txBody>
-          <a:bodyPr rtlCol="0" anchor="ctr" wrap="square"/>
-          <a:lstStyle/>
-          <a:p>
-            <a:pPr algn="ctr"/>
-          </a:p>
-        </p:txBody>
-      </p:sp>
-      <p:sp>
-        <p:nvSpPr>
-          <p:cNvPr id="10" name="Oval 9"/>
-          <p:cNvSpPr/>
-          <p:nvPr/>
-        </p:nvSpPr>
-        <p:spPr>
-          <a:xfrm>
-            <a:off x="731519" y="2157984"/>
-            <a:ext cx="457200" cy="457200"/>
-          </a:xfrm>
-          <a:prstGeom prst="ellipse">
-            <a:avLst/>
-          </a:prstGeom>
-          <a:solidFill>
-            <a:srgbClr val="EEEAFB"/>
-          </a:solidFill>
-          <a:ln>
-            <a:noFill/>
-          </a:ln>
-          <a:effectLst/>
-        </p:spPr>
-        <p:style>
-          <a:lnRef idx="1">
-            <a:schemeClr val="accent1"/>
-          </a:lnRef>
-          <a:fillRef idx="3">
-            <a:schemeClr val="accent1"/>
-          </a:fillRef>
-          <a:effectRef idx="2">
-            <a:schemeClr val="accent1"/>
-          </a:effectRef>
-          <a:fontRef idx="minor">
-            <a:schemeClr val="lt1"/>
-          </a:fontRef>
-        </p:style>
-        <p:txBody>
-          <a:bodyPr rtlCol="0" anchor="ctr" wrap="square"/>
-          <a:lstStyle/>
-          <a:p>
-            <a:pPr algn="ctr"/>
-          </a:p>
-        </p:txBody>
-      </p:sp>
       <p:pic>
         <p:nvPicPr>
-          <p:cNvPr id="11" name="Picture 10" descr="calculator_852ec1ae1794.png"/>
-          <p:cNvPicPr>
-            <a:picLocks noChangeAspect="1"/>
-          </p:cNvPicPr>
-          <p:nvPr/>
-        </p:nvPicPr>
-        <p:blipFill>
-          <a:blip r:embed="rId4"/>
-          <a:stretch>
-            <a:fillRect/>
-          </a:stretch>
-        </p:blipFill>
-        <p:spPr>
-          <a:xfrm>
-            <a:off x="841247" y="2267712"/>
-            <a:ext cx="237744" cy="237744"/>
-          </a:xfrm>
-          <a:prstGeom prst="rect">
-            <a:avLst/>
-          </a:prstGeom>
-        </p:spPr>
-      </p:pic>
-      <p:sp>
-        <p:nvSpPr>
-          <p:cNvPr id="12" name="TextBox 11"/>
-          <p:cNvSpPr txBox="1"/>
-          <p:nvPr/>
-        </p:nvSpPr>
-        <p:spPr>
-          <a:xfrm>
-            <a:off x="731519" y="2724912"/>
-            <a:ext cx="3186074" cy="160401"/>
-          </a:xfrm>
-          <a:prstGeom prst="rect">
-            <a:avLst/>
-          </a:prstGeom>
-          <a:noFill/>
-        </p:spPr>
-        <p:txBody>
-          <a:bodyPr wrap="square" anchor="t" lIns="0" rIns="0" tIns="0" bIns="0">
-            <a:spAutoFit/>
-          </a:bodyPr>
-          <a:lstStyle/>
-          <a:p>
-            <a:pPr algn="l"/>
-            <a:r>
-              <a:rPr sz="750" b="1" i="0" spc="250">
-                <a:solidFill>
-                  <a:srgbClr val="5B3FD6"/>
-                </a:solidFill>
-                <a:latin typeface="Calibri"/>
-              </a:rPr>
-              <a:t>TO FINANCE</a:t>
-            </a:r>
-          </a:p>
-        </p:txBody>
-      </p:sp>
-      <p:sp>
-        <p:nvSpPr>
-          <p:cNvPr id="13" name="TextBox 12"/>
-          <p:cNvSpPr txBox="1"/>
-          <p:nvPr/>
-        </p:nvSpPr>
-        <p:spPr>
-          <a:xfrm>
-            <a:off x="731519" y="2962656"/>
-            <a:ext cx="3186074" cy="267716"/>
-          </a:xfrm>
-          <a:prstGeom prst="rect">
-            <a:avLst/>
-          </a:prstGeom>
-          <a:noFill/>
-        </p:spPr>
-        <p:txBody>
-          <a:bodyPr wrap="square" anchor="t" lIns="0" rIns="0" tIns="0" bIns="0">
-            <a:spAutoFit/>
-          </a:bodyPr>
-          <a:lstStyle/>
-          <a:p>
-            <a:pPr algn="l"/>
-            <a:r>
-              <a:rPr sz="1400" b="1" i="0">
-                <a:solidFill>
-                  <a:srgbClr val="1A0F5C"/>
-                </a:solidFill>
-                <a:latin typeface="Calibri"/>
-              </a:rPr>
-              <a:t>Right growth, wrong weeks</a:t>
-            </a:r>
-          </a:p>
-        </p:txBody>
-      </p:sp>
-      <p:sp>
-        <p:nvSpPr>
-          <p:cNvPr id="14" name="TextBox 13"/>
-          <p:cNvSpPr txBox="1"/>
-          <p:nvPr/>
-        </p:nvSpPr>
-        <p:spPr>
-          <a:xfrm>
-            <a:off x="731519" y="3303524"/>
-            <a:ext cx="3186074" cy="763016"/>
-          </a:xfrm>
-          <a:prstGeom prst="rect">
-            <a:avLst/>
-          </a:prstGeom>
-          <a:noFill/>
-        </p:spPr>
-        <p:txBody>
-          <a:bodyPr wrap="square" anchor="t" lIns="0" rIns="0" tIns="0" bIns="0">
-            <a:spAutoFit/>
-          </a:bodyPr>
-          <a:lstStyle/>
-          <a:p>
-            <a:pPr algn="l"/>
-            <a:r>
-              <a:rPr sz="1100" b="0" i="0">
-                <a:solidFill>
-                  <a:srgbClr val="6B6690"/>
-                </a:solidFill>
-                <a:latin typeface="Calibri"/>
-              </a:rPr>
-              <a:t>Your 4 percent is the growth two years show. Copied by calendar, it puts the peak on 5 October, before the plan's first week, and sits 308,048 shipments short.</a:t>
-            </a:r>
-          </a:p>
-        </p:txBody>
-      </p:sp>
-      <p:sp>
-        <p:nvSpPr>
-          <p:cNvPr id="15" name="Rounded Rectangle 14"/>
-          <p:cNvSpPr/>
-          <p:nvPr/>
-        </p:nvSpPr>
-        <p:spPr>
-          <a:xfrm>
-            <a:off x="4301642" y="1956816"/>
-            <a:ext cx="3588410" cy="2385568"/>
-          </a:xfrm>
-          <a:prstGeom prst="roundRect">
-            <a:avLst>
-              <a:gd name="adj" fmla="val 5000"/>
-            </a:avLst>
-          </a:prstGeom>
-          <a:solidFill>
-            <a:srgbClr val="FFFFFF"/>
-          </a:solidFill>
-          <a:ln w="9525">
-            <a:solidFill>
-              <a:srgbClr val="E4E1F1"/>
-            </a:solidFill>
-          </a:ln>
-          <a:effectLst>
-            <a:outerShdw blurRad="76200" dist="19050" dir="5400000" algn="bl" rotWithShape="0">
-              <a:srgbClr val="1A0F5C">
-                <a:alpha val="12000"/>
-              </a:srgbClr>
-            </a:outerShdw>
-          </a:effectLst>
-        </p:spPr>
-        <p:style>
-          <a:lnRef idx="1">
-            <a:schemeClr val="accent1"/>
-          </a:lnRef>
-          <a:fillRef idx="3">
-            <a:schemeClr val="accent1"/>
-          </a:fillRef>
-          <a:effectRef idx="2">
-            <a:schemeClr val="accent1"/>
-          </a:effectRef>
-          <a:fontRef idx="minor">
-            <a:schemeClr val="lt1"/>
-          </a:fontRef>
-        </p:style>
-        <p:txBody>
-          <a:bodyPr rtlCol="0" anchor="ctr" wrap="square"/>
-          <a:lstStyle/>
-          <a:p>
-            <a:pPr algn="ctr"/>
-          </a:p>
-        </p:txBody>
-      </p:sp>
-      <p:sp>
-        <p:nvSpPr>
-          <p:cNvPr id="16" name="Oval 15"/>
-          <p:cNvSpPr/>
-          <p:nvPr/>
-        </p:nvSpPr>
-        <p:spPr>
-          <a:xfrm>
-            <a:off x="4502810" y="2157984"/>
-            <a:ext cx="457200" cy="457200"/>
-          </a:xfrm>
-          <a:prstGeom prst="ellipse">
-            <a:avLst/>
-          </a:prstGeom>
-          <a:solidFill>
-            <a:srgbClr val="EEEAFB"/>
-          </a:solidFill>
-          <a:ln>
-            <a:noFill/>
-          </a:ln>
-          <a:effectLst/>
-        </p:spPr>
-        <p:style>
-          <a:lnRef idx="1">
-            <a:schemeClr val="accent1"/>
-          </a:lnRef>
-          <a:fillRef idx="3">
-            <a:schemeClr val="accent1"/>
-          </a:fillRef>
-          <a:effectRef idx="2">
-            <a:schemeClr val="accent1"/>
-          </a:effectRef>
-          <a:fontRef idx="minor">
-            <a:schemeClr val="lt1"/>
-          </a:fontRef>
-        </p:style>
-        <p:txBody>
-          <a:bodyPr rtlCol="0" anchor="ctr" wrap="square"/>
-          <a:lstStyle/>
-          <a:p>
-            <a:pPr algn="ctr"/>
-          </a:p>
-        </p:txBody>
-      </p:sp>
-      <p:pic>
-        <p:nvPicPr>
-          <p:cNvPr id="17" name="Picture 16" descr="trending-up_0f9f07881489.png"/>
+          <p:cNvPr id="9" name="mermaid diagram" descr="052451889d7f1b16.png"/>
           <p:cNvPicPr>
             <a:picLocks noChangeAspect="1"/>
           </p:cNvPicPr>
@@ -39210,8 +38895,8 @@
         </p:blipFill>
         <p:spPr>
           <a:xfrm>
-            <a:off x="4612538" y="2267712"/>
-            <a:ext cx="237744" cy="237744"/>
+            <a:off x="829168" y="1664208"/>
+            <a:ext cx="10533357" cy="3256280"/>
           </a:xfrm>
           <a:prstGeom prst="rect">
             <a:avLst/>
@@ -39220,146 +38905,59 @@
       </p:pic>
       <p:sp>
         <p:nvSpPr>
-          <p:cNvPr id="18" name="TextBox 17"/>
-          <p:cNvSpPr txBox="1"/>
-          <p:nvPr/>
-        </p:nvSpPr>
-        <p:spPr>
-          <a:xfrm>
-            <a:off x="4502810" y="2724912"/>
-            <a:ext cx="3186074" cy="160401"/>
-          </a:xfrm>
-          <a:prstGeom prst="rect">
-            <a:avLst/>
-          </a:prstGeom>
-          <a:noFill/>
-        </p:spPr>
-        <p:txBody>
-          <a:bodyPr wrap="square" anchor="t" lIns="0" rIns="0" tIns="0" bIns="0">
-            <a:spAutoFit/>
-          </a:bodyPr>
-          <a:lstStyle/>
-          <a:p>
-            <a:pPr algn="l"/>
-            <a:r>
-              <a:rPr sz="750" b="1" i="0" spc="250">
-                <a:solidFill>
-                  <a:srgbClr val="5B3FD6"/>
-                </a:solidFill>
-                <a:latin typeface="Calibri"/>
-              </a:rPr>
-              <a:t>TO THE VENDOR'S SPONSOR</a:t>
-            </a:r>
-          </a:p>
-        </p:txBody>
-      </p:sp>
-      <p:sp>
-        <p:nvSpPr>
-          <p:cNvPr id="19" name="TextBox 18"/>
-          <p:cNvSpPr txBox="1"/>
-          <p:nvPr/>
-        </p:nvSpPr>
-        <p:spPr>
-          <a:xfrm>
-            <a:off x="4502810" y="2962656"/>
-            <a:ext cx="3186074" cy="267716"/>
-          </a:xfrm>
-          <a:prstGeom prst="rect">
-            <a:avLst/>
-          </a:prstGeom>
-          <a:noFill/>
-        </p:spPr>
-        <p:txBody>
-          <a:bodyPr wrap="square" anchor="t" lIns="0" rIns="0" tIns="0" bIns="0">
-            <a:spAutoFit/>
-          </a:bodyPr>
-          <a:lstStyle/>
-          <a:p>
-            <a:pPr algn="l"/>
-            <a:r>
-              <a:rPr sz="1400" b="1" i="0">
-                <a:solidFill>
-                  <a:srgbClr val="1A0F5C"/>
-                </a:solidFill>
-                <a:latin typeface="Calibri"/>
-              </a:rPr>
-              <a:t>A fit, never a forecast</a:t>
-            </a:r>
-          </a:p>
-        </p:txBody>
-      </p:sp>
-      <p:sp>
-        <p:nvSpPr>
-          <p:cNvPr id="20" name="TextBox 19"/>
-          <p:cNvSpPr txBox="1"/>
-          <p:nvPr/>
-        </p:nvSpPr>
-        <p:spPr>
-          <a:xfrm>
-            <a:off x="4502810" y="3303524"/>
-            <a:ext cx="3186074" cy="399796"/>
-          </a:xfrm>
-          <a:prstGeom prst="rect">
-            <a:avLst/>
-          </a:prstGeom>
-          <a:noFill/>
-        </p:spPr>
-        <p:txBody>
-          <a:bodyPr wrap="square" anchor="t" lIns="0" rIns="0" tIns="0" bIns="0">
-            <a:spAutoFit/>
-          </a:bodyPr>
-          <a:lstStyle/>
-          <a:p>
-            <a:pPr algn="l"/>
-            <a:r>
-              <a:rPr sz="1100" b="0" i="0">
-                <a:solidFill>
-                  <a:srgbClr val="6B6690"/>
-                </a:solidFill>
-                <a:latin typeface="Calibri"/>
-              </a:rPr>
-              <a:t>Within 1.4 percent on history, and 16,400 a week off on thirteen weeks it never saw.</a:t>
-            </a:r>
-          </a:p>
-        </p:txBody>
-      </p:sp>
-      <p:sp>
-        <p:nvSpPr>
-          <p:cNvPr id="21" name="Rounded Rectangle 20"/>
+          <p:cNvPr id="10" name="TextBox 9"/>
+          <p:cNvSpPr txBox="1"/>
+          <p:nvPr/>
+        </p:nvSpPr>
+        <p:spPr>
+          <a:xfrm>
+            <a:off x="530352" y="4966208"/>
+            <a:ext cx="11130991" cy="1233424"/>
+          </a:xfrm>
+          <a:prstGeom prst="rect">
+            <a:avLst/>
+          </a:prstGeom>
+          <a:noFill/>
+        </p:spPr>
+        <p:txBody>
+          <a:bodyPr wrap="square" anchor="t" lIns="0" rIns="0" tIns="0" bIns="0">
+            <a:spAutoFit/>
+          </a:bodyPr>
+          <a:lstStyle/>
+          <a:p>
+            <a:r>
+              <a:rPr sz="1600" b="0" i="0">
+                <a:solidFill>
+                  <a:srgbClr val="1A1440"/>
+                </a:solidFill>
+                <a:latin typeface="Calibri"/>
+              </a:rPr>
+              <a:t>To finance: right growth, wrong weeks, since copied by calendar the 4 percent puts the peak on 5 October and sits 308,048 shipments short. To the vendor's sponsor: a fit of 1.4 percent, and 16,400 a week off on weeks it never saw. The rule: beat the bot on hidden weeks, place the festival, cover demand in 0.82 of weeks.</a:t>
+            </a:r>
+          </a:p>
+        </p:txBody>
+      </p:sp>
+      <p:sp>
+        <p:nvSpPr>
+          <p:cNvPr id="11" name="Oval 10"/>
           <p:cNvSpPr/>
           <p:nvPr/>
         </p:nvSpPr>
         <p:spPr>
           <a:xfrm>
-            <a:off x="8072932" y="1956816"/>
-            <a:ext cx="3588410" cy="2385568"/>
-          </a:xfrm>
-          <a:prstGeom prst="roundRect">
-            <a:avLst>
-              <a:gd name="adj" fmla="val 5000"/>
-            </a:avLst>
-          </a:prstGeom>
-          <a:gradFill rotWithShape="1">
-            <a:gsLst>
-              <a:gs pos="0">
-                <a:srgbClr val="2C1A86"/>
-              </a:gs>
-              <a:gs pos="100000">
-                <a:srgbClr val="1A0F5C"/>
-              </a:gs>
-            </a:gsLst>
-            <a:lin scaled="0" ang="16200000"/>
-          </a:gradFill>
+            <a:off x="530352" y="6492240"/>
+            <a:ext cx="64008" cy="64008"/>
+          </a:xfrm>
+          <a:prstGeom prst="ellipse">
+            <a:avLst/>
+          </a:prstGeom>
+          <a:solidFill>
+            <a:srgbClr val="CFC9EE"/>
+          </a:solidFill>
           <a:ln>
             <a:noFill/>
           </a:ln>
-          <a:effectLst>
-            <a:outerShdw blurRad="76200" dist="19050" dir="5400000" algn="bl" rotWithShape="0">
-              <a:srgbClr val="1A0F5C">
-                <a:alpha val="12000"/>
-              </a:srgbClr>
-            </a:outerShdw>
-          </a:effectLst>
+          <a:effectLst/>
         </p:spPr>
         <p:style>
           <a:lnRef idx="1">
@@ -39385,14 +38983,128 @@
       </p:sp>
       <p:sp>
         <p:nvSpPr>
-          <p:cNvPr id="22" name="Oval 21"/>
+          <p:cNvPr id="12" name="TextBox 11"/>
+          <p:cNvSpPr txBox="1"/>
+          <p:nvPr/>
+        </p:nvSpPr>
+        <p:spPr>
+          <a:xfrm>
+            <a:off x="640080" y="6437376"/>
+            <a:ext cx="1608486" cy="152146"/>
+          </a:xfrm>
+          <a:prstGeom prst="rect">
+            <a:avLst/>
+          </a:prstGeom>
+          <a:noFill/>
+        </p:spPr>
+        <p:txBody>
+          <a:bodyPr wrap="square" anchor="t" lIns="0" rIns="0" tIns="0" bIns="0">
+            <a:spAutoFit/>
+          </a:bodyPr>
+          <a:lstStyle/>
+          <a:p>
+            <a:pPr algn="l"/>
+            <a:r>
+              <a:rPr sz="700" b="0" i="0">
+                <a:solidFill>
+                  <a:srgbClr val="6B6690"/>
+                </a:solidFill>
+                <a:latin typeface="Calibri"/>
+              </a:rPr>
+              <a:t>What shape do the weeks have?</a:t>
+            </a:r>
+          </a:p>
+        </p:txBody>
+      </p:sp>
+      <p:sp>
+        <p:nvSpPr>
+          <p:cNvPr id="13" name="Oval 12"/>
           <p:cNvSpPr/>
           <p:nvPr/>
         </p:nvSpPr>
         <p:spPr>
           <a:xfrm>
-            <a:off x="8274100" y="2157984"/>
-            <a:ext cx="457200" cy="457200"/>
+            <a:off x="2340006" y="6492240"/>
+            <a:ext cx="64008" cy="64008"/>
+          </a:xfrm>
+          <a:prstGeom prst="ellipse">
+            <a:avLst/>
+          </a:prstGeom>
+          <a:solidFill>
+            <a:srgbClr val="CFC9EE"/>
+          </a:solidFill>
+          <a:ln>
+            <a:noFill/>
+          </a:ln>
+          <a:effectLst/>
+        </p:spPr>
+        <p:style>
+          <a:lnRef idx="1">
+            <a:schemeClr val="accent1"/>
+          </a:lnRef>
+          <a:fillRef idx="3">
+            <a:schemeClr val="accent1"/>
+          </a:fillRef>
+          <a:effectRef idx="2">
+            <a:schemeClr val="accent1"/>
+          </a:effectRef>
+          <a:fontRef idx="minor">
+            <a:schemeClr val="lt1"/>
+          </a:fontRef>
+        </p:style>
+        <p:txBody>
+          <a:bodyPr rtlCol="0" anchor="ctr" wrap="square"/>
+          <a:lstStyle/>
+          <a:p>
+            <a:pPr algn="ctr"/>
+          </a:p>
+        </p:txBody>
+      </p:sp>
+      <p:sp>
+        <p:nvSpPr>
+          <p:cNvPr id="14" name="TextBox 13"/>
+          <p:cNvSpPr txBox="1"/>
+          <p:nvPr/>
+        </p:nvSpPr>
+        <p:spPr>
+          <a:xfrm>
+            <a:off x="2449734" y="6437376"/>
+            <a:ext cx="1746504" cy="152146"/>
+          </a:xfrm>
+          <a:prstGeom prst="rect">
+            <a:avLst/>
+          </a:prstGeom>
+          <a:noFill/>
+        </p:spPr>
+        <p:txBody>
+          <a:bodyPr wrap="square" anchor="t" lIns="0" rIns="0" tIns="0" bIns="0">
+            <a:spAutoFit/>
+          </a:bodyPr>
+          <a:lstStyle/>
+          <a:p>
+            <a:pPr algn="l"/>
+            <a:r>
+              <a:rPr sz="700" b="0" i="0">
+                <a:solidFill>
+                  <a:srgbClr val="6B6690"/>
+                </a:solidFill>
+                <a:latin typeface="Calibri"/>
+              </a:rPr>
+              <a:t>Which rule wins on hidden weeks?</a:t>
+            </a:r>
+          </a:p>
+        </p:txBody>
+      </p:sp>
+      <p:sp>
+        <p:nvSpPr>
+          <p:cNvPr id="15" name="Oval 14"/>
+          <p:cNvSpPr/>
+          <p:nvPr/>
+        </p:nvSpPr>
+        <p:spPr>
+          <a:xfrm>
+            <a:off x="4287678" y="6492240"/>
+            <a:ext cx="64008" cy="64008"/>
           </a:xfrm>
           <a:prstGeom prst="ellipse">
             <a:avLst/>
@@ -39427,340 +39139,9 @@
           </a:p>
         </p:txBody>
       </p:sp>
-      <p:pic>
-        <p:nvPicPr>
-          <p:cNvPr id="23" name="Picture 22" descr="badge-check_df01016c75a5.png"/>
-          <p:cNvPicPr>
-            <a:picLocks noChangeAspect="1"/>
-          </p:cNvPicPr>
-          <p:nvPr/>
-        </p:nvPicPr>
-        <p:blipFill>
-          <a:blip r:embed="rId6"/>
-          <a:stretch>
-            <a:fillRect/>
-          </a:stretch>
-        </p:blipFill>
-        <p:spPr>
-          <a:xfrm>
-            <a:off x="8383828" y="2267712"/>
-            <a:ext cx="237744" cy="237744"/>
-          </a:xfrm>
-          <a:prstGeom prst="rect">
-            <a:avLst/>
-          </a:prstGeom>
-        </p:spPr>
-      </p:pic>
-      <p:sp>
-        <p:nvSpPr>
-          <p:cNvPr id="24" name="TextBox 23"/>
-          <p:cNvSpPr txBox="1"/>
-          <p:nvPr/>
-        </p:nvSpPr>
-        <p:spPr>
-          <a:xfrm>
-            <a:off x="8274100" y="2724912"/>
-            <a:ext cx="3186074" cy="160401"/>
-          </a:xfrm>
-          <a:prstGeom prst="rect">
-            <a:avLst/>
-          </a:prstGeom>
-          <a:noFill/>
-        </p:spPr>
-        <p:txBody>
-          <a:bodyPr wrap="square" anchor="t" lIns="0" rIns="0" tIns="0" bIns="0">
-            <a:spAutoFit/>
-          </a:bodyPr>
-          <a:lstStyle/>
-          <a:p>
-            <a:pPr algn="l"/>
-            <a:r>
-              <a:rPr sz="750" b="1" i="0" spc="250">
-                <a:solidFill>
-                  <a:srgbClr val="D9A7FF"/>
-                </a:solidFill>
-                <a:latin typeface="Calibri"/>
-              </a:rPr>
-              <a:t>THE RULE</a:t>
-            </a:r>
-          </a:p>
-        </p:txBody>
-      </p:sp>
-      <p:sp>
-        <p:nvSpPr>
-          <p:cNvPr id="25" name="TextBox 24"/>
-          <p:cNvSpPr txBox="1"/>
-          <p:nvPr/>
-        </p:nvSpPr>
-        <p:spPr>
-          <a:xfrm>
-            <a:off x="8274100" y="2962656"/>
-            <a:ext cx="3186074" cy="498856"/>
-          </a:xfrm>
-          <a:prstGeom prst="rect">
-            <a:avLst/>
-          </a:prstGeom>
-          <a:noFill/>
-        </p:spPr>
-        <p:txBody>
-          <a:bodyPr wrap="square" anchor="t" lIns="0" rIns="0" tIns="0" bIns="0">
-            <a:spAutoFit/>
-          </a:bodyPr>
-          <a:lstStyle/>
-          <a:p>
-            <a:pPr algn="l"/>
-            <a:r>
-              <a:rPr sz="1400" b="1" i="0">
-                <a:solidFill>
-                  <a:srgbClr val="FFFFFF"/>
-                </a:solidFill>
-                <a:latin typeface="Calibri"/>
-              </a:rPr>
-              <a:t>Beat the bot, then place the festival</a:t>
-            </a:r>
-          </a:p>
-        </p:txBody>
-      </p:sp>
-      <p:sp>
-        <p:nvSpPr>
-          <p:cNvPr id="26" name="TextBox 25"/>
-          <p:cNvSpPr txBox="1"/>
-          <p:nvPr/>
-        </p:nvSpPr>
-        <p:spPr>
-          <a:xfrm>
-            <a:off x="8274100" y="3534664"/>
-            <a:ext cx="3186074" cy="581406"/>
-          </a:xfrm>
-          <a:prstGeom prst="rect">
-            <a:avLst/>
-          </a:prstGeom>
-          <a:noFill/>
-        </p:spPr>
-        <p:txBody>
-          <a:bodyPr wrap="square" anchor="t" lIns="0" rIns="0" tIns="0" bIns="0">
-            <a:spAutoFit/>
-          </a:bodyPr>
-          <a:lstStyle/>
-          <a:p>
-            <a:pPr algn="l"/>
-            <a:r>
-              <a:rPr sz="1100" b="0" i="0">
-                <a:solidFill>
-                  <a:srgbClr val="CFC9EE"/>
-                </a:solidFill>
-                <a:latin typeface="Calibri"/>
-              </a:rPr>
-              <a:t>Score on hidden weeks in shipments and rupees; copy by distance from Diwali; cover demand in 0.82 of weeks.</a:t>
-            </a:r>
-          </a:p>
-        </p:txBody>
-      </p:sp>
-      <p:sp>
-        <p:nvSpPr>
-          <p:cNvPr id="27" name="Oval 26"/>
-          <p:cNvSpPr/>
-          <p:nvPr/>
-        </p:nvSpPr>
-        <p:spPr>
-          <a:xfrm>
-            <a:off x="530352" y="6492240"/>
-            <a:ext cx="64008" cy="64008"/>
-          </a:xfrm>
-          <a:prstGeom prst="ellipse">
-            <a:avLst/>
-          </a:prstGeom>
-          <a:solidFill>
-            <a:srgbClr val="CFC9EE"/>
-          </a:solidFill>
-          <a:ln>
-            <a:noFill/>
-          </a:ln>
-          <a:effectLst/>
-        </p:spPr>
-        <p:style>
-          <a:lnRef idx="1">
-            <a:schemeClr val="accent1"/>
-          </a:lnRef>
-          <a:fillRef idx="3">
-            <a:schemeClr val="accent1"/>
-          </a:fillRef>
-          <a:effectRef idx="2">
-            <a:schemeClr val="accent1"/>
-          </a:effectRef>
-          <a:fontRef idx="minor">
-            <a:schemeClr val="lt1"/>
-          </a:fontRef>
-        </p:style>
-        <p:txBody>
-          <a:bodyPr rtlCol="0" anchor="ctr" wrap="square"/>
-          <a:lstStyle/>
-          <a:p>
-            <a:pPr algn="ctr"/>
-          </a:p>
-        </p:txBody>
-      </p:sp>
-      <p:sp>
-        <p:nvSpPr>
-          <p:cNvPr id="28" name="TextBox 27"/>
-          <p:cNvSpPr txBox="1"/>
-          <p:nvPr/>
-        </p:nvSpPr>
-        <p:spPr>
-          <a:xfrm>
-            <a:off x="640080" y="6437376"/>
-            <a:ext cx="1608486" cy="152146"/>
-          </a:xfrm>
-          <a:prstGeom prst="rect">
-            <a:avLst/>
-          </a:prstGeom>
-          <a:noFill/>
-        </p:spPr>
-        <p:txBody>
-          <a:bodyPr wrap="square" anchor="t" lIns="0" rIns="0" tIns="0" bIns="0">
-            <a:spAutoFit/>
-          </a:bodyPr>
-          <a:lstStyle/>
-          <a:p>
-            <a:pPr algn="l"/>
-            <a:r>
-              <a:rPr sz="700" b="0" i="0">
-                <a:solidFill>
-                  <a:srgbClr val="6B6690"/>
-                </a:solidFill>
-                <a:latin typeface="Calibri"/>
-              </a:rPr>
-              <a:t>What shape do the weeks have?</a:t>
-            </a:r>
-          </a:p>
-        </p:txBody>
-      </p:sp>
-      <p:sp>
-        <p:nvSpPr>
-          <p:cNvPr id="29" name="Oval 28"/>
-          <p:cNvSpPr/>
-          <p:nvPr/>
-        </p:nvSpPr>
-        <p:spPr>
-          <a:xfrm>
-            <a:off x="2340006" y="6492240"/>
-            <a:ext cx="64008" cy="64008"/>
-          </a:xfrm>
-          <a:prstGeom prst="ellipse">
-            <a:avLst/>
-          </a:prstGeom>
-          <a:solidFill>
-            <a:srgbClr val="CFC9EE"/>
-          </a:solidFill>
-          <a:ln>
-            <a:noFill/>
-          </a:ln>
-          <a:effectLst/>
-        </p:spPr>
-        <p:style>
-          <a:lnRef idx="1">
-            <a:schemeClr val="accent1"/>
-          </a:lnRef>
-          <a:fillRef idx="3">
-            <a:schemeClr val="accent1"/>
-          </a:fillRef>
-          <a:effectRef idx="2">
-            <a:schemeClr val="accent1"/>
-          </a:effectRef>
-          <a:fontRef idx="minor">
-            <a:schemeClr val="lt1"/>
-          </a:fontRef>
-        </p:style>
-        <p:txBody>
-          <a:bodyPr rtlCol="0" anchor="ctr" wrap="square"/>
-          <a:lstStyle/>
-          <a:p>
-            <a:pPr algn="ctr"/>
-          </a:p>
-        </p:txBody>
-      </p:sp>
-      <p:sp>
-        <p:nvSpPr>
-          <p:cNvPr id="30" name="TextBox 29"/>
-          <p:cNvSpPr txBox="1"/>
-          <p:nvPr/>
-        </p:nvSpPr>
-        <p:spPr>
-          <a:xfrm>
-            <a:off x="2449734" y="6437376"/>
-            <a:ext cx="1746504" cy="152146"/>
-          </a:xfrm>
-          <a:prstGeom prst="rect">
-            <a:avLst/>
-          </a:prstGeom>
-          <a:noFill/>
-        </p:spPr>
-        <p:txBody>
-          <a:bodyPr wrap="square" anchor="t" lIns="0" rIns="0" tIns="0" bIns="0">
-            <a:spAutoFit/>
-          </a:bodyPr>
-          <a:lstStyle/>
-          <a:p>
-            <a:pPr algn="l"/>
-            <a:r>
-              <a:rPr sz="700" b="0" i="0">
-                <a:solidFill>
-                  <a:srgbClr val="6B6690"/>
-                </a:solidFill>
-                <a:latin typeface="Calibri"/>
-              </a:rPr>
-              <a:t>Which rule wins on hidden weeks?</a:t>
-            </a:r>
-          </a:p>
-        </p:txBody>
-      </p:sp>
-      <p:sp>
-        <p:nvSpPr>
-          <p:cNvPr id="31" name="Oval 30"/>
-          <p:cNvSpPr/>
-          <p:nvPr/>
-        </p:nvSpPr>
-        <p:spPr>
-          <a:xfrm>
-            <a:off x="4287678" y="6492240"/>
-            <a:ext cx="64008" cy="64008"/>
-          </a:xfrm>
-          <a:prstGeom prst="ellipse">
-            <a:avLst/>
-          </a:prstGeom>
-          <a:solidFill>
-            <a:srgbClr val="5B3FD6"/>
-          </a:solidFill>
-          <a:ln>
-            <a:noFill/>
-          </a:ln>
-          <a:effectLst/>
-        </p:spPr>
-        <p:style>
-          <a:lnRef idx="1">
-            <a:schemeClr val="accent1"/>
-          </a:lnRef>
-          <a:fillRef idx="3">
-            <a:schemeClr val="accent1"/>
-          </a:fillRef>
-          <a:effectRef idx="2">
-            <a:schemeClr val="accent1"/>
-          </a:effectRef>
-          <a:fontRef idx="minor">
-            <a:schemeClr val="lt1"/>
-          </a:fontRef>
-        </p:style>
-        <p:txBody>
-          <a:bodyPr rtlCol="0" anchor="ctr" wrap="square"/>
-          <a:lstStyle/>
-          <a:p>
-            <a:pPr algn="ctr"/>
-          </a:p>
-        </p:txBody>
-      </p:sp>
-      <p:sp>
-        <p:nvSpPr>
-          <p:cNvPr id="32" name="TextBox 31"/>
+      <p:sp>
+        <p:nvSpPr>
+          <p:cNvPr id="16" name="TextBox 15"/>
           <p:cNvSpPr txBox="1"/>
           <p:nvPr/>
         </p:nvSpPr>
@@ -39795,7 +39176,7 @@
       </p:sp>
       <p:sp>
         <p:nvSpPr>
-          <p:cNvPr id="33" name="TextBox 32"/>
+          <p:cNvPr id="17" name="TextBox 16"/>
           <p:cNvSpPr txBox="1"/>
           <p:nvPr/>
         </p:nvSpPr>

--- a/content/W04/D5/slides/C2_W04_D05_half1_STUDENT.pptx
+++ b/content/W04/D5/slides/C2_W04_D05_half1_STUDENT.pptx
@@ -43605,7 +43605,7 @@
         </p:nvGraphicFramePr>
         <p:xfrm>
           <a:off x="530352" y="1956816"/>
-          <a:ext cx="11130990" cy="3541776"/>
+          <a:ext cx="11130990" cy="3783584"/>
         </p:xfrm>
         <a:graphic>
           <a:graphicData uri="http://schemas.openxmlformats.org/drawingml/2006/table">
@@ -43890,7 +43890,7 @@
                   </a:tcPr>
                 </a:tc>
               </a:tr>
-              <a:tr h="1337056">
+              <a:tr h="1578864">
                 <a:tc>
                   <a:txBody>
                     <a:bodyPr/>
@@ -43925,7 +43925,7 @@
                           </a:solidFill>
                           <a:latin typeface="Calibri"/>
                         </a:rPr>
-                        <a:t>From five weeks before Diwali's week to four after, the week at the same distance from last year's Diwali; otherwise the same calendar week; then plus 4 percent, the growth the two years show</a:t>
+                        <a:t>From five weeks before Diwali's week to four after, the week at the same distance from last year's Diwali; otherwise the same calendar week; then plus 4 percent, the growth the training weeks show</a:t>
                       </a:r>
                     </a:p>
                   </a:txBody>
